--- a/eval/out/agdev_demo.pptx
+++ b/eval/out/agdev_demo.pptx
@@ -3086,6 +3086,14 @@
 <file path=ppt/slides/slide1.xml><?xml version="1.0" encoding="utf-8"?>
 <p:sld xmlns:a="http://schemas.openxmlformats.org/drawingml/2006/main" xmlns:p="http://schemas.openxmlformats.org/presentationml/2006/main" xmlns:r="http://schemas.openxmlformats.org/officeDocument/2006/relationships">
   <p:cSld>
+    <p:bg>
+      <p:bgPr>
+        <a:solidFill>
+          <a:srgbClr val="FFFFFF"/>
+        </a:solidFill>
+        <a:effectLst/>
+      </p:bgPr>
+    </p:bg>
     <p:spTree>
       <p:nvGrpSpPr>
         <p:cNvPr id="1" name=""/>
@@ -3428,6 +3436,14 @@
 <file path=ppt/slides/slide2.xml><?xml version="1.0" encoding="utf-8"?>
 <p:sld xmlns:a="http://schemas.openxmlformats.org/drawingml/2006/main" xmlns:p="http://schemas.openxmlformats.org/presentationml/2006/main" xmlns:r="http://schemas.openxmlformats.org/officeDocument/2006/relationships">
   <p:cSld>
+    <p:bg>
+      <p:bgPr>
+        <a:solidFill>
+          <a:srgbClr val="FFFFFF"/>
+        </a:solidFill>
+        <a:effectLst/>
+      </p:bgPr>
+    </p:bg>
     <p:spTree>
       <p:nvGrpSpPr>
         <p:cNvPr id="1" name=""/>
@@ -4938,6 +4954,14 @@
 <file path=ppt/slides/slide3.xml><?xml version="1.0" encoding="utf-8"?>
 <p:sld xmlns:a="http://schemas.openxmlformats.org/drawingml/2006/main" xmlns:p="http://schemas.openxmlformats.org/presentationml/2006/main" xmlns:r="http://schemas.openxmlformats.org/officeDocument/2006/relationships">
   <p:cSld>
+    <p:bg>
+      <p:bgPr>
+        <a:solidFill>
+          <a:srgbClr val="FFFFFF"/>
+        </a:solidFill>
+        <a:effectLst/>
+      </p:bgPr>
+    </p:bg>
     <p:spTree>
       <p:nvGrpSpPr>
         <p:cNvPr id="1" name=""/>
@@ -5213,6 +5237,14 @@
 <file path=ppt/slides/slide4.xml><?xml version="1.0" encoding="utf-8"?>
 <p:sld xmlns:a="http://schemas.openxmlformats.org/drawingml/2006/main" xmlns:p="http://schemas.openxmlformats.org/presentationml/2006/main" xmlns:r="http://schemas.openxmlformats.org/officeDocument/2006/relationships">
   <p:cSld>
+    <p:bg>
+      <p:bgPr>
+        <a:solidFill>
+          <a:srgbClr val="FFFFFF"/>
+        </a:solidFill>
+        <a:effectLst/>
+      </p:bgPr>
+    </p:bg>
     <p:spTree>
       <p:nvGrpSpPr>
         <p:cNvPr id="1" name=""/>
@@ -12798,6 +12830,14 @@
 <file path=ppt/slides/slide5.xml><?xml version="1.0" encoding="utf-8"?>
 <p:sld xmlns:a="http://schemas.openxmlformats.org/drawingml/2006/main" xmlns:p="http://schemas.openxmlformats.org/presentationml/2006/main" xmlns:r="http://schemas.openxmlformats.org/officeDocument/2006/relationships">
   <p:cSld>
+    <p:bg>
+      <p:bgPr>
+        <a:solidFill>
+          <a:srgbClr val="FFFFFF"/>
+        </a:solidFill>
+        <a:effectLst/>
+      </p:bgPr>
+    </p:bg>
     <p:spTree>
       <p:nvGrpSpPr>
         <p:cNvPr id="1" name=""/>
@@ -21026,6 +21066,14 @@
 <file path=ppt/slides/slide6.xml><?xml version="1.0" encoding="utf-8"?>
 <p:sld xmlns:a="http://schemas.openxmlformats.org/drawingml/2006/main" xmlns:p="http://schemas.openxmlformats.org/presentationml/2006/main" xmlns:r="http://schemas.openxmlformats.org/officeDocument/2006/relationships">
   <p:cSld>
+    <p:bg>
+      <p:bgPr>
+        <a:solidFill>
+          <a:srgbClr val="FFFFFF"/>
+        </a:solidFill>
+        <a:effectLst/>
+      </p:bgPr>
+    </p:bg>
     <p:spTree>
       <p:nvGrpSpPr>
         <p:cNvPr id="1" name=""/>

--- a/eval/out/agdev_demo.pptx
+++ b/eval/out/agdev_demo.pptx
@@ -3109,14 +3109,14 @@
         </p:nvSpPr>
         <p:spPr>
           <a:xfrm>
-            <a:off x="0" y="2286000"/>
-            <a:ext cx="12192000" cy="54864"/>
+            <a:off x="0" y="0"/>
+            <a:ext cx="12192000" cy="6858000"/>
           </a:xfrm>
           <a:prstGeom prst="rect">
             <a:avLst/>
           </a:prstGeom>
           <a:solidFill>
-            <a:srgbClr val="C55A11"/>
+            <a:srgbClr val="16294A"/>
           </a:solidFill>
           <a:ln>
             <a:noFill/>
@@ -3153,8 +3153,8 @@
         </p:nvSpPr>
         <p:spPr>
           <a:xfrm>
-            <a:off x="914400" y="2606040"/>
-            <a:ext cx="10363200" cy="865808"/>
+            <a:off x="9265920" y="320040"/>
+            <a:ext cx="2560320" cy="274320"/>
           </a:xfrm>
           <a:prstGeom prst="rect">
             <a:avLst/>
@@ -3167,9 +3167,51 @@
           </a:bodyPr>
           <a:lstStyle/>
           <a:p>
+            <a:pPr algn="r">
+              <a:spcBef>
+                <a:spcPts val="0"/>
+              </a:spcBef>
+              <a:spcAft>
+                <a:spcPts val="0"/>
+              </a:spcAft>
+            </a:pPr>
+            <a:r>
+              <a:rPr sz="900" b="0" i="0">
+                <a:solidFill>
+                  <a:srgbClr val="FFFFFF"/>
+                </a:solidFill>
+                <a:latin typeface="Segoe UI"/>
+              </a:rPr>
+              <a:t>6 July 2026</a:t>
+            </a:r>
+          </a:p>
+        </p:txBody>
+      </p:sp>
+      <p:sp>
+        <p:nvSpPr>
+          <p:cNvPr id="4" name="TextBox 3"/>
+          <p:cNvSpPr txBox="1"/>
+          <p:nvPr/>
+        </p:nvSpPr>
+        <p:spPr>
+          <a:xfrm>
+            <a:off x="1005840" y="1371600"/>
+            <a:ext cx="10180320" cy="1154410"/>
+          </a:xfrm>
+          <a:prstGeom prst="rect">
+            <a:avLst/>
+          </a:prstGeom>
+          <a:noFill/>
+        </p:spPr>
+        <p:txBody>
+          <a:bodyPr wrap="square" lIns="0" rIns="0" tIns="0" bIns="0" anchor="t">
+            <a:noAutofit/>
+          </a:bodyPr>
+          <a:lstStyle/>
+          <a:p>
             <a:pPr algn="l">
               <a:lnSpc>
-                <a:spcPts val="3408"/>
+                <a:spcPts val="4544"/>
               </a:lnSpc>
               <a:spcBef>
                 <a:spcPts val="0"/>
@@ -3179,64 +3221,46 @@
               </a:spcAft>
             </a:pPr>
             <a:r>
-              <a:rPr sz="3000" b="0" i="0">
-                <a:solidFill>
-                  <a:srgbClr val="1F3864"/>
+              <a:rPr sz="4000" b="0" i="0">
+                <a:solidFill>
+                  <a:srgbClr val="FFFFFF"/>
                 </a:solidFill>
                 <a:latin typeface="Georgia"/>
               </a:rPr>
               <a:t>Agricultural </a:t>
             </a:r>
             <a:r>
-              <a:rPr sz="3000" b="0" i="0">
-                <a:solidFill>
-                  <a:srgbClr val="1F3864"/>
+              <a:rPr sz="4000" b="0" i="0">
+                <a:solidFill>
+                  <a:srgbClr val="FFFFFF"/>
                 </a:solidFill>
                 <a:latin typeface="Georgia"/>
               </a:rPr>
               <a:t>Development </a:t>
             </a:r>
             <a:r>
-              <a:rPr sz="3000" b="0" i="0">
-                <a:solidFill>
-                  <a:srgbClr val="1F3864"/>
+              <a:rPr sz="4000" b="0" i="0">
+                <a:solidFill>
+                  <a:srgbClr val="FFFFFF"/>
                 </a:solidFill>
                 <a:latin typeface="Georgia"/>
               </a:rPr>
               <a:t>in </a:t>
             </a:r>
             <a:r>
-              <a:rPr sz="3000" b="0" i="0">
-                <a:solidFill>
-                  <a:srgbClr val="1F3864"/>
+              <a:rPr sz="4000" b="0" i="0">
+                <a:solidFill>
+                  <a:srgbClr val="FFFFFF"/>
                 </a:solidFill>
                 <a:latin typeface="Georgia"/>
               </a:rPr>
-              <a:t>India: </a:t>
-            </a:r>
-            <a:r>
-              <a:rPr sz="3000" b="0" i="0">
-                <a:solidFill>
-                  <a:srgbClr val="1F3864"/>
-                </a:solidFill>
-                <a:latin typeface="Georgia"/>
-              </a:rPr>
-              <a:t>2024-25 </a:t>
-            </a:r>
-            <a:r>
-              <a:rPr sz="3000" b="0" i="0">
-                <a:solidFill>
-                  <a:srgbClr val="1F3864"/>
-                </a:solidFill>
-                <a:latin typeface="Georgia"/>
-              </a:rPr>
-              <a:t>Impact</a:t>
+              <a:t>India:</a:t>
             </a:r>
           </a:p>
           <a:p>
             <a:pPr algn="l">
               <a:lnSpc>
-                <a:spcPts val="3408"/>
+                <a:spcPts val="4544"/>
               </a:lnSpc>
               <a:spcBef>
                 <a:spcPts val="0"/>
@@ -3246,12 +3270,30 @@
               </a:spcAft>
             </a:pPr>
             <a:r>
-              <a:rPr sz="3000" b="0" i="0">
-                <a:solidFill>
-                  <a:srgbClr val="1F3864"/>
+              <a:rPr sz="4000" b="0" i="0">
+                <a:solidFill>
+                  <a:srgbClr val="FFFFFF"/>
                 </a:solidFill>
                 <a:latin typeface="Georgia"/>
               </a:rPr>
+              <a:t>2024-25 </a:t>
+            </a:r>
+            <a:r>
+              <a:rPr sz="4000" b="0" i="0">
+                <a:solidFill>
+                  <a:srgbClr val="FFFFFF"/>
+                </a:solidFill>
+                <a:latin typeface="Georgia"/>
+              </a:rPr>
+              <a:t>Impact </a:t>
+            </a:r>
+            <a:r>
+              <a:rPr sz="4000" b="0" i="0">
+                <a:solidFill>
+                  <a:srgbClr val="FFFFFF"/>
+                </a:solidFill>
+                <a:latin typeface="Georgia"/>
+              </a:rPr>
               <a:t>Review</a:t>
             </a:r>
           </a:p>
@@ -3259,14 +3301,14 @@
       </p:sp>
       <p:sp>
         <p:nvSpPr>
-          <p:cNvPr id="4" name="TextBox 3"/>
+          <p:cNvPr id="5" name="TextBox 4"/>
           <p:cNvSpPr txBox="1"/>
           <p:nvPr/>
         </p:nvSpPr>
         <p:spPr>
           <a:xfrm>
-            <a:off x="914400" y="3609008"/>
-            <a:ext cx="10363200" cy="236488"/>
+            <a:off x="1005840" y="2635738"/>
+            <a:ext cx="10180320" cy="236488"/>
           </a:xfrm>
           <a:prstGeom prst="rect">
             <a:avLst/>
@@ -3293,7 +3335,7 @@
             <a:r>
               <a:rPr sz="1400" b="0" i="0">
                 <a:solidFill>
-                  <a:srgbClr val="757575"/>
+                  <a:srgbClr val="FFFFFF"/>
                 </a:solidFill>
                 <a:latin typeface="Segoe UI"/>
               </a:rPr>
@@ -3302,7 +3344,7 @@
             <a:r>
               <a:rPr sz="1400" b="0" i="0">
                 <a:solidFill>
-                  <a:srgbClr val="757575"/>
+                  <a:srgbClr val="FFFFFF"/>
                 </a:solidFill>
                 <a:latin typeface="Segoe UI"/>
               </a:rPr>
@@ -3311,7 +3353,7 @@
             <a:r>
               <a:rPr sz="1400" b="0" i="0">
                 <a:solidFill>
-                  <a:srgbClr val="757575"/>
+                  <a:srgbClr val="FFFFFF"/>
                 </a:solidFill>
                 <a:latin typeface="Segoe UI"/>
               </a:rPr>
@@ -3320,7 +3362,7 @@
             <a:r>
               <a:rPr sz="1400" b="0" i="0">
                 <a:solidFill>
-                  <a:srgbClr val="757575"/>
+                  <a:srgbClr val="FFFFFF"/>
                 </a:solidFill>
                 <a:latin typeface="Segoe UI"/>
               </a:rPr>
@@ -3329,7 +3371,7 @@
             <a:r>
               <a:rPr sz="1400" b="0" i="0">
                 <a:solidFill>
-                  <a:srgbClr val="757575"/>
+                  <a:srgbClr val="FFFFFF"/>
                 </a:solidFill>
                 <a:latin typeface="Segoe UI"/>
               </a:rPr>
@@ -3338,7 +3380,7 @@
             <a:r>
               <a:rPr sz="1400" b="0" i="0">
                 <a:solidFill>
-                  <a:srgbClr val="757575"/>
+                  <a:srgbClr val="FFFFFF"/>
                 </a:solidFill>
                 <a:latin typeface="Segoe UI"/>
               </a:rPr>
@@ -3347,7 +3389,7 @@
             <a:r>
               <a:rPr sz="1400" b="0" i="0">
                 <a:solidFill>
-                  <a:srgbClr val="757575"/>
+                  <a:srgbClr val="FFFFFF"/>
                 </a:solidFill>
                 <a:latin typeface="Segoe UI"/>
               </a:rPr>
@@ -3356,7 +3398,7 @@
             <a:r>
               <a:rPr sz="1400" b="0" i="0">
                 <a:solidFill>
-                  <a:srgbClr val="757575"/>
+                  <a:srgbClr val="FFFFFF"/>
                 </a:solidFill>
                 <a:latin typeface="Segoe UI"/>
               </a:rPr>
@@ -3365,7 +3407,7 @@
             <a:r>
               <a:rPr sz="1400" b="0" i="0">
                 <a:solidFill>
-                  <a:srgbClr val="757575"/>
+                  <a:srgbClr val="FFFFFF"/>
                 </a:solidFill>
                 <a:latin typeface="Segoe UI"/>
               </a:rPr>
@@ -3374,7 +3416,7 @@
             <a:r>
               <a:rPr sz="1400" b="0" i="0">
                 <a:solidFill>
-                  <a:srgbClr val="757575"/>
+                  <a:srgbClr val="FFFFFF"/>
                 </a:solidFill>
                 <a:latin typeface="Segoe UI"/>
               </a:rPr>
@@ -3385,14 +3427,14 @@
       </p:sp>
       <p:sp>
         <p:nvSpPr>
-          <p:cNvPr id="5" name="TextBox 4"/>
+          <p:cNvPr id="6" name="TextBox 5"/>
           <p:cNvSpPr txBox="1"/>
           <p:nvPr/>
         </p:nvSpPr>
         <p:spPr>
           <a:xfrm>
-            <a:off x="914400" y="6035040"/>
-            <a:ext cx="10363200" cy="274320"/>
+            <a:off x="1005840" y="4572000"/>
+            <a:ext cx="10180320" cy="548640"/>
           </a:xfrm>
           <a:prstGeom prst="rect">
             <a:avLst/>
@@ -3416,11 +3458,11 @@
             <a:r>
               <a:rPr sz="900" b="0" i="0">
                 <a:solidFill>
-                  <a:srgbClr val="757575"/>
-                </a:solidFill>
-                <a:latin typeface="Segoe UI"/>
-              </a:rPr>
-              <a:t>6 July 2026 | DeckEngine Demo</a:t>
+                  <a:srgbClr val="FFFFFF"/>
+                </a:solidFill>
+                <a:latin typeface="Segoe UI"/>
+              </a:rPr>
+              <a:t>DeckEngine Demo</a:t>
             </a:r>
           </a:p>
         </p:txBody>
@@ -4978,13 +5020,13 @@
         <p:spPr>
           <a:xfrm>
             <a:off x="0" y="0"/>
-            <a:ext cx="164592" cy="6858000"/>
+            <a:ext cx="12192000" cy="6858000"/>
           </a:xfrm>
           <a:prstGeom prst="rect">
             <a:avLst/>
           </a:prstGeom>
           <a:solidFill>
-            <a:srgbClr val="1F3864"/>
+            <a:srgbClr val="C55A11"/>
           </a:solidFill>
           <a:ln>
             <a:noFill/>
@@ -5021,8 +5063,8 @@
         </p:nvSpPr>
         <p:spPr>
           <a:xfrm>
-            <a:off x="914400" y="1463040"/>
-            <a:ext cx="10180320" cy="731520"/>
+            <a:off x="1371600" y="1600200"/>
+            <a:ext cx="9448800" cy="777240"/>
           </a:xfrm>
           <a:prstGeom prst="rect">
             <a:avLst/>
@@ -5035,7 +5077,7 @@
           </a:bodyPr>
           <a:lstStyle/>
           <a:p>
-            <a:pPr algn="l">
+            <a:pPr algn="ctr">
               <a:spcBef>
                 <a:spcPts val="0"/>
               </a:spcBef>
@@ -5046,7 +5088,7 @@
             <a:r>
               <a:rPr sz="4000" b="1" i="0">
                 <a:solidFill>
-                  <a:srgbClr val="C55A11"/>
+                  <a:srgbClr val="FFFFFF"/>
                 </a:solidFill>
                 <a:latin typeface="Georgia"/>
               </a:rPr>
@@ -5063,8 +5105,8 @@
         </p:nvSpPr>
         <p:spPr>
           <a:xfrm>
-            <a:off x="914400" y="2286000"/>
-            <a:ext cx="10180320" cy="375183"/>
+            <a:off x="1371600" y="2468880"/>
+            <a:ext cx="9448800" cy="432904"/>
           </a:xfrm>
           <a:prstGeom prst="rect">
             <a:avLst/>
@@ -5077,9 +5119,9 @@
           </a:bodyPr>
           <a:lstStyle/>
           <a:p>
-            <a:pPr algn="l">
+            <a:pPr algn="ctr">
               <a:lnSpc>
-                <a:spcPts val="2954"/>
+                <a:spcPts val="3408"/>
               </a:lnSpc>
               <a:spcBef>
                 <a:spcPts val="0"/>
@@ -5089,18 +5131,18 @@
               </a:spcAft>
             </a:pPr>
             <a:r>
-              <a:rPr sz="2600" b="0" i="0">
-                <a:solidFill>
-                  <a:srgbClr val="1F3864"/>
+              <a:rPr sz="3000" b="0" i="0">
+                <a:solidFill>
+                  <a:srgbClr val="FFFFFF"/>
                 </a:solidFill>
                 <a:latin typeface="Georgia"/>
               </a:rPr>
               <a:t>State-level </a:t>
             </a:r>
             <a:r>
-              <a:rPr sz="2600" b="0" i="0">
-                <a:solidFill>
-                  <a:srgbClr val="1F3864"/>
+              <a:rPr sz="3000" b="0" i="0">
+                <a:solidFill>
+                  <a:srgbClr val="FFFFFF"/>
                 </a:solidFill>
                 <a:latin typeface="Georgia"/>
               </a:rPr>
@@ -5117,8 +5159,8 @@
         </p:nvSpPr>
         <p:spPr>
           <a:xfrm>
-            <a:off x="914400" y="2752623"/>
-            <a:ext cx="10180320" cy="236488"/>
+            <a:off x="1371600" y="2993224"/>
+            <a:ext cx="9448800" cy="236488"/>
           </a:xfrm>
           <a:prstGeom prst="rect">
             <a:avLst/>
@@ -5131,7 +5173,7 @@
           </a:bodyPr>
           <a:lstStyle/>
           <a:p>
-            <a:pPr algn="l">
+            <a:pPr algn="ctr">
               <a:lnSpc>
                 <a:spcPts val="1862"/>
               </a:lnSpc>
@@ -5145,7 +5187,7 @@
             <a:r>
               <a:rPr sz="1400" b="0" i="0">
                 <a:solidFill>
-                  <a:srgbClr val="757575"/>
+                  <a:srgbClr val="FFFFFF"/>
                 </a:solidFill>
                 <a:latin typeface="Segoe UI"/>
               </a:rPr>
@@ -5154,7 +5196,7 @@
             <a:r>
               <a:rPr sz="1400" b="0" i="0">
                 <a:solidFill>
-                  <a:srgbClr val="757575"/>
+                  <a:srgbClr val="FFFFFF"/>
                 </a:solidFill>
                 <a:latin typeface="Segoe UI"/>
               </a:rPr>
@@ -5163,7 +5205,7 @@
             <a:r>
               <a:rPr sz="1400" b="0" i="0">
                 <a:solidFill>
-                  <a:srgbClr val="757575"/>
+                  <a:srgbClr val="FFFFFF"/>
                 </a:solidFill>
                 <a:latin typeface="Segoe UI"/>
               </a:rPr>
@@ -5172,7 +5214,7 @@
             <a:r>
               <a:rPr sz="1400" b="0" i="0">
                 <a:solidFill>
-                  <a:srgbClr val="757575"/>
+                  <a:srgbClr val="FFFFFF"/>
                 </a:solidFill>
                 <a:latin typeface="Segoe UI"/>
               </a:rPr>
@@ -5181,7 +5223,7 @@
             <a:r>
               <a:rPr sz="1400" b="0" i="0">
                 <a:solidFill>
-                  <a:srgbClr val="757575"/>
+                  <a:srgbClr val="FFFFFF"/>
                 </a:solidFill>
                 <a:latin typeface="Segoe UI"/>
               </a:rPr>
@@ -5190,7 +5232,7 @@
             <a:r>
               <a:rPr sz="1400" b="0" i="0">
                 <a:solidFill>
-                  <a:srgbClr val="757575"/>
+                  <a:srgbClr val="FFFFFF"/>
                 </a:solidFill>
                 <a:latin typeface="Segoe UI"/>
               </a:rPr>
@@ -5199,7 +5241,7 @@
             <a:r>
               <a:rPr sz="1400" b="0" i="0">
                 <a:solidFill>
-                  <a:srgbClr val="757575"/>
+                  <a:srgbClr val="FFFFFF"/>
                 </a:solidFill>
                 <a:latin typeface="Segoe UI"/>
               </a:rPr>
@@ -5208,7 +5250,7 @@
             <a:r>
               <a:rPr sz="1400" b="0" i="0">
                 <a:solidFill>
-                  <a:srgbClr val="757575"/>
+                  <a:srgbClr val="FFFFFF"/>
                 </a:solidFill>
                 <a:latin typeface="Segoe UI"/>
               </a:rPr>
@@ -5217,7 +5259,7 @@
             <a:r>
               <a:rPr sz="1400" b="0" i="0">
                 <a:solidFill>
-                  <a:srgbClr val="757575"/>
+                  <a:srgbClr val="FFFFFF"/>
                 </a:solidFill>
                 <a:latin typeface="Segoe UI"/>
               </a:rPr>

--- a/eval/out/agdev_demo.pptx
+++ b/eval/out/agdev_demo.pptx
@@ -21269,17 +21269,63 @@
       </p:sp>
       <p:sp>
         <p:nvSpPr>
-          <p:cNvPr id="3" name="Oval 2"/>
+          <p:cNvPr id="3" name="Rectangle 2"/>
           <p:cNvSpPr/>
           <p:nvPr/>
         </p:nvSpPr>
         <p:spPr>
           <a:xfrm>
-            <a:off x="411480" y="1463040"/>
-            <a:ext cx="384048" cy="384048"/>
-          </a:xfrm>
-          <a:prstGeom prst="ellipse">
-            <a:avLst/>
+            <a:off x="411480" y="1099333"/>
+            <a:ext cx="11369040" cy="548640"/>
+          </a:xfrm>
+          <a:prstGeom prst="rect">
+            <a:avLst/>
+          </a:prstGeom>
+          <a:solidFill>
+            <a:srgbClr val="F2F3F5"/>
+          </a:solidFill>
+          <a:ln>
+            <a:noFill/>
+          </a:ln>
+          <a:effectLst/>
+        </p:spPr>
+        <p:style>
+          <a:lnRef idx="1">
+            <a:schemeClr val="accent1"/>
+          </a:lnRef>
+          <a:fillRef idx="3">
+            <a:schemeClr val="accent1"/>
+          </a:fillRef>
+          <a:effectRef idx="2">
+            <a:schemeClr val="accent1"/>
+          </a:effectRef>
+          <a:fontRef idx="minor">
+            <a:schemeClr val="lt1"/>
+          </a:fontRef>
+        </p:style>
+        <p:txBody>
+          <a:bodyPr rtlCol="0" anchor="ctr"/>
+          <a:lstStyle/>
+          <a:p>
+            <a:pPr algn="ctr"/>
+          </a:p>
+        </p:txBody>
+      </p:sp>
+      <p:sp>
+        <p:nvSpPr>
+          <p:cNvPr id="4" name="Rounded Rectangle 3"/>
+          <p:cNvSpPr/>
+          <p:nvPr/>
+        </p:nvSpPr>
+        <p:spPr>
+          <a:xfrm>
+            <a:off x="457200" y="1122193"/>
+            <a:ext cx="502920" cy="502920"/>
+          </a:xfrm>
+          <a:prstGeom prst="roundRect">
+            <a:avLst>
+              <a:gd name="adj" fmla="val 18000"/>
+            </a:avLst>
           </a:prstGeom>
           <a:solidFill>
             <a:srgbClr val="16294A"/>
@@ -21304,41 +21350,23 @@
           </a:fontRef>
         </p:style>
         <p:txBody>
-          <a:bodyPr rtlCol="0" anchor="ctr" wrap="square" lIns="0" rIns="0" tIns="0" bIns="0">
-            <a:noAutofit/>
-          </a:bodyPr>
-          <a:lstStyle/>
-          <a:p>
-            <a:pPr algn="ctr">
-              <a:spcBef>
-                <a:spcPts val="0"/>
-              </a:spcBef>
-              <a:spcAft>
-                <a:spcPts val="0"/>
-              </a:spcAft>
-            </a:pPr>
-            <a:r>
-              <a:rPr sz="1400" b="0" i="0">
-                <a:solidFill>
-                  <a:srgbClr val="FFFFFF"/>
-                </a:solidFill>
-                <a:latin typeface="Segoe UI"/>
-              </a:rPr>
-              <a:t>👥</a:t>
-            </a:r>
-          </a:p>
-        </p:txBody>
-      </p:sp>
-      <p:sp>
-        <p:nvSpPr>
-          <p:cNvPr id="4" name="TextBox 3"/>
+          <a:bodyPr rtlCol="0" anchor="ctr"/>
+          <a:lstStyle/>
+          <a:p>
+            <a:pPr algn="ctr"/>
+          </a:p>
+        </p:txBody>
+      </p:sp>
+      <p:sp>
+        <p:nvSpPr>
+          <p:cNvPr id="5" name="TextBox 4"/>
           <p:cNvSpPr txBox="1"/>
           <p:nvPr/>
         </p:nvSpPr>
         <p:spPr>
           <a:xfrm>
-            <a:off x="850392" y="1463040"/>
-            <a:ext cx="2404628" cy="384048"/>
+            <a:off x="1014984" y="1099333"/>
+            <a:ext cx="391634" cy="548640"/>
           </a:xfrm>
           <a:prstGeom prst="rect">
             <a:avLst/>
@@ -21352,9 +21380,6 @@
           <a:lstStyle/>
           <a:p>
             <a:pPr algn="l">
-              <a:lnSpc>
-                <a:spcPts val="1795"/>
-              </a:lnSpc>
               <a:spcBef>
                 <a:spcPts val="0"/>
               </a:spcBef>
@@ -21376,14 +21401,14 @@
       </p:sp>
       <p:sp>
         <p:nvSpPr>
-          <p:cNvPr id="5" name="TextBox 4"/>
+          <p:cNvPr id="6" name="TextBox 5"/>
           <p:cNvSpPr txBox="1"/>
           <p:nvPr/>
         </p:nvSpPr>
         <p:spPr>
           <a:xfrm>
-            <a:off x="3309884" y="1463040"/>
-            <a:ext cx="8470636" cy="384048"/>
+            <a:off x="1406618" y="1297639"/>
+            <a:ext cx="10328182" cy="152028"/>
           </a:xfrm>
           <a:prstGeom prst="rect">
             <a:avLst/>
@@ -21391,7 +21416,7 @@
           <a:noFill/>
         </p:spPr>
         <p:txBody>
-          <a:bodyPr wrap="square" lIns="0" rIns="0" tIns="0" bIns="0" anchor="ctr">
+          <a:bodyPr wrap="square" lIns="0" rIns="0" tIns="0" bIns="0" anchor="t">
             <a:noAutofit/>
           </a:bodyPr>
           <a:lstStyle/>
@@ -21457,17 +21482,63 @@
       </p:sp>
       <p:sp>
         <p:nvSpPr>
-          <p:cNvPr id="6" name="Oval 5"/>
+          <p:cNvPr id="7" name="Rectangle 6"/>
           <p:cNvSpPr/>
           <p:nvPr/>
         </p:nvSpPr>
         <p:spPr>
           <a:xfrm>
-            <a:off x="411480" y="1956816"/>
-            <a:ext cx="384048" cy="384048"/>
-          </a:xfrm>
-          <a:prstGeom prst="ellipse">
-            <a:avLst/>
+            <a:off x="411480" y="1675405"/>
+            <a:ext cx="11369040" cy="548640"/>
+          </a:xfrm>
+          <a:prstGeom prst="rect">
+            <a:avLst/>
+          </a:prstGeom>
+          <a:solidFill>
+            <a:srgbClr val="E8EBEF"/>
+          </a:solidFill>
+          <a:ln>
+            <a:noFill/>
+          </a:ln>
+          <a:effectLst/>
+        </p:spPr>
+        <p:style>
+          <a:lnRef idx="1">
+            <a:schemeClr val="accent1"/>
+          </a:lnRef>
+          <a:fillRef idx="3">
+            <a:schemeClr val="accent1"/>
+          </a:fillRef>
+          <a:effectRef idx="2">
+            <a:schemeClr val="accent1"/>
+          </a:effectRef>
+          <a:fontRef idx="minor">
+            <a:schemeClr val="lt1"/>
+          </a:fontRef>
+        </p:style>
+        <p:txBody>
+          <a:bodyPr rtlCol="0" anchor="ctr"/>
+          <a:lstStyle/>
+          <a:p>
+            <a:pPr algn="ctr"/>
+          </a:p>
+        </p:txBody>
+      </p:sp>
+      <p:sp>
+        <p:nvSpPr>
+          <p:cNvPr id="8" name="Rounded Rectangle 7"/>
+          <p:cNvSpPr/>
+          <p:nvPr/>
+        </p:nvSpPr>
+        <p:spPr>
+          <a:xfrm>
+            <a:off x="457200" y="1698265"/>
+            <a:ext cx="502920" cy="502920"/>
+          </a:xfrm>
+          <a:prstGeom prst="roundRect">
+            <a:avLst>
+              <a:gd name="adj" fmla="val 18000"/>
+            </a:avLst>
           </a:prstGeom>
           <a:solidFill>
             <a:srgbClr val="16294A"/>
@@ -21492,41 +21563,23 @@
           </a:fontRef>
         </p:style>
         <p:txBody>
-          <a:bodyPr rtlCol="0" anchor="ctr" wrap="square" lIns="0" rIns="0" tIns="0" bIns="0">
-            <a:noAutofit/>
-          </a:bodyPr>
-          <a:lstStyle/>
-          <a:p>
-            <a:pPr algn="ctr">
-              <a:spcBef>
-                <a:spcPts val="0"/>
-              </a:spcBef>
-              <a:spcAft>
-                <a:spcPts val="0"/>
-              </a:spcAft>
-            </a:pPr>
-            <a:r>
-              <a:rPr sz="1400" b="0" i="0">
-                <a:solidFill>
-                  <a:srgbClr val="FFFFFF"/>
-                </a:solidFill>
-                <a:latin typeface="Segoe UI"/>
-              </a:rPr>
-              <a:t>💰</a:t>
-            </a:r>
-          </a:p>
-        </p:txBody>
-      </p:sp>
-      <p:sp>
-        <p:nvSpPr>
-          <p:cNvPr id="7" name="TextBox 6"/>
+          <a:bodyPr rtlCol="0" anchor="ctr"/>
+          <a:lstStyle/>
+          <a:p>
+            <a:pPr algn="ctr"/>
+          </a:p>
+        </p:txBody>
+      </p:sp>
+      <p:sp>
+        <p:nvSpPr>
+          <p:cNvPr id="9" name="TextBox 8"/>
           <p:cNvSpPr txBox="1"/>
           <p:nvPr/>
         </p:nvSpPr>
         <p:spPr>
           <a:xfrm>
-            <a:off x="850392" y="1956816"/>
-            <a:ext cx="2404628" cy="384048"/>
+            <a:off x="1014984" y="1675405"/>
+            <a:ext cx="440189" cy="548640"/>
           </a:xfrm>
           <a:prstGeom prst="rect">
             <a:avLst/>
@@ -21540,9 +21593,6 @@
           <a:lstStyle/>
           <a:p>
             <a:pPr algn="l">
-              <a:lnSpc>
-                <a:spcPts val="1795"/>
-              </a:lnSpc>
               <a:spcBef>
                 <a:spcPts val="0"/>
               </a:spcBef>
@@ -21564,14 +21614,14 @@
       </p:sp>
       <p:sp>
         <p:nvSpPr>
-          <p:cNvPr id="8" name="TextBox 7"/>
+          <p:cNvPr id="10" name="TextBox 9"/>
           <p:cNvSpPr txBox="1"/>
           <p:nvPr/>
         </p:nvSpPr>
         <p:spPr>
           <a:xfrm>
-            <a:off x="3309884" y="1956816"/>
-            <a:ext cx="8470636" cy="384048"/>
+            <a:off x="1455173" y="1873711"/>
+            <a:ext cx="10279627" cy="152028"/>
           </a:xfrm>
           <a:prstGeom prst="rect">
             <a:avLst/>
@@ -21579,7 +21629,7 @@
           <a:noFill/>
         </p:spPr>
         <p:txBody>
-          <a:bodyPr wrap="square" lIns="0" rIns="0" tIns="0" bIns="0" anchor="ctr">
+          <a:bodyPr wrap="square" lIns="0" rIns="0" tIns="0" bIns="0" anchor="t">
             <a:noAutofit/>
           </a:bodyPr>
           <a:lstStyle/>
@@ -21690,17 +21740,63 @@
       </p:sp>
       <p:sp>
         <p:nvSpPr>
-          <p:cNvPr id="9" name="Oval 8"/>
+          <p:cNvPr id="11" name="Rectangle 10"/>
           <p:cNvSpPr/>
           <p:nvPr/>
         </p:nvSpPr>
         <p:spPr>
           <a:xfrm>
-            <a:off x="411480" y="2450592"/>
-            <a:ext cx="384048" cy="384048"/>
-          </a:xfrm>
-          <a:prstGeom prst="ellipse">
-            <a:avLst/>
+            <a:off x="411480" y="2251477"/>
+            <a:ext cx="11369040" cy="548640"/>
+          </a:xfrm>
+          <a:prstGeom prst="rect">
+            <a:avLst/>
+          </a:prstGeom>
+          <a:solidFill>
+            <a:srgbClr val="F2F3F5"/>
+          </a:solidFill>
+          <a:ln>
+            <a:noFill/>
+          </a:ln>
+          <a:effectLst/>
+        </p:spPr>
+        <p:style>
+          <a:lnRef idx="1">
+            <a:schemeClr val="accent1"/>
+          </a:lnRef>
+          <a:fillRef idx="3">
+            <a:schemeClr val="accent1"/>
+          </a:fillRef>
+          <a:effectRef idx="2">
+            <a:schemeClr val="accent1"/>
+          </a:effectRef>
+          <a:fontRef idx="minor">
+            <a:schemeClr val="lt1"/>
+          </a:fontRef>
+        </p:style>
+        <p:txBody>
+          <a:bodyPr rtlCol="0" anchor="ctr"/>
+          <a:lstStyle/>
+          <a:p>
+            <a:pPr algn="ctr"/>
+          </a:p>
+        </p:txBody>
+      </p:sp>
+      <p:sp>
+        <p:nvSpPr>
+          <p:cNvPr id="12" name="Rounded Rectangle 11"/>
+          <p:cNvSpPr/>
+          <p:nvPr/>
+        </p:nvSpPr>
+        <p:spPr>
+          <a:xfrm>
+            <a:off x="457200" y="2274337"/>
+            <a:ext cx="502920" cy="502920"/>
+          </a:xfrm>
+          <a:prstGeom prst="roundRect">
+            <a:avLst>
+              <a:gd name="adj" fmla="val 18000"/>
+            </a:avLst>
           </a:prstGeom>
           <a:solidFill>
             <a:srgbClr val="16294A"/>
@@ -21725,41 +21821,23 @@
           </a:fontRef>
         </p:style>
         <p:txBody>
-          <a:bodyPr rtlCol="0" anchor="ctr" wrap="square" lIns="0" rIns="0" tIns="0" bIns="0">
-            <a:noAutofit/>
-          </a:bodyPr>
-          <a:lstStyle/>
-          <a:p>
-            <a:pPr algn="ctr">
-              <a:spcBef>
-                <a:spcPts val="0"/>
-              </a:spcBef>
-              <a:spcAft>
-                <a:spcPts val="0"/>
-              </a:spcAft>
-            </a:pPr>
-            <a:r>
-              <a:rPr sz="1400" b="0" i="0">
-                <a:solidFill>
-                  <a:srgbClr val="FFFFFF"/>
-                </a:solidFill>
-                <a:latin typeface="Segoe UI"/>
-              </a:rPr>
-              <a:t>📈</a:t>
-            </a:r>
-          </a:p>
-        </p:txBody>
-      </p:sp>
-      <p:sp>
-        <p:nvSpPr>
-          <p:cNvPr id="10" name="TextBox 9"/>
+          <a:bodyPr rtlCol="0" anchor="ctr"/>
+          <a:lstStyle/>
+          <a:p>
+            <a:pPr algn="ctr"/>
+          </a:p>
+        </p:txBody>
+      </p:sp>
+      <p:sp>
+        <p:nvSpPr>
+          <p:cNvPr id="13" name="TextBox 12"/>
           <p:cNvSpPr txBox="1"/>
           <p:nvPr/>
         </p:nvSpPr>
         <p:spPr>
           <a:xfrm>
-            <a:off x="850392" y="2450592"/>
-            <a:ext cx="2404628" cy="384048"/>
+            <a:off x="1014984" y="2251477"/>
+            <a:ext cx="756802" cy="548640"/>
           </a:xfrm>
           <a:prstGeom prst="rect">
             <a:avLst/>
@@ -21773,9 +21851,6 @@
           <a:lstStyle/>
           <a:p>
             <a:pPr algn="l">
-              <a:lnSpc>
-                <a:spcPts val="1795"/>
-              </a:lnSpc>
               <a:spcBef>
                 <a:spcPts val="0"/>
               </a:spcBef>
@@ -21797,14 +21872,14 @@
       </p:sp>
       <p:sp>
         <p:nvSpPr>
-          <p:cNvPr id="11" name="TextBox 10"/>
+          <p:cNvPr id="14" name="TextBox 13"/>
           <p:cNvSpPr txBox="1"/>
           <p:nvPr/>
         </p:nvSpPr>
         <p:spPr>
           <a:xfrm>
-            <a:off x="3309884" y="2450592"/>
-            <a:ext cx="8470636" cy="384048"/>
+            <a:off x="1771786" y="2449783"/>
+            <a:ext cx="9963014" cy="152028"/>
           </a:xfrm>
           <a:prstGeom prst="rect">
             <a:avLst/>
@@ -21812,7 +21887,7 @@
           <a:noFill/>
         </p:spPr>
         <p:txBody>
-          <a:bodyPr wrap="square" lIns="0" rIns="0" tIns="0" bIns="0" anchor="ctr">
+          <a:bodyPr wrap="square" lIns="0" rIns="0" tIns="0" bIns="0" anchor="t">
             <a:noAutofit/>
           </a:bodyPr>
           <a:lstStyle/>
@@ -21887,13 +21962,13 @@
       </p:sp>
       <p:sp>
         <p:nvSpPr>
-          <p:cNvPr id="12" name="Rectangle 11"/>
+          <p:cNvPr id="15" name="Rectangle 14"/>
           <p:cNvSpPr/>
           <p:nvPr/>
         </p:nvSpPr>
         <p:spPr>
           <a:xfrm>
-            <a:off x="411480" y="3054096"/>
+            <a:off x="411480" y="3602174"/>
             <a:ext cx="2807970" cy="1234440"/>
           </a:xfrm>
           <a:prstGeom prst="rect">
@@ -21905,7 +21980,13 @@
           <a:ln>
             <a:noFill/>
           </a:ln>
-          <a:effectLst/>
+          <a:effectLst>
+            <a:outerShdw blurRad="40000" dist="24000" dir="5400000" rotWithShape="0">
+              <a:srgbClr val="1A1A1A">
+                <a:alpha val="62000"/>
+              </a:srgbClr>
+            </a:outerShdw>
+          </a:effectLst>
         </p:spPr>
         <p:style>
           <a:lnRef idx="1">
@@ -22059,13 +22140,13 @@
       </p:sp>
       <p:sp>
         <p:nvSpPr>
-          <p:cNvPr id="13" name="Rectangle 12"/>
+          <p:cNvPr id="16" name="Rectangle 15"/>
           <p:cNvSpPr/>
           <p:nvPr/>
         </p:nvSpPr>
         <p:spPr>
           <a:xfrm>
-            <a:off x="3265170" y="3054096"/>
+            <a:off x="3265170" y="3602174"/>
             <a:ext cx="2807970" cy="1234440"/>
           </a:xfrm>
           <a:prstGeom prst="rect">
@@ -22077,7 +22158,13 @@
           <a:ln>
             <a:noFill/>
           </a:ln>
-          <a:effectLst/>
+          <a:effectLst>
+            <a:outerShdw blurRad="40000" dist="24000" dir="5400000" rotWithShape="0">
+              <a:srgbClr val="1A1A1A">
+                <a:alpha val="62000"/>
+              </a:srgbClr>
+            </a:outerShdw>
+          </a:effectLst>
         </p:spPr>
         <p:style>
           <a:lnRef idx="1">
@@ -22213,13 +22300,13 @@
       </p:sp>
       <p:sp>
         <p:nvSpPr>
-          <p:cNvPr id="14" name="Rectangle 13"/>
+          <p:cNvPr id="17" name="Rectangle 16"/>
           <p:cNvSpPr/>
           <p:nvPr/>
         </p:nvSpPr>
         <p:spPr>
           <a:xfrm>
-            <a:off x="6118860" y="3054096"/>
+            <a:off x="6118860" y="3602174"/>
             <a:ext cx="2807970" cy="1234440"/>
           </a:xfrm>
           <a:prstGeom prst="rect">
@@ -22231,7 +22318,13 @@
           <a:ln>
             <a:noFill/>
           </a:ln>
-          <a:effectLst/>
+          <a:effectLst>
+            <a:outerShdw blurRad="40000" dist="24000" dir="5400000" rotWithShape="0">
+              <a:srgbClr val="1A1A1A">
+                <a:alpha val="62000"/>
+              </a:srgbClr>
+            </a:outerShdw>
+          </a:effectLst>
         </p:spPr>
         <p:style>
           <a:lnRef idx="1">
@@ -22367,13 +22460,13 @@
       </p:sp>
       <p:sp>
         <p:nvSpPr>
-          <p:cNvPr id="15" name="Rectangle 14"/>
+          <p:cNvPr id="18" name="Rectangle 17"/>
           <p:cNvSpPr/>
           <p:nvPr/>
         </p:nvSpPr>
         <p:spPr>
           <a:xfrm>
-            <a:off x="8972550" y="3054096"/>
+            <a:off x="8972550" y="3602174"/>
             <a:ext cx="2807970" cy="1234440"/>
           </a:xfrm>
           <a:prstGeom prst="rect">
@@ -22385,7 +22478,13 @@
           <a:ln>
             <a:noFill/>
           </a:ln>
-          <a:effectLst/>
+          <a:effectLst>
+            <a:outerShdw blurRad="40000" dist="24000" dir="5400000" rotWithShape="0">
+              <a:srgbClr val="1A1A1A">
+                <a:alpha val="62000"/>
+              </a:srgbClr>
+            </a:outerShdw>
+          </a:effectLst>
         </p:spPr>
         <p:style>
           <a:lnRef idx="1">
@@ -22530,13 +22629,13 @@
       </p:sp>
       <p:sp>
         <p:nvSpPr>
-          <p:cNvPr id="16" name="Rectangle 15"/>
+          <p:cNvPr id="19" name="Rectangle 18"/>
           <p:cNvSpPr/>
           <p:nvPr/>
         </p:nvSpPr>
         <p:spPr>
           <a:xfrm>
-            <a:off x="411480" y="4590288"/>
+            <a:off x="411480" y="5138366"/>
             <a:ext cx="11369040" cy="857094"/>
           </a:xfrm>
           <a:prstGeom prst="rect">
@@ -22548,7 +22647,13 @@
           <a:ln>
             <a:noFill/>
           </a:ln>
-          <a:effectLst/>
+          <a:effectLst>
+            <a:outerShdw blurRad="40000" dist="24000" dir="5400000" rotWithShape="0">
+              <a:srgbClr val="1A1A1A">
+                <a:alpha val="62000"/>
+              </a:srgbClr>
+            </a:outerShdw>
+          </a:effectLst>
         </p:spPr>
         <p:style>
           <a:lnRef idx="1">
@@ -22574,13 +22679,13 @@
       </p:sp>
       <p:sp>
         <p:nvSpPr>
-          <p:cNvPr id="17" name="Rectangle 16"/>
+          <p:cNvPr id="20" name="Rectangle 19"/>
           <p:cNvSpPr/>
           <p:nvPr/>
         </p:nvSpPr>
         <p:spPr>
           <a:xfrm>
-            <a:off x="411480" y="4590288"/>
+            <a:off x="411480" y="5138366"/>
             <a:ext cx="32004" cy="857094"/>
           </a:xfrm>
           <a:prstGeom prst="rect">
@@ -22618,13 +22723,13 @@
       </p:sp>
       <p:sp>
         <p:nvSpPr>
-          <p:cNvPr id="18" name="TextBox 17"/>
+          <p:cNvPr id="21" name="TextBox 20"/>
           <p:cNvSpPr txBox="1"/>
           <p:nvPr/>
         </p:nvSpPr>
         <p:spPr>
           <a:xfrm>
-            <a:off x="484632" y="4663440"/>
+            <a:off x="484632" y="5211518"/>
             <a:ext cx="11222736" cy="236488"/>
           </a:xfrm>
           <a:prstGeom prst="rect">
@@ -22717,13 +22822,13 @@
       </p:sp>
       <p:sp>
         <p:nvSpPr>
-          <p:cNvPr id="19" name="TextBox 18"/>
+          <p:cNvPr id="22" name="TextBox 21"/>
           <p:cNvSpPr txBox="1"/>
           <p:nvPr/>
         </p:nvSpPr>
         <p:spPr>
           <a:xfrm>
-            <a:off x="484632" y="4936504"/>
+            <a:off x="484632" y="5484582"/>
             <a:ext cx="11222736" cy="152028"/>
           </a:xfrm>
           <a:prstGeom prst="rect">
@@ -22987,13 +23092,13 @@
       </p:sp>
       <p:sp>
         <p:nvSpPr>
-          <p:cNvPr id="20" name="TextBox 19"/>
+          <p:cNvPr id="23" name="TextBox 22"/>
           <p:cNvSpPr txBox="1"/>
           <p:nvPr/>
         </p:nvSpPr>
         <p:spPr>
           <a:xfrm>
-            <a:off x="411480" y="5614250"/>
+            <a:off x="411480" y="6162328"/>
             <a:ext cx="11369040" cy="126690"/>
           </a:xfrm>
           <a:prstGeom prst="rect">
@@ -23068,7 +23173,7 @@
       </p:sp>
       <p:cxnSp>
         <p:nvCxnSpPr>
-          <p:cNvPr id="21" name="Connector 20"/>
+          <p:cNvPr id="24" name="Connector 23"/>
           <p:cNvCxnSpPr/>
           <p:nvPr/>
         </p:nvCxnSpPr>
@@ -23103,7 +23208,7 @@
       </p:cxnSp>
       <p:sp>
         <p:nvSpPr>
-          <p:cNvPr id="22" name="TextBox 21"/>
+          <p:cNvPr id="25" name="TextBox 24"/>
           <p:cNvSpPr txBox="1"/>
           <p:nvPr/>
         </p:nvSpPr>
@@ -23145,7 +23250,7 @@
       </p:sp>
       <p:sp>
         <p:nvSpPr>
-          <p:cNvPr id="23" name="TextBox 22"/>
+          <p:cNvPr id="26" name="TextBox 25"/>
           <p:cNvSpPr txBox="1"/>
           <p:nvPr/>
         </p:nvSpPr>
@@ -23187,7 +23292,7 @@
       </p:sp>
       <p:sp>
         <p:nvSpPr>
-          <p:cNvPr id="24" name="TextBox 23"/>
+          <p:cNvPr id="27" name="TextBox 26"/>
           <p:cNvSpPr txBox="1"/>
           <p:nvPr/>
         </p:nvSpPr>

--- a/eval/out/agdev_demo.pptx
+++ b/eval/out/agdev_demo.pptx
@@ -3153,7 +3153,7 @@
         </p:nvSpPr>
         <p:spPr>
           <a:xfrm>
-            <a:off x="9265920" y="320040"/>
+            <a:off x="1005840" y="320040"/>
             <a:ext cx="2560320" cy="274320"/>
           </a:xfrm>
           <a:prstGeom prst="rect">
@@ -3167,7 +3167,7 @@
           </a:bodyPr>
           <a:lstStyle/>
           <a:p>
-            <a:pPr algn="r">
+            <a:pPr algn="l">
               <a:spcBef>
                 <a:spcPts val="0"/>
               </a:spcBef>

--- a/eval/out/agdev_demo.pptx
+++ b/eval/out/agdev_demo.pptx
@@ -3196,7 +3196,7 @@
         <p:spPr>
           <a:xfrm>
             <a:off x="1005840" y="1371600"/>
-            <a:ext cx="10180320" cy="1154410"/>
+            <a:ext cx="10180320" cy="1183270"/>
           </a:xfrm>
           <a:prstGeom prst="rect">
             <a:avLst/>
@@ -3211,7 +3211,7 @@
           <a:p>
             <a:pPr algn="l">
               <a:lnSpc>
-                <a:spcPts val="4544"/>
+                <a:spcPts val="4658"/>
               </a:lnSpc>
               <a:spcBef>
                 <a:spcPts val="0"/>
@@ -3260,7 +3260,7 @@
           <a:p>
             <a:pPr algn="l">
               <a:lnSpc>
-                <a:spcPts val="4544"/>
+                <a:spcPts val="4658"/>
               </a:lnSpc>
               <a:spcBef>
                 <a:spcPts val="0"/>
@@ -3307,8 +3307,8 @@
         </p:nvSpPr>
         <p:spPr>
           <a:xfrm>
-            <a:off x="1005840" y="2635738"/>
-            <a:ext cx="10180320" cy="236488"/>
+            <a:off x="1005840" y="2664598"/>
+            <a:ext cx="10180320" cy="242400"/>
           </a:xfrm>
           <a:prstGeom prst="rect">
             <a:avLst/>
@@ -3323,7 +3323,7 @@
           <a:p>
             <a:pPr algn="l">
               <a:lnSpc>
-                <a:spcPts val="1862"/>
+                <a:spcPts val="1908"/>
               </a:lnSpc>
               <a:spcBef>
                 <a:spcPts val="0"/>
@@ -3501,8 +3501,8 @@
         </p:nvSpPr>
         <p:spPr>
           <a:xfrm>
-            <a:off x="411480" y="559596"/>
-            <a:ext cx="11369040" cy="288603"/>
+            <a:off x="411480" y="274320"/>
+            <a:ext cx="11369040" cy="295818"/>
           </a:xfrm>
           <a:prstGeom prst="rect">
             <a:avLst/>
@@ -3517,7 +3517,7 @@
           <a:p>
             <a:pPr algn="l">
               <a:lnSpc>
-                <a:spcPts val="2272"/>
+                <a:spcPts val="2329"/>
               </a:lnSpc>
               <a:spcBef>
                 <a:spcPts val="0"/>
@@ -3624,25 +3624,1186 @@
                 <a:latin typeface="Georgia"/>
               </a:rPr>
               <a:t>states</a:t>
+            </a:r>
+          </a:p>
+        </p:txBody>
+      </p:sp>
+      <p:sp>
+        <p:nvSpPr>
+          <p:cNvPr id="3" name="TextBox 2"/>
+          <p:cNvSpPr txBox="1"/>
+          <p:nvPr/>
+        </p:nvSpPr>
+        <p:spPr>
+          <a:xfrm>
+            <a:off x="411480" y="1554480"/>
+            <a:ext cx="11369040" cy="242400"/>
+          </a:xfrm>
+          <a:prstGeom prst="rect">
+            <a:avLst/>
+          </a:prstGeom>
+          <a:noFill/>
+        </p:spPr>
+        <p:txBody>
+          <a:bodyPr wrap="square" lIns="0" rIns="0" tIns="0" bIns="0" anchor="t">
+            <a:noAutofit/>
+          </a:bodyPr>
+          <a:lstStyle/>
+          <a:p>
+            <a:pPr algn="l">
+              <a:lnSpc>
+                <a:spcPts val="1908"/>
+              </a:lnSpc>
+              <a:spcBef>
+                <a:spcPts val="0"/>
+              </a:spcBef>
+              <a:spcAft>
+                <a:spcPts val="0"/>
+              </a:spcAft>
+            </a:pPr>
+            <a:r>
+              <a:rPr sz="1400" b="0" i="0">
+                <a:solidFill>
+                  <a:srgbClr val="1F3864"/>
+                </a:solidFill>
+                <a:latin typeface="Segoe UI"/>
+              </a:rPr>
+              <a:t>Reach</a:t>
+            </a:r>
+          </a:p>
+        </p:txBody>
+      </p:sp>
+      <p:sp>
+        <p:nvSpPr>
+          <p:cNvPr id="4" name="TextBox 3"/>
+          <p:cNvSpPr txBox="1"/>
+          <p:nvPr/>
+        </p:nvSpPr>
+        <p:spPr>
+          <a:xfrm>
+            <a:off x="411480" y="1879176"/>
+            <a:ext cx="11369040" cy="173143"/>
+          </a:xfrm>
+          <a:prstGeom prst="rect">
+            <a:avLst/>
+          </a:prstGeom>
+          <a:noFill/>
+        </p:spPr>
+        <p:txBody>
+          <a:bodyPr wrap="square" lIns="0" rIns="0" tIns="0" bIns="0" anchor="t">
+            <a:noAutofit/>
+          </a:bodyPr>
+          <a:lstStyle/>
+          <a:p>
+            <a:pPr algn="l">
+              <a:lnSpc>
+                <a:spcPts val="1363"/>
+              </a:lnSpc>
+              <a:spcBef>
+                <a:spcPts val="0"/>
+              </a:spcBef>
+              <a:spcAft>
+                <a:spcPts val="0"/>
+              </a:spcAft>
+            </a:pPr>
+            <a:r>
+              <a:rPr sz="1000" b="0" i="0">
+                <a:solidFill>
+                  <a:srgbClr val="3F3F3F"/>
+                </a:solidFill>
+                <a:latin typeface="Segoe UI"/>
+              </a:rPr>
+              <a:t>Programs </a:t>
+            </a:r>
+            <a:r>
+              <a:rPr sz="1000" b="0" i="0">
+                <a:solidFill>
+                  <a:srgbClr val="3F3F3F"/>
+                </a:solidFill>
+                <a:latin typeface="Segoe UI"/>
+              </a:rPr>
+              <a:t>reached </a:t>
+            </a:r>
+            <a:r>
+              <a:rPr sz="1000" b="1" i="0">
+                <a:solidFill>
+                  <a:srgbClr val="3F3F3F"/>
+                </a:solidFill>
+                <a:latin typeface="Segoe UI"/>
+              </a:rPr>
+              <a:t>3M </a:t>
+            </a:r>
+            <a:r>
+              <a:rPr sz="1000" b="1" i="0">
+                <a:solidFill>
+                  <a:srgbClr val="3F3F3F"/>
+                </a:solidFill>
+                <a:latin typeface="Segoe UI"/>
+              </a:rPr>
+              <a:t>farmers </a:t>
+            </a:r>
+            <a:r>
+              <a:rPr sz="1000" b="1" i="0">
+                <a:solidFill>
+                  <a:srgbClr val="3F3F3F"/>
+                </a:solidFill>
+                <a:latin typeface="Segoe UI"/>
+              </a:rPr>
+              <a:t>directly</a:t>
+            </a:r>
+            <a:r>
+              <a:rPr sz="1000" b="0" i="0">
+                <a:solidFill>
+                  <a:srgbClr val="3F3F3F"/>
+                </a:solidFill>
+                <a:latin typeface="Segoe UI"/>
+              </a:rPr>
+              <a:t> </a:t>
+            </a:r>
+            <a:r>
+              <a:rPr sz="1000" b="0" i="0">
+                <a:solidFill>
+                  <a:srgbClr val="3F3F3F"/>
+                </a:solidFill>
+                <a:latin typeface="Segoe UI"/>
+              </a:rPr>
+              <a:t>and </a:t>
+            </a:r>
+            <a:r>
+              <a:rPr sz="1000" b="0" i="0">
+                <a:solidFill>
+                  <a:srgbClr val="3F3F3F"/>
+                </a:solidFill>
+                <a:latin typeface="Segoe UI"/>
+              </a:rPr>
+              <a:t>3M </a:t>
+            </a:r>
+            <a:r>
+              <a:rPr sz="1000" b="0" i="0">
+                <a:solidFill>
+                  <a:srgbClr val="3F3F3F"/>
+                </a:solidFill>
+                <a:latin typeface="Segoe UI"/>
+              </a:rPr>
+              <a:t>more </a:t>
+            </a:r>
+            <a:r>
+              <a:rPr sz="1000" b="0" i="0">
+                <a:solidFill>
+                  <a:srgbClr val="3F3F3F"/>
+                </a:solidFill>
+                <a:latin typeface="Segoe UI"/>
+              </a:rPr>
+              <a:t>through </a:t>
+            </a:r>
+            <a:r>
+              <a:rPr sz="1000" b="0" i="0">
+                <a:solidFill>
+                  <a:srgbClr val="3F3F3F"/>
+                </a:solidFill>
+                <a:latin typeface="Segoe UI"/>
+              </a:rPr>
+              <a:t>diffusion </a:t>
+            </a:r>
+            <a:r>
+              <a:rPr sz="1000" b="0" i="0">
+                <a:solidFill>
+                  <a:srgbClr val="3F3F3F"/>
+                </a:solidFill>
+                <a:latin typeface="Segoe UI"/>
+              </a:rPr>
+              <a:t>in </a:t>
+            </a:r>
+            <a:r>
+              <a:rPr sz="1000" b="0" i="0">
+                <a:solidFill>
+                  <a:srgbClr val="3F3F3F"/>
+                </a:solidFill>
+                <a:latin typeface="Segoe UI"/>
+              </a:rPr>
+              <a:t>AY </a:t>
+            </a:r>
+            <a:r>
+              <a:rPr sz="1000" b="0" i="0">
+                <a:solidFill>
+                  <a:srgbClr val="3F3F3F"/>
+                </a:solidFill>
+                <a:latin typeface="Segoe UI"/>
+              </a:rPr>
+              <a:t>2024-25, </a:t>
+            </a:r>
+            <a:r>
+              <a:rPr sz="1000" b="0" i="0">
+                <a:solidFill>
+                  <a:srgbClr val="3F3F3F"/>
+                </a:solidFill>
+                <a:latin typeface="Segoe UI"/>
+              </a:rPr>
+              <a:t>with </a:t>
+            </a:r>
+            <a:r>
+              <a:rPr sz="1000" b="0" i="0">
+                <a:solidFill>
+                  <a:srgbClr val="3F3F3F"/>
+                </a:solidFill>
+                <a:latin typeface="Segoe UI"/>
+              </a:rPr>
+              <a:t>digital </a:t>
+            </a:r>
+            <a:r>
+              <a:rPr sz="1000" b="0" i="0">
+                <a:solidFill>
+                  <a:srgbClr val="3F3F3F"/>
+                </a:solidFill>
+                <a:latin typeface="Segoe UI"/>
+              </a:rPr>
+              <a:t>channels </a:t>
+            </a:r>
+            <a:r>
+              <a:rPr sz="1000" b="0" i="0">
+                <a:solidFill>
+                  <a:srgbClr val="3F3F3F"/>
+                </a:solidFill>
+                <a:latin typeface="Segoe UI"/>
+              </a:rPr>
+              <a:t>adding </a:t>
+            </a:r>
+            <a:r>
+              <a:rPr sz="1000" b="1" i="0">
+                <a:solidFill>
+                  <a:srgbClr val="3F3F3F"/>
+                </a:solidFill>
+                <a:latin typeface="Segoe UI"/>
+              </a:rPr>
+              <a:t>66M</a:t>
+            </a:r>
+            <a:r>
+              <a:rPr sz="1000" b="0" i="0">
+                <a:solidFill>
+                  <a:srgbClr val="3F3F3F"/>
+                </a:solidFill>
+                <a:latin typeface="Segoe UI"/>
+              </a:rPr>
+              <a:t> </a:t>
+            </a:r>
+            <a:r>
+              <a:rPr sz="1000" b="0" i="0">
+                <a:solidFill>
+                  <a:srgbClr val="3F3F3F"/>
+                </a:solidFill>
+                <a:latin typeface="Segoe UI"/>
+              </a:rPr>
+              <a:t>touchpoints </a:t>
+            </a:r>
+            <a:r>
+              <a:rPr sz="1000" b="0" i="0">
+                <a:solidFill>
+                  <a:srgbClr val="3F3F3F"/>
+                </a:solidFill>
+                <a:latin typeface="Segoe UI"/>
+              </a:rPr>
+              <a:t>across </a:t>
+            </a:r>
+            <a:r>
+              <a:rPr sz="1000" b="0" i="0">
+                <a:solidFill>
+                  <a:srgbClr val="3F3F3F"/>
+                </a:solidFill>
+                <a:latin typeface="Segoe UI"/>
+              </a:rPr>
+              <a:t>advisory, </a:t>
+            </a:r>
+            <a:r>
+              <a:rPr sz="1000" b="0" i="0">
+                <a:solidFill>
+                  <a:srgbClr val="3F3F3F"/>
+                </a:solidFill>
+                <a:latin typeface="Segoe UI"/>
+              </a:rPr>
+              <a:t>market </a:t>
+            </a:r>
+            <a:r>
+              <a:rPr sz="1000" b="0" i="0">
+                <a:solidFill>
+                  <a:srgbClr val="3F3F3F"/>
+                </a:solidFill>
+                <a:latin typeface="Segoe UI"/>
+              </a:rPr>
+              <a:t>linkage </a:t>
+            </a:r>
+            <a:r>
+              <a:rPr sz="1000" b="0" i="0">
+                <a:solidFill>
+                  <a:srgbClr val="3F3F3F"/>
+                </a:solidFill>
+                <a:latin typeface="Segoe UI"/>
+              </a:rPr>
+              <a:t>and </a:t>
+            </a:r>
+            <a:r>
+              <a:rPr sz="1000" b="0" i="0">
+                <a:solidFill>
+                  <a:srgbClr val="3F3F3F"/>
+                </a:solidFill>
+                <a:latin typeface="Segoe UI"/>
+              </a:rPr>
+              <a:t>DPI </a:t>
+            </a:r>
+            <a:r>
+              <a:rPr sz="1000" b="0" i="0">
+                <a:solidFill>
+                  <a:srgbClr val="3F3F3F"/>
+                </a:solidFill>
+                <a:latin typeface="Segoe UI"/>
+              </a:rPr>
+              <a:t>rails.</a:t>
+            </a:r>
+          </a:p>
+        </p:txBody>
+      </p:sp>
+      <p:sp>
+        <p:nvSpPr>
+          <p:cNvPr id="5" name="TextBox 4"/>
+          <p:cNvSpPr txBox="1"/>
+          <p:nvPr/>
+        </p:nvSpPr>
+        <p:spPr>
+          <a:xfrm>
+            <a:off x="411480" y="2308351"/>
+            <a:ext cx="11369040" cy="242400"/>
+          </a:xfrm>
+          <a:prstGeom prst="rect">
+            <a:avLst/>
+          </a:prstGeom>
+          <a:noFill/>
+        </p:spPr>
+        <p:txBody>
+          <a:bodyPr wrap="square" lIns="0" rIns="0" tIns="0" bIns="0" anchor="t">
+            <a:noAutofit/>
+          </a:bodyPr>
+          <a:lstStyle/>
+          <a:p>
+            <a:pPr algn="l">
+              <a:lnSpc>
+                <a:spcPts val="1908"/>
+              </a:lnSpc>
+              <a:spcBef>
+                <a:spcPts val="0"/>
+              </a:spcBef>
+              <a:spcAft>
+                <a:spcPts val="0"/>
+              </a:spcAft>
+            </a:pPr>
+            <a:r>
+              <a:rPr sz="1400" b="0" i="0">
+                <a:solidFill>
+                  <a:srgbClr val="1F3864"/>
+                </a:solidFill>
+                <a:latin typeface="Segoe UI"/>
+              </a:rPr>
+              <a:t>Income</a:t>
+            </a:r>
+          </a:p>
+        </p:txBody>
+      </p:sp>
+      <p:sp>
+        <p:nvSpPr>
+          <p:cNvPr id="6" name="TextBox 5"/>
+          <p:cNvSpPr txBox="1"/>
+          <p:nvPr/>
+        </p:nvSpPr>
+        <p:spPr>
+          <a:xfrm>
+            <a:off x="411480" y="2633047"/>
+            <a:ext cx="11369040" cy="173143"/>
+          </a:xfrm>
+          <a:prstGeom prst="rect">
+            <a:avLst/>
+          </a:prstGeom>
+          <a:noFill/>
+        </p:spPr>
+        <p:txBody>
+          <a:bodyPr wrap="square" lIns="0" rIns="0" tIns="0" bIns="0" anchor="t">
+            <a:noAutofit/>
+          </a:bodyPr>
+          <a:lstStyle/>
+          <a:p>
+            <a:pPr algn="l">
+              <a:lnSpc>
+                <a:spcPts val="1363"/>
+              </a:lnSpc>
+              <a:spcBef>
+                <a:spcPts val="0"/>
+              </a:spcBef>
+              <a:spcAft>
+                <a:spcPts val="0"/>
+              </a:spcAft>
+            </a:pPr>
+            <a:r>
+              <a:rPr sz="1000" b="0" i="0">
+                <a:solidFill>
+                  <a:srgbClr val="3F3F3F"/>
+                </a:solidFill>
+                <a:latin typeface="Segoe UI"/>
+              </a:rPr>
+              <a:t>Direct-beneficiary </a:t>
+            </a:r>
+            <a:r>
+              <a:rPr sz="1000" b="0" i="0">
+                <a:solidFill>
+                  <a:srgbClr val="3F3F3F"/>
+                </a:solidFill>
+                <a:latin typeface="Segoe UI"/>
+              </a:rPr>
+              <a:t>households </a:t>
+            </a:r>
+            <a:r>
+              <a:rPr sz="1000" b="0" i="0">
+                <a:solidFill>
+                  <a:srgbClr val="3F3F3F"/>
+                </a:solidFill>
+                <a:latin typeface="Segoe UI"/>
+              </a:rPr>
+              <a:t>out-earned </a:t>
+            </a:r>
+            <a:r>
+              <a:rPr sz="1000" b="0" i="0">
+                <a:solidFill>
+                  <a:srgbClr val="3F3F3F"/>
+                </a:solidFill>
+                <a:latin typeface="Segoe UI"/>
+              </a:rPr>
+              <a:t>state </a:t>
+            </a:r>
+            <a:r>
+              <a:rPr sz="1000" b="0" i="0">
+                <a:solidFill>
+                  <a:srgbClr val="3F3F3F"/>
+                </a:solidFill>
+                <a:latin typeface="Segoe UI"/>
+              </a:rPr>
+              <a:t>averages </a:t>
+            </a:r>
+            <a:r>
+              <a:rPr sz="1000" b="0" i="0">
+                <a:solidFill>
+                  <a:srgbClr val="3F3F3F"/>
+                </a:solidFill>
+                <a:latin typeface="Segoe UI"/>
+              </a:rPr>
+              <a:t>in </a:t>
+            </a:r>
+            <a:r>
+              <a:rPr sz="1000" b="0" i="0">
+                <a:solidFill>
+                  <a:srgbClr val="3F3F3F"/>
+                </a:solidFill>
+                <a:latin typeface="Segoe UI"/>
+              </a:rPr>
+              <a:t>every </a:t>
+            </a:r>
+            <a:r>
+              <a:rPr sz="1000" b="0" i="0">
+                <a:solidFill>
+                  <a:srgbClr val="3F3F3F"/>
+                </a:solidFill>
+                <a:latin typeface="Segoe UI"/>
+              </a:rPr>
+              <a:t>geography </a:t>
+            </a:r>
+            <a:r>
+              <a:rPr sz="1000" b="0" i="0">
+                <a:solidFill>
+                  <a:srgbClr val="3F3F3F"/>
+                </a:solidFill>
+                <a:latin typeface="Segoe UI"/>
+              </a:rPr>
+              <a:t>— </a:t>
+            </a:r>
+            <a:r>
+              <a:rPr sz="1000" b="1" i="0">
+                <a:solidFill>
+                  <a:srgbClr val="3F3F3F"/>
+                </a:solidFill>
+                <a:latin typeface="Segoe UI"/>
+              </a:rPr>
+              <a:t>+2.7%</a:t>
+            </a:r>
+            <a:r>
+              <a:rPr sz="1000" b="0" i="0">
+                <a:solidFill>
+                  <a:srgbClr val="3F3F3F"/>
+                </a:solidFill>
+                <a:latin typeface="Segoe UI"/>
+              </a:rPr>
+              <a:t> </a:t>
+            </a:r>
+            <a:r>
+              <a:rPr sz="1000" b="0" i="0">
+                <a:solidFill>
+                  <a:srgbClr val="3F3F3F"/>
+                </a:solidFill>
+                <a:latin typeface="Segoe UI"/>
+              </a:rPr>
+              <a:t>in </a:t>
+            </a:r>
+            <a:r>
+              <a:rPr sz="1000" b="0" i="0">
+                <a:solidFill>
+                  <a:srgbClr val="3F3F3F"/>
+                </a:solidFill>
+                <a:latin typeface="Segoe UI"/>
+              </a:rPr>
+              <a:t>Uttar </a:t>
+            </a:r>
+            <a:r>
+              <a:rPr sz="1000" b="0" i="0">
+                <a:solidFill>
+                  <a:srgbClr val="3F3F3F"/>
+                </a:solidFill>
+                <a:latin typeface="Segoe UI"/>
+              </a:rPr>
+              <a:t>Pradesh, </a:t>
+            </a:r>
+            <a:r>
+              <a:rPr sz="1000" b="1" i="0">
+                <a:solidFill>
+                  <a:srgbClr val="3F3F3F"/>
+                </a:solidFill>
+                <a:latin typeface="Segoe UI"/>
+              </a:rPr>
+              <a:t>+5%</a:t>
+            </a:r>
+            <a:r>
+              <a:rPr sz="1000" b="0" i="0">
+                <a:solidFill>
+                  <a:srgbClr val="3F3F3F"/>
+                </a:solidFill>
+                <a:latin typeface="Segoe UI"/>
+              </a:rPr>
+              <a:t> </a:t>
+            </a:r>
+            <a:r>
+              <a:rPr sz="1000" b="0" i="0">
+                <a:solidFill>
+                  <a:srgbClr val="3F3F3F"/>
+                </a:solidFill>
+                <a:latin typeface="Segoe UI"/>
+              </a:rPr>
+              <a:t>in </a:t>
+            </a:r>
+            <a:r>
+              <a:rPr sz="1000" b="0" i="0">
+                <a:solidFill>
+                  <a:srgbClr val="3F3F3F"/>
+                </a:solidFill>
+                <a:latin typeface="Segoe UI"/>
+              </a:rPr>
+              <a:t>Bihar </a:t>
+            </a:r>
+            <a:r>
+              <a:rPr sz="1000" b="0" i="0">
+                <a:solidFill>
+                  <a:srgbClr val="3F3F3F"/>
+                </a:solidFill>
+                <a:latin typeface="Segoe UI"/>
+              </a:rPr>
+              <a:t>and </a:t>
+            </a:r>
+            <a:r>
+              <a:rPr sz="1000" b="1" i="0">
+                <a:solidFill>
+                  <a:srgbClr val="3F3F3F"/>
+                </a:solidFill>
+                <a:latin typeface="Segoe UI"/>
+              </a:rPr>
+              <a:t>+4.8%</a:t>
+            </a:r>
+            <a:r>
+              <a:rPr sz="1000" b="0" i="0">
+                <a:solidFill>
+                  <a:srgbClr val="3F3F3F"/>
+                </a:solidFill>
+                <a:latin typeface="Segoe UI"/>
+              </a:rPr>
+              <a:t> </a:t>
+            </a:r>
+            <a:r>
+              <a:rPr sz="1000" b="0" i="0">
+                <a:solidFill>
+                  <a:srgbClr val="3F3F3F"/>
+                </a:solidFill>
+                <a:latin typeface="Segoe UI"/>
+              </a:rPr>
+              <a:t>in </a:t>
+            </a:r>
+            <a:r>
+              <a:rPr sz="1000" b="0" i="0">
+                <a:solidFill>
+                  <a:srgbClr val="3F3F3F"/>
+                </a:solidFill>
+                <a:latin typeface="Segoe UI"/>
+              </a:rPr>
+              <a:t>Odisha </a:t>
+            </a:r>
+            <a:r>
+              <a:rPr sz="1000" b="0" i="0">
+                <a:solidFill>
+                  <a:srgbClr val="3F3F3F"/>
+                </a:solidFill>
+                <a:latin typeface="Segoe UI"/>
+              </a:rPr>
+              <a:t>from </a:t>
+            </a:r>
+            <a:r>
+              <a:rPr sz="1000" b="0" i="0">
+                <a:solidFill>
+                  <a:srgbClr val="3F3F3F"/>
+                </a:solidFill>
+                <a:latin typeface="Segoe UI"/>
+              </a:rPr>
+              <a:t>crops </a:t>
+            </a:r>
+            <a:r>
+              <a:rPr sz="1000" b="0" i="0">
+                <a:solidFill>
+                  <a:srgbClr val="3F3F3F"/>
+                </a:solidFill>
+                <a:latin typeface="Segoe UI"/>
+              </a:rPr>
+              <a:t>and </a:t>
+            </a:r>
+            <a:r>
+              <a:rPr sz="1000" b="0" i="0">
+                <a:solidFill>
+                  <a:srgbClr val="3F3F3F"/>
+                </a:solidFill>
+                <a:latin typeface="Segoe UI"/>
+              </a:rPr>
+              <a:t>livestock.</a:t>
+            </a:r>
+          </a:p>
+        </p:txBody>
+      </p:sp>
+      <p:sp>
+        <p:nvSpPr>
+          <p:cNvPr id="7" name="TextBox 6"/>
+          <p:cNvSpPr txBox="1"/>
+          <p:nvPr/>
+        </p:nvSpPr>
+        <p:spPr>
+          <a:xfrm>
+            <a:off x="411480" y="3062222"/>
+            <a:ext cx="11369040" cy="242400"/>
+          </a:xfrm>
+          <a:prstGeom prst="rect">
+            <a:avLst/>
+          </a:prstGeom>
+          <a:noFill/>
+        </p:spPr>
+        <p:txBody>
+          <a:bodyPr wrap="square" lIns="0" rIns="0" tIns="0" bIns="0" anchor="t">
+            <a:noAutofit/>
+          </a:bodyPr>
+          <a:lstStyle/>
+          <a:p>
+            <a:pPr algn="l">
+              <a:lnSpc>
+                <a:spcPts val="1908"/>
+              </a:lnSpc>
+              <a:spcBef>
+                <a:spcPts val="0"/>
+              </a:spcBef>
+              <a:spcAft>
+                <a:spcPts val="0"/>
+              </a:spcAft>
+            </a:pPr>
+            <a:r>
+              <a:rPr sz="1400" b="0" i="0">
+                <a:solidFill>
+                  <a:srgbClr val="1F3864"/>
+                </a:solidFill>
+                <a:latin typeface="Segoe UI"/>
+              </a:rPr>
+              <a:t>Resilience</a:t>
+            </a:r>
+          </a:p>
+        </p:txBody>
+      </p:sp>
+      <p:sp>
+        <p:nvSpPr>
+          <p:cNvPr id="8" name="TextBox 7"/>
+          <p:cNvSpPr txBox="1"/>
+          <p:nvPr/>
+        </p:nvSpPr>
+        <p:spPr>
+          <a:xfrm>
+            <a:off x="411480" y="3386918"/>
+            <a:ext cx="11369040" cy="173143"/>
+          </a:xfrm>
+          <a:prstGeom prst="rect">
+            <a:avLst/>
+          </a:prstGeom>
+          <a:noFill/>
+        </p:spPr>
+        <p:txBody>
+          <a:bodyPr wrap="square" lIns="0" rIns="0" tIns="0" bIns="0" anchor="t">
+            <a:noAutofit/>
+          </a:bodyPr>
+          <a:lstStyle/>
+          <a:p>
+            <a:pPr algn="l">
+              <a:lnSpc>
+                <a:spcPts val="1363"/>
+              </a:lnSpc>
+              <a:spcBef>
+                <a:spcPts val="0"/>
+              </a:spcBef>
+              <a:spcAft>
+                <a:spcPts val="0"/>
+              </a:spcAft>
+            </a:pPr>
+            <a:r>
+              <a:rPr sz="1000" b="0" i="0">
+                <a:solidFill>
+                  <a:srgbClr val="3F3F3F"/>
+                </a:solidFill>
+                <a:latin typeface="Segoe UI"/>
+              </a:rPr>
+              <a:t>Advisory </a:t>
+            </a:r>
+            <a:r>
+              <a:rPr sz="1000" b="0" i="0">
+                <a:solidFill>
+                  <a:srgbClr val="3F3F3F"/>
+                </a:solidFill>
+                <a:latin typeface="Segoe UI"/>
+              </a:rPr>
+              <a:t>recipients </a:t>
+            </a:r>
+            <a:r>
+              <a:rPr sz="1000" b="0" i="0">
+                <a:solidFill>
+                  <a:srgbClr val="3F3F3F"/>
+                </a:solidFill>
+                <a:latin typeface="Segoe UI"/>
+              </a:rPr>
+              <a:t>cut </a:t>
+            </a:r>
+            <a:r>
+              <a:rPr sz="1000" b="0" i="0">
+                <a:solidFill>
+                  <a:srgbClr val="3F3F3F"/>
+                </a:solidFill>
+                <a:latin typeface="Segoe UI"/>
+              </a:rPr>
+              <a:t>crop </a:t>
+            </a:r>
+            <a:r>
+              <a:rPr sz="1000" b="0" i="0">
+                <a:solidFill>
+                  <a:srgbClr val="3F3F3F"/>
+                </a:solidFill>
+                <a:latin typeface="Segoe UI"/>
+              </a:rPr>
+              <a:t>losses </a:t>
+            </a:r>
+            <a:r>
+              <a:rPr sz="1000" b="0" i="0">
+                <a:solidFill>
+                  <a:srgbClr val="3F3F3F"/>
+                </a:solidFill>
+                <a:latin typeface="Segoe UI"/>
+              </a:rPr>
+              <a:t>by </a:t>
+            </a:r>
+            <a:r>
+              <a:rPr sz="1000" b="1" i="0">
+                <a:solidFill>
+                  <a:srgbClr val="3F3F3F"/>
+                </a:solidFill>
+                <a:latin typeface="Segoe UI"/>
+              </a:rPr>
+              <a:t>2-8 </a:t>
+            </a:r>
+            <a:r>
+              <a:rPr sz="1000" b="1" i="0">
+                <a:solidFill>
+                  <a:srgbClr val="3F3F3F"/>
+                </a:solidFill>
+                <a:latin typeface="Segoe UI"/>
+              </a:rPr>
+              <a:t>percentage </a:t>
+            </a:r>
+            <a:r>
+              <a:rPr sz="1000" b="1" i="0">
+                <a:solidFill>
+                  <a:srgbClr val="3F3F3F"/>
+                </a:solidFill>
+                <a:latin typeface="Segoe UI"/>
+              </a:rPr>
+              <a:t>points</a:t>
+            </a:r>
+            <a:r>
+              <a:rPr sz="1000" b="0" i="0">
+                <a:solidFill>
+                  <a:srgbClr val="3F3F3F"/>
+                </a:solidFill>
+                <a:latin typeface="Segoe UI"/>
+              </a:rPr>
+              <a:t>, </a:t>
+            </a:r>
+            <a:r>
+              <a:rPr sz="1000" b="0" i="0">
+                <a:solidFill>
+                  <a:srgbClr val="3F3F3F"/>
+                </a:solidFill>
+                <a:latin typeface="Segoe UI"/>
+              </a:rPr>
+              <a:t>worth </a:t>
+            </a:r>
+            <a:r>
+              <a:rPr sz="1000" b="0" i="0">
+                <a:solidFill>
+                  <a:srgbClr val="3F3F3F"/>
+                </a:solidFill>
+                <a:latin typeface="Segoe UI"/>
+              </a:rPr>
+              <a:t>$14-31 </a:t>
+            </a:r>
+            <a:r>
+              <a:rPr sz="1000" b="0" i="0">
+                <a:solidFill>
+                  <a:srgbClr val="3F3F3F"/>
+                </a:solidFill>
+                <a:latin typeface="Segoe UI"/>
+              </a:rPr>
+              <a:t>per </a:t>
+            </a:r>
+            <a:r>
+              <a:rPr sz="1000" b="0" i="0">
+                <a:solidFill>
+                  <a:srgbClr val="3F3F3F"/>
+                </a:solidFill>
+                <a:latin typeface="Segoe UI"/>
+              </a:rPr>
+              <a:t>farmer </a:t>
+            </a:r>
+            <a:r>
+              <a:rPr sz="1000" b="0" i="0">
+                <a:solidFill>
+                  <a:srgbClr val="3F3F3F"/>
+                </a:solidFill>
+                <a:latin typeface="Segoe UI"/>
+              </a:rPr>
+              <a:t>per </a:t>
+            </a:r>
+            <a:r>
+              <a:rPr sz="1000" b="0" i="0">
+                <a:solidFill>
+                  <a:srgbClr val="3F3F3F"/>
+                </a:solidFill>
+                <a:latin typeface="Segoe UI"/>
+              </a:rPr>
+              <a:t>season </a:t>
+            </a:r>
+            <a:r>
+              <a:rPr sz="1000" b="0" i="0">
+                <a:solidFill>
+                  <a:srgbClr val="3F3F3F"/>
+                </a:solidFill>
+                <a:latin typeface="Segoe UI"/>
+              </a:rPr>
+              <a:t>depending </a:t>
+            </a:r>
+            <a:r>
+              <a:rPr sz="1000" b="0" i="0">
+                <a:solidFill>
+                  <a:srgbClr val="3F3F3F"/>
+                </a:solidFill>
+                <a:latin typeface="Segoe UI"/>
+              </a:rPr>
+              <a:t>on </a:t>
+            </a:r>
+            <a:r>
+              <a:rPr sz="1000" b="0" i="0">
+                <a:solidFill>
+                  <a:srgbClr val="3F3F3F"/>
+                </a:solidFill>
+                <a:latin typeface="Segoe UI"/>
+              </a:rPr>
+              <a:t>state.</a:t>
+            </a:r>
+          </a:p>
+        </p:txBody>
+      </p:sp>
+      <p:sp>
+        <p:nvSpPr>
+          <p:cNvPr id="9" name="TextBox 8"/>
+          <p:cNvSpPr txBox="1"/>
+          <p:nvPr/>
+        </p:nvSpPr>
+        <p:spPr>
+          <a:xfrm>
+            <a:off x="411480" y="3816093"/>
+            <a:ext cx="11369040" cy="242400"/>
+          </a:xfrm>
+          <a:prstGeom prst="rect">
+            <a:avLst/>
+          </a:prstGeom>
+          <a:noFill/>
+        </p:spPr>
+        <p:txBody>
+          <a:bodyPr wrap="square" lIns="0" rIns="0" tIns="0" bIns="0" anchor="t">
+            <a:noAutofit/>
+          </a:bodyPr>
+          <a:lstStyle/>
+          <a:p>
+            <a:pPr algn="l">
+              <a:lnSpc>
+                <a:spcPts val="1908"/>
+              </a:lnSpc>
+              <a:spcBef>
+                <a:spcPts val="0"/>
+              </a:spcBef>
+              <a:spcAft>
+                <a:spcPts val="0"/>
+              </a:spcAft>
+            </a:pPr>
+            <a:r>
+              <a:rPr sz="1400" b="0" i="0">
+                <a:solidFill>
+                  <a:srgbClr val="1F3864"/>
+                </a:solidFill>
+                <a:latin typeface="Segoe UI"/>
+              </a:rPr>
+              <a:t>Leverage</a:t>
+            </a:r>
+          </a:p>
+        </p:txBody>
+      </p:sp>
+      <p:sp>
+        <p:nvSpPr>
+          <p:cNvPr id="10" name="TextBox 9"/>
+          <p:cNvSpPr txBox="1"/>
+          <p:nvPr/>
+        </p:nvSpPr>
+        <p:spPr>
+          <a:xfrm>
+            <a:off x="411480" y="4140789"/>
+            <a:ext cx="11369040" cy="173143"/>
+          </a:xfrm>
+          <a:prstGeom prst="rect">
+            <a:avLst/>
+          </a:prstGeom>
+          <a:noFill/>
+        </p:spPr>
+        <p:txBody>
+          <a:bodyPr wrap="square" lIns="0" rIns="0" tIns="0" bIns="0" anchor="t">
+            <a:noAutofit/>
+          </a:bodyPr>
+          <a:lstStyle/>
+          <a:p>
+            <a:pPr algn="l">
+              <a:lnSpc>
+                <a:spcPts val="1363"/>
+              </a:lnSpc>
+              <a:spcBef>
+                <a:spcPts val="0"/>
+              </a:spcBef>
+              <a:spcAft>
+                <a:spcPts val="0"/>
+              </a:spcAft>
+            </a:pPr>
+            <a:r>
+              <a:rPr sz="1000" b="0" i="0">
+                <a:solidFill>
+                  <a:srgbClr val="3F3F3F"/>
+                </a:solidFill>
+                <a:latin typeface="Segoe UI"/>
+              </a:rPr>
+              <a:t>Government </a:t>
+            </a:r>
+            <a:r>
+              <a:rPr sz="1000" b="0" i="0">
+                <a:solidFill>
+                  <a:srgbClr val="3F3F3F"/>
+                </a:solidFill>
+                <a:latin typeface="Segoe UI"/>
+              </a:rPr>
+              <a:t>and </a:t>
+            </a:r>
+            <a:r>
+              <a:rPr sz="1000" b="0" i="0">
+                <a:solidFill>
+                  <a:srgbClr val="3F3F3F"/>
+                </a:solidFill>
+                <a:latin typeface="Segoe UI"/>
+              </a:rPr>
+              <a:t>private </a:t>
+            </a:r>
+            <a:r>
+              <a:rPr sz="1000" b="0" i="0">
+                <a:solidFill>
+                  <a:srgbClr val="3F3F3F"/>
+                </a:solidFill>
+                <a:latin typeface="Segoe UI"/>
+              </a:rPr>
+              <a:t>partners </a:t>
+            </a:r>
+            <a:r>
+              <a:rPr sz="1000" b="0" i="0">
+                <a:solidFill>
+                  <a:srgbClr val="3F3F3F"/>
+                </a:solidFill>
+                <a:latin typeface="Segoe UI"/>
+              </a:rPr>
+              <a:t>co-invested </a:t>
+            </a:r>
+            <a:r>
+              <a:rPr sz="1000" b="1" i="0">
+                <a:solidFill>
+                  <a:srgbClr val="3F3F3F"/>
+                </a:solidFill>
+                <a:latin typeface="Segoe UI"/>
+              </a:rPr>
+              <a:t>$1,426 </a:t>
+            </a:r>
+            <a:r>
+              <a:rPr sz="1000" b="1" i="0">
+                <a:solidFill>
+                  <a:srgbClr val="3F3F3F"/>
+                </a:solidFill>
+                <a:latin typeface="Segoe UI"/>
+              </a:rPr>
+              <a:t>Mn</a:t>
+            </a:r>
+            <a:r>
+              <a:rPr sz="1000" b="0" i="0">
+                <a:solidFill>
+                  <a:srgbClr val="3F3F3F"/>
+                </a:solidFill>
+                <a:latin typeface="Segoe UI"/>
+              </a:rPr>
+              <a:t> </a:t>
+            </a:r>
+            <a:r>
+              <a:rPr sz="1000" b="0" i="0">
+                <a:solidFill>
+                  <a:srgbClr val="3F3F3F"/>
+                </a:solidFill>
+                <a:latin typeface="Segoe UI"/>
+              </a:rPr>
+              <a:t>against </a:t>
+            </a:r>
+            <a:r>
+              <a:rPr sz="1000" b="0" i="0">
+                <a:solidFill>
+                  <a:srgbClr val="3F3F3F"/>
+                </a:solidFill>
+                <a:latin typeface="Segoe UI"/>
+              </a:rPr>
+              <a:t>program </a:t>
+            </a:r>
+            <a:r>
+              <a:rPr sz="1000" b="0" i="0">
+                <a:solidFill>
+                  <a:srgbClr val="3F3F3F"/>
+                </a:solidFill>
+                <a:latin typeface="Segoe UI"/>
+              </a:rPr>
+              <a:t>funding, </a:t>
+            </a:r>
+            <a:r>
+              <a:rPr sz="1000" b="0" i="0">
+                <a:solidFill>
+                  <a:srgbClr val="3F3F3F"/>
+                </a:solidFill>
+                <a:latin typeface="Segoe UI"/>
+              </a:rPr>
+              <a:t>with </a:t>
+            </a:r>
+            <a:r>
+              <a:rPr sz="1000" b="0" i="0">
+                <a:solidFill>
+                  <a:srgbClr val="3F3F3F"/>
+                </a:solidFill>
+                <a:latin typeface="Segoe UI"/>
+              </a:rPr>
+              <a:t>a </a:t>
+            </a:r>
+            <a:r>
+              <a:rPr sz="1000" b="0" i="0">
+                <a:solidFill>
+                  <a:srgbClr val="3F3F3F"/>
+                </a:solidFill>
+                <a:latin typeface="Segoe UI"/>
+              </a:rPr>
+              <a:t>64% </a:t>
+            </a:r>
+            <a:r>
+              <a:rPr sz="1000" b="0" i="0">
+                <a:solidFill>
+                  <a:srgbClr val="3F3F3F"/>
+                </a:solidFill>
+                <a:latin typeface="Segoe UI"/>
+              </a:rPr>
+              <a:t>adoption </a:t>
+            </a:r>
+            <a:r>
+              <a:rPr sz="1000" b="0" i="0">
+                <a:solidFill>
+                  <a:srgbClr val="3F3F3F"/>
+                </a:solidFill>
+                <a:latin typeface="Segoe UI"/>
+              </a:rPr>
+              <a:t>rate </a:t>
+            </a:r>
+            <a:r>
+              <a:rPr sz="1000" b="0" i="0">
+                <a:solidFill>
+                  <a:srgbClr val="3F3F3F"/>
+                </a:solidFill>
+                <a:latin typeface="Segoe UI"/>
+              </a:rPr>
+              <a:t>of </a:t>
+            </a:r>
+            <a:r>
+              <a:rPr sz="1000" b="0" i="0">
+                <a:solidFill>
+                  <a:srgbClr val="3F3F3F"/>
+                </a:solidFill>
+                <a:latin typeface="Segoe UI"/>
+              </a:rPr>
+              <a:t>programmatic </a:t>
+            </a:r>
+            <a:r>
+              <a:rPr sz="1000" b="0" i="0">
+                <a:solidFill>
+                  <a:srgbClr val="3F3F3F"/>
+                </a:solidFill>
+                <a:latin typeface="Segoe UI"/>
+              </a:rPr>
+              <a:t>interventions.</a:t>
             </a:r>
           </a:p>
         </p:txBody>
       </p:sp>
       <p:cxnSp>
         <p:nvCxnSpPr>
-          <p:cNvPr id="3" name="Connector 2"/>
+          <p:cNvPr id="11" name="Connector 10"/>
           <p:cNvCxnSpPr/>
           <p:nvPr/>
         </p:nvCxnSpPr>
         <p:spPr>
           <a:xfrm>
-            <a:off x="411480" y="893919"/>
+            <a:off x="411480" y="6473952"/>
             <a:ext cx="11369040" cy="0"/>
           </a:xfrm>
           <a:prstGeom prst="line">
             <a:avLst/>
           </a:prstGeom>
-          <a:ln w="9525">
+          <a:ln w="12700">
             <a:solidFill>
               <a:srgbClr val="BFBFBF"/>
             </a:solidFill>
@@ -3665,14 +4826,14 @@
       </p:cxnSp>
       <p:sp>
         <p:nvSpPr>
-          <p:cNvPr id="4" name="TextBox 3"/>
+          <p:cNvPr id="12" name="TextBox 11"/>
           <p:cNvSpPr txBox="1"/>
           <p:nvPr/>
         </p:nvSpPr>
         <p:spPr>
           <a:xfrm>
-            <a:off x="411480" y="1691640"/>
-            <a:ext cx="11369040" cy="236488"/>
+            <a:off x="411480" y="6537960"/>
+            <a:ext cx="1828800" cy="228600"/>
           </a:xfrm>
           <a:prstGeom prst="rect">
             <a:avLst/>
@@ -3686,38 +4847,35 @@
           <a:lstStyle/>
           <a:p>
             <a:pPr algn="l">
-              <a:lnSpc>
-                <a:spcPts val="1862"/>
-              </a:lnSpc>
-              <a:spcBef>
-                <a:spcPts val="0"/>
-              </a:spcBef>
-              <a:spcAft>
-                <a:spcPts val="0"/>
-              </a:spcAft>
-            </a:pPr>
-            <a:r>
-              <a:rPr sz="1400" b="0" i="0">
-                <a:solidFill>
-                  <a:srgbClr val="1F3864"/>
-                </a:solidFill>
-                <a:latin typeface="Segoe UI"/>
-              </a:rPr>
-              <a:t>Reach</a:t>
-            </a:r>
-          </a:p>
-        </p:txBody>
-      </p:sp>
-      <p:sp>
-        <p:nvSpPr>
-          <p:cNvPr id="5" name="TextBox 4"/>
+              <a:spcBef>
+                <a:spcPts val="0"/>
+              </a:spcBef>
+              <a:spcAft>
+                <a:spcPts val="0"/>
+              </a:spcAft>
+            </a:pPr>
+            <a:r>
+              <a:rPr sz="750" b="0" i="0">
+                <a:solidFill>
+                  <a:srgbClr val="757575"/>
+                </a:solidFill>
+                <a:latin typeface="Segoe UI"/>
+              </a:rPr>
+              <a:t>6 July 2026</a:t>
+            </a:r>
+          </a:p>
+        </p:txBody>
+      </p:sp>
+      <p:sp>
+        <p:nvSpPr>
+          <p:cNvPr id="13" name="TextBox 12"/>
           <p:cNvSpPr txBox="1"/>
           <p:nvPr/>
         </p:nvSpPr>
         <p:spPr>
           <a:xfrm>
-            <a:off x="411480" y="2010424"/>
-            <a:ext cx="11369040" cy="168920"/>
+            <a:off x="4267200" y="6537960"/>
+            <a:ext cx="3657600" cy="228600"/>
           </a:xfrm>
           <a:prstGeom prst="rect">
             <a:avLst/>
@@ -3730,1158 +4888,7 @@
           </a:bodyPr>
           <a:lstStyle/>
           <a:p>
-            <a:pPr algn="l">
-              <a:lnSpc>
-                <a:spcPts val="1330"/>
-              </a:lnSpc>
-              <a:spcBef>
-                <a:spcPts val="0"/>
-              </a:spcBef>
-              <a:spcAft>
-                <a:spcPts val="0"/>
-              </a:spcAft>
-            </a:pPr>
-            <a:r>
-              <a:rPr sz="1000" b="0" i="0">
-                <a:solidFill>
-                  <a:srgbClr val="3F3F3F"/>
-                </a:solidFill>
-                <a:latin typeface="Segoe UI"/>
-              </a:rPr>
-              <a:t>Programs </a:t>
-            </a:r>
-            <a:r>
-              <a:rPr sz="1000" b="0" i="0">
-                <a:solidFill>
-                  <a:srgbClr val="3F3F3F"/>
-                </a:solidFill>
-                <a:latin typeface="Segoe UI"/>
-              </a:rPr>
-              <a:t>reached </a:t>
-            </a:r>
-            <a:r>
-              <a:rPr sz="1000" b="1" i="0">
-                <a:solidFill>
-                  <a:srgbClr val="3F3F3F"/>
-                </a:solidFill>
-                <a:latin typeface="Segoe UI"/>
-              </a:rPr>
-              <a:t>3M </a:t>
-            </a:r>
-            <a:r>
-              <a:rPr sz="1000" b="1" i="0">
-                <a:solidFill>
-                  <a:srgbClr val="3F3F3F"/>
-                </a:solidFill>
-                <a:latin typeface="Segoe UI"/>
-              </a:rPr>
-              <a:t>farmers </a:t>
-            </a:r>
-            <a:r>
-              <a:rPr sz="1000" b="1" i="0">
-                <a:solidFill>
-                  <a:srgbClr val="3F3F3F"/>
-                </a:solidFill>
-                <a:latin typeface="Segoe UI"/>
-              </a:rPr>
-              <a:t>directly</a:t>
-            </a:r>
-            <a:r>
-              <a:rPr sz="1000" b="0" i="0">
-                <a:solidFill>
-                  <a:srgbClr val="3F3F3F"/>
-                </a:solidFill>
-                <a:latin typeface="Segoe UI"/>
-              </a:rPr>
-              <a:t> </a:t>
-            </a:r>
-            <a:r>
-              <a:rPr sz="1000" b="0" i="0">
-                <a:solidFill>
-                  <a:srgbClr val="3F3F3F"/>
-                </a:solidFill>
-                <a:latin typeface="Segoe UI"/>
-              </a:rPr>
-              <a:t>and </a:t>
-            </a:r>
-            <a:r>
-              <a:rPr sz="1000" b="0" i="0">
-                <a:solidFill>
-                  <a:srgbClr val="3F3F3F"/>
-                </a:solidFill>
-                <a:latin typeface="Segoe UI"/>
-              </a:rPr>
-              <a:t>3M </a:t>
-            </a:r>
-            <a:r>
-              <a:rPr sz="1000" b="0" i="0">
-                <a:solidFill>
-                  <a:srgbClr val="3F3F3F"/>
-                </a:solidFill>
-                <a:latin typeface="Segoe UI"/>
-              </a:rPr>
-              <a:t>more </a:t>
-            </a:r>
-            <a:r>
-              <a:rPr sz="1000" b="0" i="0">
-                <a:solidFill>
-                  <a:srgbClr val="3F3F3F"/>
-                </a:solidFill>
-                <a:latin typeface="Segoe UI"/>
-              </a:rPr>
-              <a:t>through </a:t>
-            </a:r>
-            <a:r>
-              <a:rPr sz="1000" b="0" i="0">
-                <a:solidFill>
-                  <a:srgbClr val="3F3F3F"/>
-                </a:solidFill>
-                <a:latin typeface="Segoe UI"/>
-              </a:rPr>
-              <a:t>diffusion </a:t>
-            </a:r>
-            <a:r>
-              <a:rPr sz="1000" b="0" i="0">
-                <a:solidFill>
-                  <a:srgbClr val="3F3F3F"/>
-                </a:solidFill>
-                <a:latin typeface="Segoe UI"/>
-              </a:rPr>
-              <a:t>in </a:t>
-            </a:r>
-            <a:r>
-              <a:rPr sz="1000" b="0" i="0">
-                <a:solidFill>
-                  <a:srgbClr val="3F3F3F"/>
-                </a:solidFill>
-                <a:latin typeface="Segoe UI"/>
-              </a:rPr>
-              <a:t>AY </a:t>
-            </a:r>
-            <a:r>
-              <a:rPr sz="1000" b="0" i="0">
-                <a:solidFill>
-                  <a:srgbClr val="3F3F3F"/>
-                </a:solidFill>
-                <a:latin typeface="Segoe UI"/>
-              </a:rPr>
-              <a:t>2024-25, </a:t>
-            </a:r>
-            <a:r>
-              <a:rPr sz="1000" b="0" i="0">
-                <a:solidFill>
-                  <a:srgbClr val="3F3F3F"/>
-                </a:solidFill>
-                <a:latin typeface="Segoe UI"/>
-              </a:rPr>
-              <a:t>with </a:t>
-            </a:r>
-            <a:r>
-              <a:rPr sz="1000" b="0" i="0">
-                <a:solidFill>
-                  <a:srgbClr val="3F3F3F"/>
-                </a:solidFill>
-                <a:latin typeface="Segoe UI"/>
-              </a:rPr>
-              <a:t>digital </a:t>
-            </a:r>
-            <a:r>
-              <a:rPr sz="1000" b="0" i="0">
-                <a:solidFill>
-                  <a:srgbClr val="3F3F3F"/>
-                </a:solidFill>
-                <a:latin typeface="Segoe UI"/>
-              </a:rPr>
-              <a:t>channels </a:t>
-            </a:r>
-            <a:r>
-              <a:rPr sz="1000" b="0" i="0">
-                <a:solidFill>
-                  <a:srgbClr val="3F3F3F"/>
-                </a:solidFill>
-                <a:latin typeface="Segoe UI"/>
-              </a:rPr>
-              <a:t>adding </a:t>
-            </a:r>
-            <a:r>
-              <a:rPr sz="1000" b="1" i="0">
-                <a:solidFill>
-                  <a:srgbClr val="3F3F3F"/>
-                </a:solidFill>
-                <a:latin typeface="Segoe UI"/>
-              </a:rPr>
-              <a:t>66M</a:t>
-            </a:r>
-            <a:r>
-              <a:rPr sz="1000" b="0" i="0">
-                <a:solidFill>
-                  <a:srgbClr val="3F3F3F"/>
-                </a:solidFill>
-                <a:latin typeface="Segoe UI"/>
-              </a:rPr>
-              <a:t> </a:t>
-            </a:r>
-            <a:r>
-              <a:rPr sz="1000" b="0" i="0">
-                <a:solidFill>
-                  <a:srgbClr val="3F3F3F"/>
-                </a:solidFill>
-                <a:latin typeface="Segoe UI"/>
-              </a:rPr>
-              <a:t>touchpoints </a:t>
-            </a:r>
-            <a:r>
-              <a:rPr sz="1000" b="0" i="0">
-                <a:solidFill>
-                  <a:srgbClr val="3F3F3F"/>
-                </a:solidFill>
-                <a:latin typeface="Segoe UI"/>
-              </a:rPr>
-              <a:t>across </a:t>
-            </a:r>
-            <a:r>
-              <a:rPr sz="1000" b="0" i="0">
-                <a:solidFill>
-                  <a:srgbClr val="3F3F3F"/>
-                </a:solidFill>
-                <a:latin typeface="Segoe UI"/>
-              </a:rPr>
-              <a:t>advisory, </a:t>
-            </a:r>
-            <a:r>
-              <a:rPr sz="1000" b="0" i="0">
-                <a:solidFill>
-                  <a:srgbClr val="3F3F3F"/>
-                </a:solidFill>
-                <a:latin typeface="Segoe UI"/>
-              </a:rPr>
-              <a:t>market </a:t>
-            </a:r>
-            <a:r>
-              <a:rPr sz="1000" b="0" i="0">
-                <a:solidFill>
-                  <a:srgbClr val="3F3F3F"/>
-                </a:solidFill>
-                <a:latin typeface="Segoe UI"/>
-              </a:rPr>
-              <a:t>linkage </a:t>
-            </a:r>
-            <a:r>
-              <a:rPr sz="1000" b="0" i="0">
-                <a:solidFill>
-                  <a:srgbClr val="3F3F3F"/>
-                </a:solidFill>
-                <a:latin typeface="Segoe UI"/>
-              </a:rPr>
-              <a:t>and </a:t>
-            </a:r>
-            <a:r>
-              <a:rPr sz="1000" b="0" i="0">
-                <a:solidFill>
-                  <a:srgbClr val="3F3F3F"/>
-                </a:solidFill>
-                <a:latin typeface="Segoe UI"/>
-              </a:rPr>
-              <a:t>DPI </a:t>
-            </a:r>
-            <a:r>
-              <a:rPr sz="1000" b="0" i="0">
-                <a:solidFill>
-                  <a:srgbClr val="3F3F3F"/>
-                </a:solidFill>
-                <a:latin typeface="Segoe UI"/>
-              </a:rPr>
-              <a:t>rails.</a:t>
-            </a:r>
-          </a:p>
-        </p:txBody>
-      </p:sp>
-      <p:sp>
-        <p:nvSpPr>
-          <p:cNvPr id="6" name="TextBox 5"/>
-          <p:cNvSpPr txBox="1"/>
-          <p:nvPr/>
-        </p:nvSpPr>
-        <p:spPr>
-          <a:xfrm>
-            <a:off x="411480" y="2435376"/>
-            <a:ext cx="11369040" cy="236488"/>
-          </a:xfrm>
-          <a:prstGeom prst="rect">
-            <a:avLst/>
-          </a:prstGeom>
-          <a:noFill/>
-        </p:spPr>
-        <p:txBody>
-          <a:bodyPr wrap="square" lIns="0" rIns="0" tIns="0" bIns="0" anchor="t">
-            <a:noAutofit/>
-          </a:bodyPr>
-          <a:lstStyle/>
-          <a:p>
-            <a:pPr algn="l">
-              <a:lnSpc>
-                <a:spcPts val="1862"/>
-              </a:lnSpc>
-              <a:spcBef>
-                <a:spcPts val="0"/>
-              </a:spcBef>
-              <a:spcAft>
-                <a:spcPts val="0"/>
-              </a:spcAft>
-            </a:pPr>
-            <a:r>
-              <a:rPr sz="1400" b="0" i="0">
-                <a:solidFill>
-                  <a:srgbClr val="1F3864"/>
-                </a:solidFill>
-                <a:latin typeface="Segoe UI"/>
-              </a:rPr>
-              <a:t>Income</a:t>
-            </a:r>
-          </a:p>
-        </p:txBody>
-      </p:sp>
-      <p:sp>
-        <p:nvSpPr>
-          <p:cNvPr id="7" name="TextBox 6"/>
-          <p:cNvSpPr txBox="1"/>
-          <p:nvPr/>
-        </p:nvSpPr>
-        <p:spPr>
-          <a:xfrm>
-            <a:off x="411480" y="2754160"/>
-            <a:ext cx="11369040" cy="168920"/>
-          </a:xfrm>
-          <a:prstGeom prst="rect">
-            <a:avLst/>
-          </a:prstGeom>
-          <a:noFill/>
-        </p:spPr>
-        <p:txBody>
-          <a:bodyPr wrap="square" lIns="0" rIns="0" tIns="0" bIns="0" anchor="t">
-            <a:noAutofit/>
-          </a:bodyPr>
-          <a:lstStyle/>
-          <a:p>
-            <a:pPr algn="l">
-              <a:lnSpc>
-                <a:spcPts val="1330"/>
-              </a:lnSpc>
-              <a:spcBef>
-                <a:spcPts val="0"/>
-              </a:spcBef>
-              <a:spcAft>
-                <a:spcPts val="0"/>
-              </a:spcAft>
-            </a:pPr>
-            <a:r>
-              <a:rPr sz="1000" b="0" i="0">
-                <a:solidFill>
-                  <a:srgbClr val="3F3F3F"/>
-                </a:solidFill>
-                <a:latin typeface="Segoe UI"/>
-              </a:rPr>
-              <a:t>Direct-beneficiary </a:t>
-            </a:r>
-            <a:r>
-              <a:rPr sz="1000" b="0" i="0">
-                <a:solidFill>
-                  <a:srgbClr val="3F3F3F"/>
-                </a:solidFill>
-                <a:latin typeface="Segoe UI"/>
-              </a:rPr>
-              <a:t>households </a:t>
-            </a:r>
-            <a:r>
-              <a:rPr sz="1000" b="0" i="0">
-                <a:solidFill>
-                  <a:srgbClr val="3F3F3F"/>
-                </a:solidFill>
-                <a:latin typeface="Segoe UI"/>
-              </a:rPr>
-              <a:t>out-earned </a:t>
-            </a:r>
-            <a:r>
-              <a:rPr sz="1000" b="0" i="0">
-                <a:solidFill>
-                  <a:srgbClr val="3F3F3F"/>
-                </a:solidFill>
-                <a:latin typeface="Segoe UI"/>
-              </a:rPr>
-              <a:t>state </a:t>
-            </a:r>
-            <a:r>
-              <a:rPr sz="1000" b="0" i="0">
-                <a:solidFill>
-                  <a:srgbClr val="3F3F3F"/>
-                </a:solidFill>
-                <a:latin typeface="Segoe UI"/>
-              </a:rPr>
-              <a:t>averages </a:t>
-            </a:r>
-            <a:r>
-              <a:rPr sz="1000" b="0" i="0">
-                <a:solidFill>
-                  <a:srgbClr val="3F3F3F"/>
-                </a:solidFill>
-                <a:latin typeface="Segoe UI"/>
-              </a:rPr>
-              <a:t>in </a:t>
-            </a:r>
-            <a:r>
-              <a:rPr sz="1000" b="0" i="0">
-                <a:solidFill>
-                  <a:srgbClr val="3F3F3F"/>
-                </a:solidFill>
-                <a:latin typeface="Segoe UI"/>
-              </a:rPr>
-              <a:t>every </a:t>
-            </a:r>
-            <a:r>
-              <a:rPr sz="1000" b="0" i="0">
-                <a:solidFill>
-                  <a:srgbClr val="3F3F3F"/>
-                </a:solidFill>
-                <a:latin typeface="Segoe UI"/>
-              </a:rPr>
-              <a:t>geography </a:t>
-            </a:r>
-            <a:r>
-              <a:rPr sz="1000" b="0" i="0">
-                <a:solidFill>
-                  <a:srgbClr val="3F3F3F"/>
-                </a:solidFill>
-                <a:latin typeface="Segoe UI"/>
-              </a:rPr>
-              <a:t>— </a:t>
-            </a:r>
-            <a:r>
-              <a:rPr sz="1000" b="1" i="0">
-                <a:solidFill>
-                  <a:srgbClr val="3F3F3F"/>
-                </a:solidFill>
-                <a:latin typeface="Segoe UI"/>
-              </a:rPr>
-              <a:t>+2.7%</a:t>
-            </a:r>
-            <a:r>
-              <a:rPr sz="1000" b="0" i="0">
-                <a:solidFill>
-                  <a:srgbClr val="3F3F3F"/>
-                </a:solidFill>
-                <a:latin typeface="Segoe UI"/>
-              </a:rPr>
-              <a:t> </a:t>
-            </a:r>
-            <a:r>
-              <a:rPr sz="1000" b="0" i="0">
-                <a:solidFill>
-                  <a:srgbClr val="3F3F3F"/>
-                </a:solidFill>
-                <a:latin typeface="Segoe UI"/>
-              </a:rPr>
-              <a:t>in </a:t>
-            </a:r>
-            <a:r>
-              <a:rPr sz="1000" b="0" i="0">
-                <a:solidFill>
-                  <a:srgbClr val="3F3F3F"/>
-                </a:solidFill>
-                <a:latin typeface="Segoe UI"/>
-              </a:rPr>
-              <a:t>Uttar </a:t>
-            </a:r>
-            <a:r>
-              <a:rPr sz="1000" b="0" i="0">
-                <a:solidFill>
-                  <a:srgbClr val="3F3F3F"/>
-                </a:solidFill>
-                <a:latin typeface="Segoe UI"/>
-              </a:rPr>
-              <a:t>Pradesh, </a:t>
-            </a:r>
-            <a:r>
-              <a:rPr sz="1000" b="1" i="0">
-                <a:solidFill>
-                  <a:srgbClr val="3F3F3F"/>
-                </a:solidFill>
-                <a:latin typeface="Segoe UI"/>
-              </a:rPr>
-              <a:t>+5%</a:t>
-            </a:r>
-            <a:r>
-              <a:rPr sz="1000" b="0" i="0">
-                <a:solidFill>
-                  <a:srgbClr val="3F3F3F"/>
-                </a:solidFill>
-                <a:latin typeface="Segoe UI"/>
-              </a:rPr>
-              <a:t> </a:t>
-            </a:r>
-            <a:r>
-              <a:rPr sz="1000" b="0" i="0">
-                <a:solidFill>
-                  <a:srgbClr val="3F3F3F"/>
-                </a:solidFill>
-                <a:latin typeface="Segoe UI"/>
-              </a:rPr>
-              <a:t>in </a:t>
-            </a:r>
-            <a:r>
-              <a:rPr sz="1000" b="0" i="0">
-                <a:solidFill>
-                  <a:srgbClr val="3F3F3F"/>
-                </a:solidFill>
-                <a:latin typeface="Segoe UI"/>
-              </a:rPr>
-              <a:t>Bihar </a:t>
-            </a:r>
-            <a:r>
-              <a:rPr sz="1000" b="0" i="0">
-                <a:solidFill>
-                  <a:srgbClr val="3F3F3F"/>
-                </a:solidFill>
-                <a:latin typeface="Segoe UI"/>
-              </a:rPr>
-              <a:t>and </a:t>
-            </a:r>
-            <a:r>
-              <a:rPr sz="1000" b="1" i="0">
-                <a:solidFill>
-                  <a:srgbClr val="3F3F3F"/>
-                </a:solidFill>
-                <a:latin typeface="Segoe UI"/>
-              </a:rPr>
-              <a:t>+4.8%</a:t>
-            </a:r>
-            <a:r>
-              <a:rPr sz="1000" b="0" i="0">
-                <a:solidFill>
-                  <a:srgbClr val="3F3F3F"/>
-                </a:solidFill>
-                <a:latin typeface="Segoe UI"/>
-              </a:rPr>
-              <a:t> </a:t>
-            </a:r>
-            <a:r>
-              <a:rPr sz="1000" b="0" i="0">
-                <a:solidFill>
-                  <a:srgbClr val="3F3F3F"/>
-                </a:solidFill>
-                <a:latin typeface="Segoe UI"/>
-              </a:rPr>
-              <a:t>in </a:t>
-            </a:r>
-            <a:r>
-              <a:rPr sz="1000" b="0" i="0">
-                <a:solidFill>
-                  <a:srgbClr val="3F3F3F"/>
-                </a:solidFill>
-                <a:latin typeface="Segoe UI"/>
-              </a:rPr>
-              <a:t>Odisha </a:t>
-            </a:r>
-            <a:r>
-              <a:rPr sz="1000" b="0" i="0">
-                <a:solidFill>
-                  <a:srgbClr val="3F3F3F"/>
-                </a:solidFill>
-                <a:latin typeface="Segoe UI"/>
-              </a:rPr>
-              <a:t>from </a:t>
-            </a:r>
-            <a:r>
-              <a:rPr sz="1000" b="0" i="0">
-                <a:solidFill>
-                  <a:srgbClr val="3F3F3F"/>
-                </a:solidFill>
-                <a:latin typeface="Segoe UI"/>
-              </a:rPr>
-              <a:t>crops </a:t>
-            </a:r>
-            <a:r>
-              <a:rPr sz="1000" b="0" i="0">
-                <a:solidFill>
-                  <a:srgbClr val="3F3F3F"/>
-                </a:solidFill>
-                <a:latin typeface="Segoe UI"/>
-              </a:rPr>
-              <a:t>and </a:t>
-            </a:r>
-            <a:r>
-              <a:rPr sz="1000" b="0" i="0">
-                <a:solidFill>
-                  <a:srgbClr val="3F3F3F"/>
-                </a:solidFill>
-                <a:latin typeface="Segoe UI"/>
-              </a:rPr>
-              <a:t>livestock.</a:t>
-            </a:r>
-          </a:p>
-        </p:txBody>
-      </p:sp>
-      <p:sp>
-        <p:nvSpPr>
-          <p:cNvPr id="8" name="TextBox 7"/>
-          <p:cNvSpPr txBox="1"/>
-          <p:nvPr/>
-        </p:nvSpPr>
-        <p:spPr>
-          <a:xfrm>
-            <a:off x="411480" y="3179112"/>
-            <a:ext cx="11369040" cy="236488"/>
-          </a:xfrm>
-          <a:prstGeom prst="rect">
-            <a:avLst/>
-          </a:prstGeom>
-          <a:noFill/>
-        </p:spPr>
-        <p:txBody>
-          <a:bodyPr wrap="square" lIns="0" rIns="0" tIns="0" bIns="0" anchor="t">
-            <a:noAutofit/>
-          </a:bodyPr>
-          <a:lstStyle/>
-          <a:p>
-            <a:pPr algn="l">
-              <a:lnSpc>
-                <a:spcPts val="1862"/>
-              </a:lnSpc>
-              <a:spcBef>
-                <a:spcPts val="0"/>
-              </a:spcBef>
-              <a:spcAft>
-                <a:spcPts val="0"/>
-              </a:spcAft>
-            </a:pPr>
-            <a:r>
-              <a:rPr sz="1400" b="0" i="0">
-                <a:solidFill>
-                  <a:srgbClr val="1F3864"/>
-                </a:solidFill>
-                <a:latin typeface="Segoe UI"/>
-              </a:rPr>
-              <a:t>Resilience</a:t>
-            </a:r>
-          </a:p>
-        </p:txBody>
-      </p:sp>
-      <p:sp>
-        <p:nvSpPr>
-          <p:cNvPr id="9" name="TextBox 8"/>
-          <p:cNvSpPr txBox="1"/>
-          <p:nvPr/>
-        </p:nvSpPr>
-        <p:spPr>
-          <a:xfrm>
-            <a:off x="411480" y="3497896"/>
-            <a:ext cx="11369040" cy="168920"/>
-          </a:xfrm>
-          <a:prstGeom prst="rect">
-            <a:avLst/>
-          </a:prstGeom>
-          <a:noFill/>
-        </p:spPr>
-        <p:txBody>
-          <a:bodyPr wrap="square" lIns="0" rIns="0" tIns="0" bIns="0" anchor="t">
-            <a:noAutofit/>
-          </a:bodyPr>
-          <a:lstStyle/>
-          <a:p>
-            <a:pPr algn="l">
-              <a:lnSpc>
-                <a:spcPts val="1330"/>
-              </a:lnSpc>
-              <a:spcBef>
-                <a:spcPts val="0"/>
-              </a:spcBef>
-              <a:spcAft>
-                <a:spcPts val="0"/>
-              </a:spcAft>
-            </a:pPr>
-            <a:r>
-              <a:rPr sz="1000" b="0" i="0">
-                <a:solidFill>
-                  <a:srgbClr val="3F3F3F"/>
-                </a:solidFill>
-                <a:latin typeface="Segoe UI"/>
-              </a:rPr>
-              <a:t>Advisory </a:t>
-            </a:r>
-            <a:r>
-              <a:rPr sz="1000" b="0" i="0">
-                <a:solidFill>
-                  <a:srgbClr val="3F3F3F"/>
-                </a:solidFill>
-                <a:latin typeface="Segoe UI"/>
-              </a:rPr>
-              <a:t>recipients </a:t>
-            </a:r>
-            <a:r>
-              <a:rPr sz="1000" b="0" i="0">
-                <a:solidFill>
-                  <a:srgbClr val="3F3F3F"/>
-                </a:solidFill>
-                <a:latin typeface="Segoe UI"/>
-              </a:rPr>
-              <a:t>cut </a:t>
-            </a:r>
-            <a:r>
-              <a:rPr sz="1000" b="0" i="0">
-                <a:solidFill>
-                  <a:srgbClr val="3F3F3F"/>
-                </a:solidFill>
-                <a:latin typeface="Segoe UI"/>
-              </a:rPr>
-              <a:t>crop </a:t>
-            </a:r>
-            <a:r>
-              <a:rPr sz="1000" b="0" i="0">
-                <a:solidFill>
-                  <a:srgbClr val="3F3F3F"/>
-                </a:solidFill>
-                <a:latin typeface="Segoe UI"/>
-              </a:rPr>
-              <a:t>losses </a:t>
-            </a:r>
-            <a:r>
-              <a:rPr sz="1000" b="0" i="0">
-                <a:solidFill>
-                  <a:srgbClr val="3F3F3F"/>
-                </a:solidFill>
-                <a:latin typeface="Segoe UI"/>
-              </a:rPr>
-              <a:t>by </a:t>
-            </a:r>
-            <a:r>
-              <a:rPr sz="1000" b="1" i="0">
-                <a:solidFill>
-                  <a:srgbClr val="3F3F3F"/>
-                </a:solidFill>
-                <a:latin typeface="Segoe UI"/>
-              </a:rPr>
-              <a:t>2-8 </a:t>
-            </a:r>
-            <a:r>
-              <a:rPr sz="1000" b="1" i="0">
-                <a:solidFill>
-                  <a:srgbClr val="3F3F3F"/>
-                </a:solidFill>
-                <a:latin typeface="Segoe UI"/>
-              </a:rPr>
-              <a:t>percentage </a:t>
-            </a:r>
-            <a:r>
-              <a:rPr sz="1000" b="1" i="0">
-                <a:solidFill>
-                  <a:srgbClr val="3F3F3F"/>
-                </a:solidFill>
-                <a:latin typeface="Segoe UI"/>
-              </a:rPr>
-              <a:t>points</a:t>
-            </a:r>
-            <a:r>
-              <a:rPr sz="1000" b="0" i="0">
-                <a:solidFill>
-                  <a:srgbClr val="3F3F3F"/>
-                </a:solidFill>
-                <a:latin typeface="Segoe UI"/>
-              </a:rPr>
-              <a:t>, </a:t>
-            </a:r>
-            <a:r>
-              <a:rPr sz="1000" b="0" i="0">
-                <a:solidFill>
-                  <a:srgbClr val="3F3F3F"/>
-                </a:solidFill>
-                <a:latin typeface="Segoe UI"/>
-              </a:rPr>
-              <a:t>worth </a:t>
-            </a:r>
-            <a:r>
-              <a:rPr sz="1000" b="0" i="0">
-                <a:solidFill>
-                  <a:srgbClr val="3F3F3F"/>
-                </a:solidFill>
-                <a:latin typeface="Segoe UI"/>
-              </a:rPr>
-              <a:t>$14-31 </a:t>
-            </a:r>
-            <a:r>
-              <a:rPr sz="1000" b="0" i="0">
-                <a:solidFill>
-                  <a:srgbClr val="3F3F3F"/>
-                </a:solidFill>
-                <a:latin typeface="Segoe UI"/>
-              </a:rPr>
-              <a:t>per </a:t>
-            </a:r>
-            <a:r>
-              <a:rPr sz="1000" b="0" i="0">
-                <a:solidFill>
-                  <a:srgbClr val="3F3F3F"/>
-                </a:solidFill>
-                <a:latin typeface="Segoe UI"/>
-              </a:rPr>
-              <a:t>farmer </a:t>
-            </a:r>
-            <a:r>
-              <a:rPr sz="1000" b="0" i="0">
-                <a:solidFill>
-                  <a:srgbClr val="3F3F3F"/>
-                </a:solidFill>
-                <a:latin typeface="Segoe UI"/>
-              </a:rPr>
-              <a:t>per </a:t>
-            </a:r>
-            <a:r>
-              <a:rPr sz="1000" b="0" i="0">
-                <a:solidFill>
-                  <a:srgbClr val="3F3F3F"/>
-                </a:solidFill>
-                <a:latin typeface="Segoe UI"/>
-              </a:rPr>
-              <a:t>season </a:t>
-            </a:r>
-            <a:r>
-              <a:rPr sz="1000" b="0" i="0">
-                <a:solidFill>
-                  <a:srgbClr val="3F3F3F"/>
-                </a:solidFill>
-                <a:latin typeface="Segoe UI"/>
-              </a:rPr>
-              <a:t>depending </a:t>
-            </a:r>
-            <a:r>
-              <a:rPr sz="1000" b="0" i="0">
-                <a:solidFill>
-                  <a:srgbClr val="3F3F3F"/>
-                </a:solidFill>
-                <a:latin typeface="Segoe UI"/>
-              </a:rPr>
-              <a:t>on </a:t>
-            </a:r>
-            <a:r>
-              <a:rPr sz="1000" b="0" i="0">
-                <a:solidFill>
-                  <a:srgbClr val="3F3F3F"/>
-                </a:solidFill>
-                <a:latin typeface="Segoe UI"/>
-              </a:rPr>
-              <a:t>state.</a:t>
-            </a:r>
-          </a:p>
-        </p:txBody>
-      </p:sp>
-      <p:sp>
-        <p:nvSpPr>
-          <p:cNvPr id="10" name="TextBox 9"/>
-          <p:cNvSpPr txBox="1"/>
-          <p:nvPr/>
-        </p:nvSpPr>
-        <p:spPr>
-          <a:xfrm>
-            <a:off x="411480" y="3922848"/>
-            <a:ext cx="11369040" cy="236488"/>
-          </a:xfrm>
-          <a:prstGeom prst="rect">
-            <a:avLst/>
-          </a:prstGeom>
-          <a:noFill/>
-        </p:spPr>
-        <p:txBody>
-          <a:bodyPr wrap="square" lIns="0" rIns="0" tIns="0" bIns="0" anchor="t">
-            <a:noAutofit/>
-          </a:bodyPr>
-          <a:lstStyle/>
-          <a:p>
-            <a:pPr algn="l">
-              <a:lnSpc>
-                <a:spcPts val="1862"/>
-              </a:lnSpc>
-              <a:spcBef>
-                <a:spcPts val="0"/>
-              </a:spcBef>
-              <a:spcAft>
-                <a:spcPts val="0"/>
-              </a:spcAft>
-            </a:pPr>
-            <a:r>
-              <a:rPr sz="1400" b="0" i="0">
-                <a:solidFill>
-                  <a:srgbClr val="1F3864"/>
-                </a:solidFill>
-                <a:latin typeface="Segoe UI"/>
-              </a:rPr>
-              <a:t>Leverage</a:t>
-            </a:r>
-          </a:p>
-        </p:txBody>
-      </p:sp>
-      <p:sp>
-        <p:nvSpPr>
-          <p:cNvPr id="11" name="TextBox 10"/>
-          <p:cNvSpPr txBox="1"/>
-          <p:nvPr/>
-        </p:nvSpPr>
-        <p:spPr>
-          <a:xfrm>
-            <a:off x="411480" y="4241632"/>
-            <a:ext cx="11369040" cy="168920"/>
-          </a:xfrm>
-          <a:prstGeom prst="rect">
-            <a:avLst/>
-          </a:prstGeom>
-          <a:noFill/>
-        </p:spPr>
-        <p:txBody>
-          <a:bodyPr wrap="square" lIns="0" rIns="0" tIns="0" bIns="0" anchor="t">
-            <a:noAutofit/>
-          </a:bodyPr>
-          <a:lstStyle/>
-          <a:p>
-            <a:pPr algn="l">
-              <a:lnSpc>
-                <a:spcPts val="1330"/>
-              </a:lnSpc>
-              <a:spcBef>
-                <a:spcPts val="0"/>
-              </a:spcBef>
-              <a:spcAft>
-                <a:spcPts val="0"/>
-              </a:spcAft>
-            </a:pPr>
-            <a:r>
-              <a:rPr sz="1000" b="0" i="0">
-                <a:solidFill>
-                  <a:srgbClr val="3F3F3F"/>
-                </a:solidFill>
-                <a:latin typeface="Segoe UI"/>
-              </a:rPr>
-              <a:t>Government </a:t>
-            </a:r>
-            <a:r>
-              <a:rPr sz="1000" b="0" i="0">
-                <a:solidFill>
-                  <a:srgbClr val="3F3F3F"/>
-                </a:solidFill>
-                <a:latin typeface="Segoe UI"/>
-              </a:rPr>
-              <a:t>and </a:t>
-            </a:r>
-            <a:r>
-              <a:rPr sz="1000" b="0" i="0">
-                <a:solidFill>
-                  <a:srgbClr val="3F3F3F"/>
-                </a:solidFill>
-                <a:latin typeface="Segoe UI"/>
-              </a:rPr>
-              <a:t>private </a:t>
-            </a:r>
-            <a:r>
-              <a:rPr sz="1000" b="0" i="0">
-                <a:solidFill>
-                  <a:srgbClr val="3F3F3F"/>
-                </a:solidFill>
-                <a:latin typeface="Segoe UI"/>
-              </a:rPr>
-              <a:t>partners </a:t>
-            </a:r>
-            <a:r>
-              <a:rPr sz="1000" b="0" i="0">
-                <a:solidFill>
-                  <a:srgbClr val="3F3F3F"/>
-                </a:solidFill>
-                <a:latin typeface="Segoe UI"/>
-              </a:rPr>
-              <a:t>co-invested </a:t>
-            </a:r>
-            <a:r>
-              <a:rPr sz="1000" b="1" i="0">
-                <a:solidFill>
-                  <a:srgbClr val="3F3F3F"/>
-                </a:solidFill>
-                <a:latin typeface="Segoe UI"/>
-              </a:rPr>
-              <a:t>$1,426 </a:t>
-            </a:r>
-            <a:r>
-              <a:rPr sz="1000" b="1" i="0">
-                <a:solidFill>
-                  <a:srgbClr val="3F3F3F"/>
-                </a:solidFill>
-                <a:latin typeface="Segoe UI"/>
-              </a:rPr>
-              <a:t>Mn</a:t>
-            </a:r>
-            <a:r>
-              <a:rPr sz="1000" b="0" i="0">
-                <a:solidFill>
-                  <a:srgbClr val="3F3F3F"/>
-                </a:solidFill>
-                <a:latin typeface="Segoe UI"/>
-              </a:rPr>
-              <a:t> </a:t>
-            </a:r>
-            <a:r>
-              <a:rPr sz="1000" b="0" i="0">
-                <a:solidFill>
-                  <a:srgbClr val="3F3F3F"/>
-                </a:solidFill>
-                <a:latin typeface="Segoe UI"/>
-              </a:rPr>
-              <a:t>against </a:t>
-            </a:r>
-            <a:r>
-              <a:rPr sz="1000" b="0" i="0">
-                <a:solidFill>
-                  <a:srgbClr val="3F3F3F"/>
-                </a:solidFill>
-                <a:latin typeface="Segoe UI"/>
-              </a:rPr>
-              <a:t>program </a:t>
-            </a:r>
-            <a:r>
-              <a:rPr sz="1000" b="0" i="0">
-                <a:solidFill>
-                  <a:srgbClr val="3F3F3F"/>
-                </a:solidFill>
-                <a:latin typeface="Segoe UI"/>
-              </a:rPr>
-              <a:t>funding, </a:t>
-            </a:r>
-            <a:r>
-              <a:rPr sz="1000" b="0" i="0">
-                <a:solidFill>
-                  <a:srgbClr val="3F3F3F"/>
-                </a:solidFill>
-                <a:latin typeface="Segoe UI"/>
-              </a:rPr>
-              <a:t>with </a:t>
-            </a:r>
-            <a:r>
-              <a:rPr sz="1000" b="0" i="0">
-                <a:solidFill>
-                  <a:srgbClr val="3F3F3F"/>
-                </a:solidFill>
-                <a:latin typeface="Segoe UI"/>
-              </a:rPr>
-              <a:t>a </a:t>
-            </a:r>
-            <a:r>
-              <a:rPr sz="1000" b="0" i="0">
-                <a:solidFill>
-                  <a:srgbClr val="3F3F3F"/>
-                </a:solidFill>
-                <a:latin typeface="Segoe UI"/>
-              </a:rPr>
-              <a:t>64% </a:t>
-            </a:r>
-            <a:r>
-              <a:rPr sz="1000" b="0" i="0">
-                <a:solidFill>
-                  <a:srgbClr val="3F3F3F"/>
-                </a:solidFill>
-                <a:latin typeface="Segoe UI"/>
-              </a:rPr>
-              <a:t>adoption </a:t>
-            </a:r>
-            <a:r>
-              <a:rPr sz="1000" b="0" i="0">
-                <a:solidFill>
-                  <a:srgbClr val="3F3F3F"/>
-                </a:solidFill>
-                <a:latin typeface="Segoe UI"/>
-              </a:rPr>
-              <a:t>rate </a:t>
-            </a:r>
-            <a:r>
-              <a:rPr sz="1000" b="0" i="0">
-                <a:solidFill>
-                  <a:srgbClr val="3F3F3F"/>
-                </a:solidFill>
-                <a:latin typeface="Segoe UI"/>
-              </a:rPr>
-              <a:t>of </a:t>
-            </a:r>
-            <a:r>
-              <a:rPr sz="1000" b="0" i="0">
-                <a:solidFill>
-                  <a:srgbClr val="3F3F3F"/>
-                </a:solidFill>
-                <a:latin typeface="Segoe UI"/>
-              </a:rPr>
-              <a:t>programmatic </a:t>
-            </a:r>
-            <a:r>
-              <a:rPr sz="1000" b="0" i="0">
-                <a:solidFill>
-                  <a:srgbClr val="3F3F3F"/>
-                </a:solidFill>
-                <a:latin typeface="Segoe UI"/>
-              </a:rPr>
-              <a:t>interventions.</a:t>
-            </a:r>
-          </a:p>
-        </p:txBody>
-      </p:sp>
-      <p:cxnSp>
-        <p:nvCxnSpPr>
-          <p:cNvPr id="12" name="Connector 11"/>
-          <p:cNvCxnSpPr/>
-          <p:nvPr/>
-        </p:nvCxnSpPr>
-        <p:spPr>
-          <a:xfrm>
-            <a:off x="411480" y="6473952"/>
-            <a:ext cx="11369040" cy="0"/>
-          </a:xfrm>
-          <a:prstGeom prst="line">
-            <a:avLst/>
-          </a:prstGeom>
-          <a:ln w="12700">
-            <a:solidFill>
-              <a:srgbClr val="BFBFBF"/>
-            </a:solidFill>
-          </a:ln>
-        </p:spPr>
-        <p:style>
-          <a:lnRef idx="2">
-            <a:schemeClr val="accent1"/>
-          </a:lnRef>
-          <a:fillRef idx="0">
-            <a:schemeClr val="accent1"/>
-          </a:fillRef>
-          <a:effectRef idx="1">
-            <a:schemeClr val="accent1"/>
-          </a:effectRef>
-          <a:fontRef idx="minor">
-            <a:schemeClr val="tx1"/>
-          </a:fontRef>
-        </p:style>
-      </p:cxnSp>
-      <p:sp>
-        <p:nvSpPr>
-          <p:cNvPr id="13" name="TextBox 12"/>
-          <p:cNvSpPr txBox="1"/>
-          <p:nvPr/>
-        </p:nvSpPr>
-        <p:spPr>
-          <a:xfrm>
-            <a:off x="411480" y="6537960"/>
-            <a:ext cx="1828800" cy="228600"/>
-          </a:xfrm>
-          <a:prstGeom prst="rect">
-            <a:avLst/>
-          </a:prstGeom>
-          <a:noFill/>
-        </p:spPr>
-        <p:txBody>
-          <a:bodyPr wrap="square" lIns="0" rIns="0" tIns="0" bIns="0" anchor="t">
-            <a:noAutofit/>
-          </a:bodyPr>
-          <a:lstStyle/>
-          <a:p>
-            <a:pPr algn="l">
+            <a:pPr algn="ctr">
               <a:spcBef>
                 <a:spcPts val="0"/>
               </a:spcBef>
@@ -4896,7 +4903,7 @@
                 </a:solidFill>
                 <a:latin typeface="Segoe UI"/>
               </a:rPr>
-              <a:t>6 July 2026</a:t>
+              <a:t>DRAFT — internal</a:t>
             </a:r>
           </a:p>
         </p:txBody>
@@ -4904,48 +4911,6 @@
       <p:sp>
         <p:nvSpPr>
           <p:cNvPr id="14" name="TextBox 13"/>
-          <p:cNvSpPr txBox="1"/>
-          <p:nvPr/>
-        </p:nvSpPr>
-        <p:spPr>
-          <a:xfrm>
-            <a:off x="4267200" y="6537960"/>
-            <a:ext cx="3657600" cy="228600"/>
-          </a:xfrm>
-          <a:prstGeom prst="rect">
-            <a:avLst/>
-          </a:prstGeom>
-          <a:noFill/>
-        </p:spPr>
-        <p:txBody>
-          <a:bodyPr wrap="square" lIns="0" rIns="0" tIns="0" bIns="0" anchor="t">
-            <a:noAutofit/>
-          </a:bodyPr>
-          <a:lstStyle/>
-          <a:p>
-            <a:pPr algn="ctr">
-              <a:spcBef>
-                <a:spcPts val="0"/>
-              </a:spcBef>
-              <a:spcAft>
-                <a:spcPts val="0"/>
-              </a:spcAft>
-            </a:pPr>
-            <a:r>
-              <a:rPr sz="750" b="0" i="0">
-                <a:solidFill>
-                  <a:srgbClr val="757575"/>
-                </a:solidFill>
-                <a:latin typeface="Segoe UI"/>
-              </a:rPr>
-              <a:t>DRAFT — internal</a:t>
-            </a:r>
-          </a:p>
-        </p:txBody>
-      </p:sp>
-      <p:sp>
-        <p:nvSpPr>
-          <p:cNvPr id="15" name="TextBox 14"/>
           <p:cNvSpPr txBox="1"/>
           <p:nvPr/>
         </p:nvSpPr>
@@ -5106,7 +5071,7 @@
         <p:spPr>
           <a:xfrm>
             <a:off x="1371600" y="2468880"/>
-            <a:ext cx="9448800" cy="432904"/>
+            <a:ext cx="9448800" cy="443726"/>
           </a:xfrm>
           <a:prstGeom prst="rect">
             <a:avLst/>
@@ -5121,7 +5086,7 @@
           <a:p>
             <a:pPr algn="ctr">
               <a:lnSpc>
-                <a:spcPts val="3408"/>
+                <a:spcPts val="3493"/>
               </a:lnSpc>
               <a:spcBef>
                 <a:spcPts val="0"/>
@@ -5159,8 +5124,8 @@
         </p:nvSpPr>
         <p:spPr>
           <a:xfrm>
-            <a:off x="1371600" y="2993224"/>
-            <a:ext cx="9448800" cy="236488"/>
+            <a:off x="1371600" y="3004046"/>
+            <a:ext cx="9448800" cy="242400"/>
           </a:xfrm>
           <a:prstGeom prst="rect">
             <a:avLst/>
@@ -5175,7 +5140,7 @@
           <a:p>
             <a:pPr algn="ctr">
               <a:lnSpc>
-                <a:spcPts val="1862"/>
+                <a:spcPts val="1908"/>
               </a:lnSpc>
               <a:spcBef>
                 <a:spcPts val="0"/>
@@ -5302,8 +5267,8 @@
         </p:nvSpPr>
         <p:spPr>
           <a:xfrm>
-            <a:off x="411480" y="518638"/>
-            <a:ext cx="11369040" cy="288603"/>
+            <a:off x="411480" y="274320"/>
+            <a:ext cx="11369040" cy="295818"/>
           </a:xfrm>
           <a:prstGeom prst="rect">
             <a:avLst/>
@@ -5318,7 +5283,7 @@
           <a:p>
             <a:pPr algn="l">
               <a:lnSpc>
-                <a:spcPts val="2272"/>
+                <a:spcPts val="2329"/>
               </a:lnSpc>
               <a:spcBef>
                 <a:spcPts val="0"/>
@@ -5455,8 +5420,8 @@
         </p:nvSpPr>
         <p:spPr>
           <a:xfrm>
-            <a:off x="1874520" y="1445380"/>
-            <a:ext cx="3277616" cy="188604"/>
+            <a:off x="1874520" y="1407816"/>
+            <a:ext cx="3277616" cy="192405"/>
           </a:xfrm>
           <a:prstGeom prst="rect">
             <a:avLst/>
@@ -5517,8 +5482,8 @@
         </p:nvSpPr>
         <p:spPr>
           <a:xfrm>
-            <a:off x="5188712" y="1445380"/>
-            <a:ext cx="3277616" cy="188604"/>
+            <a:off x="5188712" y="1407816"/>
+            <a:ext cx="3277616" cy="192405"/>
           </a:xfrm>
           <a:prstGeom prst="rect">
             <a:avLst/>
@@ -5579,8 +5544,8 @@
         </p:nvSpPr>
         <p:spPr>
           <a:xfrm>
-            <a:off x="8502904" y="1445380"/>
-            <a:ext cx="3277616" cy="188604"/>
+            <a:off x="8502904" y="1407816"/>
+            <a:ext cx="3277616" cy="192405"/>
           </a:xfrm>
           <a:prstGeom prst="rect">
             <a:avLst/>
@@ -5641,7 +5606,7 @@
         </p:nvSpPr>
         <p:spPr>
           <a:xfrm>
-            <a:off x="411480" y="1755891"/>
+            <a:off x="411480" y="1730046"/>
             <a:ext cx="1426464" cy="566928"/>
           </a:xfrm>
           <a:prstGeom prst="homePlate">
@@ -5677,7 +5642,7 @@
           <a:p>
             <a:pPr algn="ctr">
               <a:lnSpc>
-                <a:spcPts val="997"/>
+                <a:spcPts val="1022"/>
               </a:lnSpc>
               <a:spcBef>
                 <a:spcPts val="0"/>
@@ -5715,8 +5680,8 @@
         </p:nvSpPr>
         <p:spPr>
           <a:xfrm>
-            <a:off x="1874520" y="1670560"/>
-            <a:ext cx="1092539" cy="152028"/>
+            <a:off x="1874520" y="1636797"/>
+            <a:ext cx="1092539" cy="155829"/>
           </a:xfrm>
           <a:prstGeom prst="rect">
             <a:avLst/>
@@ -5731,7 +5696,7 @@
           <a:p>
             <a:pPr algn="ctr">
               <a:lnSpc>
-                <a:spcPts val="1197"/>
+                <a:spcPts val="1227"/>
               </a:lnSpc>
               <a:spcBef>
                 <a:spcPts val="0"/>
@@ -5760,8 +5725,8 @@
         </p:nvSpPr>
         <p:spPr>
           <a:xfrm>
-            <a:off x="1874520" y="1845448"/>
-            <a:ext cx="1092539" cy="228042"/>
+            <a:off x="1874520" y="1815486"/>
+            <a:ext cx="1092539" cy="233743"/>
           </a:xfrm>
           <a:prstGeom prst="rect">
             <a:avLst/>
@@ -5776,7 +5741,7 @@
           <a:p>
             <a:pPr algn="ctr">
               <a:lnSpc>
-                <a:spcPts val="1795"/>
+                <a:spcPts val="1840"/>
               </a:lnSpc>
               <a:spcBef>
                 <a:spcPts val="0"/>
@@ -5805,7 +5770,7 @@
         </p:nvCxnSpPr>
         <p:spPr>
           <a:xfrm>
-            <a:off x="2093028" y="2093556"/>
+            <a:off x="2093028" y="2069295"/>
             <a:ext cx="655523" cy="0"/>
           </a:xfrm>
           <a:prstGeom prst="line">
@@ -5840,8 +5805,8 @@
         </p:nvSpPr>
         <p:spPr>
           <a:xfrm>
-            <a:off x="2967059" y="1670560"/>
-            <a:ext cx="1092539" cy="152028"/>
+            <a:off x="2967059" y="1636797"/>
+            <a:ext cx="1092539" cy="155829"/>
           </a:xfrm>
           <a:prstGeom prst="rect">
             <a:avLst/>
@@ -5856,7 +5821,7 @@
           <a:p>
             <a:pPr algn="ctr">
               <a:lnSpc>
-                <a:spcPts val="1197"/>
+                <a:spcPts val="1227"/>
               </a:lnSpc>
               <a:spcBef>
                 <a:spcPts val="0"/>
@@ -5885,8 +5850,8 @@
         </p:nvSpPr>
         <p:spPr>
           <a:xfrm>
-            <a:off x="2967059" y="1845448"/>
-            <a:ext cx="1092539" cy="228042"/>
+            <a:off x="2967059" y="1815486"/>
+            <a:ext cx="1092539" cy="233743"/>
           </a:xfrm>
           <a:prstGeom prst="rect">
             <a:avLst/>
@@ -5901,7 +5866,7 @@
           <a:p>
             <a:pPr algn="ctr">
               <a:lnSpc>
-                <a:spcPts val="1795"/>
+                <a:spcPts val="1840"/>
               </a:lnSpc>
               <a:spcBef>
                 <a:spcPts val="0"/>
@@ -5930,7 +5895,7 @@
         </p:nvCxnSpPr>
         <p:spPr>
           <a:xfrm>
-            <a:off x="3185567" y="2093556"/>
+            <a:off x="3185567" y="2069295"/>
             <a:ext cx="655523" cy="0"/>
           </a:xfrm>
           <a:prstGeom prst="line">
@@ -5965,8 +5930,8 @@
         </p:nvSpPr>
         <p:spPr>
           <a:xfrm>
-            <a:off x="4059598" y="1670560"/>
-            <a:ext cx="1092538" cy="152028"/>
+            <a:off x="4059598" y="1636797"/>
+            <a:ext cx="1092538" cy="155829"/>
           </a:xfrm>
           <a:prstGeom prst="rect">
             <a:avLst/>
@@ -5981,7 +5946,7 @@
           <a:p>
             <a:pPr algn="ctr">
               <a:lnSpc>
-                <a:spcPts val="1197"/>
+                <a:spcPts val="1227"/>
               </a:lnSpc>
               <a:spcBef>
                 <a:spcPts val="0"/>
@@ -6010,8 +5975,8 @@
         </p:nvSpPr>
         <p:spPr>
           <a:xfrm>
-            <a:off x="4059598" y="1845448"/>
-            <a:ext cx="1092538" cy="228042"/>
+            <a:off x="4059598" y="1815486"/>
+            <a:ext cx="1092538" cy="233743"/>
           </a:xfrm>
           <a:prstGeom prst="rect">
             <a:avLst/>
@@ -6026,7 +5991,7 @@
           <a:p>
             <a:pPr algn="ctr">
               <a:lnSpc>
-                <a:spcPts val="1795"/>
+                <a:spcPts val="1840"/>
               </a:lnSpc>
               <a:spcBef>
                 <a:spcPts val="0"/>
@@ -6055,7 +6020,7 @@
         </p:nvCxnSpPr>
         <p:spPr>
           <a:xfrm>
-            <a:off x="4278105" y="2093556"/>
+            <a:off x="4278105" y="2069295"/>
             <a:ext cx="655523" cy="0"/>
           </a:xfrm>
           <a:prstGeom prst="line">
@@ -6090,8 +6055,8 @@
         </p:nvSpPr>
         <p:spPr>
           <a:xfrm>
-            <a:off x="5188712" y="1670560"/>
-            <a:ext cx="1092539" cy="152028"/>
+            <a:off x="5188712" y="1636797"/>
+            <a:ext cx="1092539" cy="155829"/>
           </a:xfrm>
           <a:prstGeom prst="rect">
             <a:avLst/>
@@ -6106,7 +6071,7 @@
           <a:p>
             <a:pPr algn="ctr">
               <a:lnSpc>
-                <a:spcPts val="1197"/>
+                <a:spcPts val="1227"/>
               </a:lnSpc>
               <a:spcBef>
                 <a:spcPts val="0"/>
@@ -6135,8 +6100,8 @@
         </p:nvSpPr>
         <p:spPr>
           <a:xfrm>
-            <a:off x="5188712" y="1845448"/>
-            <a:ext cx="1092539" cy="228042"/>
+            <a:off x="5188712" y="1815486"/>
+            <a:ext cx="1092539" cy="233743"/>
           </a:xfrm>
           <a:prstGeom prst="rect">
             <a:avLst/>
@@ -6151,7 +6116,7 @@
           <a:p>
             <a:pPr algn="ctr">
               <a:lnSpc>
-                <a:spcPts val="1795"/>
+                <a:spcPts val="1840"/>
               </a:lnSpc>
               <a:spcBef>
                 <a:spcPts val="0"/>
@@ -6180,7 +6145,7 @@
         </p:nvCxnSpPr>
         <p:spPr>
           <a:xfrm>
-            <a:off x="5407220" y="2093556"/>
+            <a:off x="5407220" y="2069295"/>
             <a:ext cx="655523" cy="0"/>
           </a:xfrm>
           <a:prstGeom prst="line">
@@ -6215,8 +6180,8 @@
         </p:nvSpPr>
         <p:spPr>
           <a:xfrm>
-            <a:off x="6281251" y="1670560"/>
-            <a:ext cx="1092539" cy="152028"/>
+            <a:off x="6281251" y="1636797"/>
+            <a:ext cx="1092539" cy="155829"/>
           </a:xfrm>
           <a:prstGeom prst="rect">
             <a:avLst/>
@@ -6231,7 +6196,7 @@
           <a:p>
             <a:pPr algn="ctr">
               <a:lnSpc>
-                <a:spcPts val="1197"/>
+                <a:spcPts val="1227"/>
               </a:lnSpc>
               <a:spcBef>
                 <a:spcPts val="0"/>
@@ -6260,8 +6225,8 @@
         </p:nvSpPr>
         <p:spPr>
           <a:xfrm>
-            <a:off x="6281251" y="1845448"/>
-            <a:ext cx="1092539" cy="228042"/>
+            <a:off x="6281251" y="1815486"/>
+            <a:ext cx="1092539" cy="233743"/>
           </a:xfrm>
           <a:prstGeom prst="rect">
             <a:avLst/>
@@ -6276,7 +6241,7 @@
           <a:p>
             <a:pPr algn="ctr">
               <a:lnSpc>
-                <a:spcPts val="1795"/>
+                <a:spcPts val="1840"/>
               </a:lnSpc>
               <a:spcBef>
                 <a:spcPts val="0"/>
@@ -6305,7 +6270,7 @@
         </p:nvCxnSpPr>
         <p:spPr>
           <a:xfrm>
-            <a:off x="6499759" y="2093556"/>
+            <a:off x="6499759" y="2069295"/>
             <a:ext cx="655523" cy="0"/>
           </a:xfrm>
           <a:prstGeom prst="line">
@@ -6340,8 +6305,8 @@
         </p:nvSpPr>
         <p:spPr>
           <a:xfrm>
-            <a:off x="7373790" y="1670560"/>
-            <a:ext cx="1092538" cy="152028"/>
+            <a:off x="7373790" y="1636797"/>
+            <a:ext cx="1092538" cy="155829"/>
           </a:xfrm>
           <a:prstGeom prst="rect">
             <a:avLst/>
@@ -6356,7 +6321,7 @@
           <a:p>
             <a:pPr algn="ctr">
               <a:lnSpc>
-                <a:spcPts val="1197"/>
+                <a:spcPts val="1227"/>
               </a:lnSpc>
               <a:spcBef>
                 <a:spcPts val="0"/>
@@ -6385,8 +6350,8 @@
         </p:nvSpPr>
         <p:spPr>
           <a:xfrm>
-            <a:off x="7373790" y="1845448"/>
-            <a:ext cx="1092538" cy="228042"/>
+            <a:off x="7373790" y="1815486"/>
+            <a:ext cx="1092538" cy="233743"/>
           </a:xfrm>
           <a:prstGeom prst="rect">
             <a:avLst/>
@@ -6401,7 +6366,7 @@
           <a:p>
             <a:pPr algn="ctr">
               <a:lnSpc>
-                <a:spcPts val="1795"/>
+                <a:spcPts val="1840"/>
               </a:lnSpc>
               <a:spcBef>
                 <a:spcPts val="0"/>
@@ -6430,7 +6395,7 @@
         </p:nvCxnSpPr>
         <p:spPr>
           <a:xfrm>
-            <a:off x="7592297" y="2093556"/>
+            <a:off x="7592297" y="2069295"/>
             <a:ext cx="655523" cy="0"/>
           </a:xfrm>
           <a:prstGeom prst="line">
@@ -6465,8 +6430,8 @@
         </p:nvSpPr>
         <p:spPr>
           <a:xfrm>
-            <a:off x="8502904" y="1670560"/>
-            <a:ext cx="1092539" cy="152028"/>
+            <a:off x="8502904" y="1636797"/>
+            <a:ext cx="1092539" cy="155829"/>
           </a:xfrm>
           <a:prstGeom prst="rect">
             <a:avLst/>
@@ -6481,7 +6446,7 @@
           <a:p>
             <a:pPr algn="ctr">
               <a:lnSpc>
-                <a:spcPts val="1197"/>
+                <a:spcPts val="1227"/>
               </a:lnSpc>
               <a:spcBef>
                 <a:spcPts val="0"/>
@@ -6510,8 +6475,8 @@
         </p:nvSpPr>
         <p:spPr>
           <a:xfrm>
-            <a:off x="8502904" y="1845448"/>
-            <a:ext cx="1092539" cy="228042"/>
+            <a:off x="8502904" y="1815486"/>
+            <a:ext cx="1092539" cy="233743"/>
           </a:xfrm>
           <a:prstGeom prst="rect">
             <a:avLst/>
@@ -6526,7 +6491,7 @@
           <a:p>
             <a:pPr algn="ctr">
               <a:lnSpc>
-                <a:spcPts val="1795"/>
+                <a:spcPts val="1840"/>
               </a:lnSpc>
               <a:spcBef>
                 <a:spcPts val="0"/>
@@ -6555,7 +6520,7 @@
         </p:nvCxnSpPr>
         <p:spPr>
           <a:xfrm>
-            <a:off x="8721412" y="2093556"/>
+            <a:off x="8721412" y="2069295"/>
             <a:ext cx="655523" cy="0"/>
           </a:xfrm>
           <a:prstGeom prst="line">
@@ -6590,8 +6555,8 @@
         </p:nvSpPr>
         <p:spPr>
           <a:xfrm>
-            <a:off x="9595443" y="1670560"/>
-            <a:ext cx="1092539" cy="152028"/>
+            <a:off x="9595443" y="1636797"/>
+            <a:ext cx="1092539" cy="155829"/>
           </a:xfrm>
           <a:prstGeom prst="rect">
             <a:avLst/>
@@ -6606,7 +6571,7 @@
           <a:p>
             <a:pPr algn="ctr">
               <a:lnSpc>
-                <a:spcPts val="1197"/>
+                <a:spcPts val="1227"/>
               </a:lnSpc>
               <a:spcBef>
                 <a:spcPts val="0"/>
@@ -6635,8 +6600,8 @@
         </p:nvSpPr>
         <p:spPr>
           <a:xfrm>
-            <a:off x="9595443" y="1845448"/>
-            <a:ext cx="1092539" cy="228042"/>
+            <a:off x="9595443" y="1815486"/>
+            <a:ext cx="1092539" cy="233743"/>
           </a:xfrm>
           <a:prstGeom prst="rect">
             <a:avLst/>
@@ -6651,7 +6616,7 @@
           <a:p>
             <a:pPr algn="ctr">
               <a:lnSpc>
-                <a:spcPts val="1795"/>
+                <a:spcPts val="1840"/>
               </a:lnSpc>
               <a:spcBef>
                 <a:spcPts val="0"/>
@@ -6680,7 +6645,7 @@
         </p:nvCxnSpPr>
         <p:spPr>
           <a:xfrm>
-            <a:off x="9813951" y="2093556"/>
+            <a:off x="9813951" y="2069295"/>
             <a:ext cx="655523" cy="0"/>
           </a:xfrm>
           <a:prstGeom prst="line">
@@ -6715,8 +6680,8 @@
         </p:nvSpPr>
         <p:spPr>
           <a:xfrm>
-            <a:off x="10687982" y="1670560"/>
-            <a:ext cx="1092538" cy="152028"/>
+            <a:off x="10687982" y="1636797"/>
+            <a:ext cx="1092538" cy="155829"/>
           </a:xfrm>
           <a:prstGeom prst="rect">
             <a:avLst/>
@@ -6731,7 +6696,7 @@
           <a:p>
             <a:pPr algn="ctr">
               <a:lnSpc>
-                <a:spcPts val="1197"/>
+                <a:spcPts val="1227"/>
               </a:lnSpc>
               <a:spcBef>
                 <a:spcPts val="0"/>
@@ -6760,8 +6725,8 @@
         </p:nvSpPr>
         <p:spPr>
           <a:xfrm>
-            <a:off x="10687982" y="1845448"/>
-            <a:ext cx="1092538" cy="228042"/>
+            <a:off x="10687982" y="1815486"/>
+            <a:ext cx="1092538" cy="233743"/>
           </a:xfrm>
           <a:prstGeom prst="rect">
             <a:avLst/>
@@ -6776,7 +6741,7 @@
           <a:p>
             <a:pPr algn="ctr">
               <a:lnSpc>
-                <a:spcPts val="1795"/>
+                <a:spcPts val="1840"/>
               </a:lnSpc>
               <a:spcBef>
                 <a:spcPts val="0"/>
@@ -6805,7 +6770,7 @@
         </p:nvCxnSpPr>
         <p:spPr>
           <a:xfrm>
-            <a:off x="10906489" y="2093556"/>
+            <a:off x="10906489" y="2069295"/>
             <a:ext cx="655523" cy="0"/>
           </a:xfrm>
           <a:prstGeom prst="line">
@@ -6840,7 +6805,7 @@
         </p:nvSpPr>
         <p:spPr>
           <a:xfrm>
-            <a:off x="411480" y="2547998"/>
+            <a:off x="411480" y="2538939"/>
             <a:ext cx="1426464" cy="566928"/>
           </a:xfrm>
           <a:prstGeom prst="homePlate">
@@ -6876,7 +6841,7 @@
           <a:p>
             <a:pPr algn="ctr">
               <a:lnSpc>
-                <a:spcPts val="997"/>
+                <a:spcPts val="1022"/>
               </a:lnSpc>
               <a:spcBef>
                 <a:spcPts val="0"/>
@@ -6914,8 +6879,8 @@
         </p:nvSpPr>
         <p:spPr>
           <a:xfrm>
-            <a:off x="1874520" y="2449298"/>
-            <a:ext cx="3277616" cy="456084"/>
+            <a:off x="1874520" y="2431371"/>
+            <a:ext cx="3277616" cy="467487"/>
           </a:xfrm>
           <a:prstGeom prst="rect">
             <a:avLst/>
@@ -6930,7 +6895,7 @@
           <a:p>
             <a:pPr algn="ctr">
               <a:lnSpc>
-                <a:spcPts val="1197"/>
+                <a:spcPts val="1227"/>
               </a:lnSpc>
               <a:spcBef>
                 <a:spcPts val="0"/>
@@ -7015,7 +6980,7 @@
           <a:p>
             <a:pPr algn="ctr">
               <a:lnSpc>
-                <a:spcPts val="1197"/>
+                <a:spcPts val="1227"/>
               </a:lnSpc>
               <a:spcBef>
                 <a:spcPts val="0"/>
@@ -7145,7 +7110,7 @@
           <a:p>
             <a:pPr algn="ctr">
               <a:lnSpc>
-                <a:spcPts val="1197"/>
+                <a:spcPts val="1227"/>
               </a:lnSpc>
               <a:spcBef>
                 <a:spcPts val="0"/>
@@ -7174,8 +7139,8 @@
         </p:nvSpPr>
         <p:spPr>
           <a:xfrm>
-            <a:off x="5188712" y="2449298"/>
-            <a:ext cx="3277616" cy="456084"/>
+            <a:off x="5188712" y="2431371"/>
+            <a:ext cx="3277616" cy="467487"/>
           </a:xfrm>
           <a:prstGeom prst="rect">
             <a:avLst/>
@@ -7190,7 +7155,7 @@
           <a:p>
             <a:pPr algn="ctr">
               <a:lnSpc>
-                <a:spcPts val="1197"/>
+                <a:spcPts val="1227"/>
               </a:lnSpc>
               <a:spcBef>
                 <a:spcPts val="0"/>
@@ -7275,7 +7240,7 @@
           <a:p>
             <a:pPr algn="ctr">
               <a:lnSpc>
-                <a:spcPts val="1197"/>
+                <a:spcPts val="1227"/>
               </a:lnSpc>
               <a:spcBef>
                 <a:spcPts val="0"/>
@@ -7405,7 +7370,7 @@
           <a:p>
             <a:pPr algn="ctr">
               <a:lnSpc>
-                <a:spcPts val="1197"/>
+                <a:spcPts val="1227"/>
               </a:lnSpc>
               <a:spcBef>
                 <a:spcPts val="0"/>
@@ -7434,8 +7399,8 @@
         </p:nvSpPr>
         <p:spPr>
           <a:xfrm>
-            <a:off x="8502904" y="2449298"/>
-            <a:ext cx="3277616" cy="456084"/>
+            <a:off x="8502904" y="2431371"/>
+            <a:ext cx="3277616" cy="467487"/>
           </a:xfrm>
           <a:prstGeom prst="rect">
             <a:avLst/>
@@ -7450,7 +7415,7 @@
           <a:p>
             <a:pPr algn="ctr">
               <a:lnSpc>
-                <a:spcPts val="1197"/>
+                <a:spcPts val="1227"/>
               </a:lnSpc>
               <a:spcBef>
                 <a:spcPts val="0"/>
@@ -7535,7 +7500,7 @@
           <a:p>
             <a:pPr algn="ctr">
               <a:lnSpc>
-                <a:spcPts val="1197"/>
+                <a:spcPts val="1227"/>
               </a:lnSpc>
               <a:spcBef>
                 <a:spcPts val="0"/>
@@ -7665,7 +7630,7 @@
           <a:p>
             <a:pPr algn="ctr">
               <a:lnSpc>
-                <a:spcPts val="1197"/>
+                <a:spcPts val="1227"/>
               </a:lnSpc>
               <a:spcBef>
                 <a:spcPts val="0"/>
@@ -7694,7 +7659,7 @@
         </p:nvSpPr>
         <p:spPr>
           <a:xfrm>
-            <a:off x="411480" y="3277460"/>
+            <a:off x="411480" y="3284238"/>
             <a:ext cx="1426464" cy="566928"/>
           </a:xfrm>
           <a:prstGeom prst="homePlate">
@@ -7730,7 +7695,7 @@
           <a:p>
             <a:pPr algn="ctr">
               <a:lnSpc>
-                <a:spcPts val="997"/>
+                <a:spcPts val="1022"/>
               </a:lnSpc>
               <a:spcBef>
                 <a:spcPts val="0"/>
@@ -7768,8 +7733,8 @@
         </p:nvSpPr>
         <p:spPr>
           <a:xfrm>
-            <a:off x="1874520" y="3254774"/>
-            <a:ext cx="3277616" cy="304056"/>
+            <a:off x="1874520" y="3254584"/>
+            <a:ext cx="3277616" cy="311658"/>
           </a:xfrm>
           <a:prstGeom prst="rect">
             <a:avLst/>
@@ -7784,7 +7749,7 @@
           <a:p>
             <a:pPr algn="ctr">
               <a:lnSpc>
-                <a:spcPts val="1197"/>
+                <a:spcPts val="1227"/>
               </a:lnSpc>
               <a:spcBef>
                 <a:spcPts val="0"/>
@@ -7905,7 +7870,7 @@
           <a:p>
             <a:pPr algn="ctr">
               <a:lnSpc>
-                <a:spcPts val="1197"/>
+                <a:spcPts val="1227"/>
               </a:lnSpc>
               <a:spcBef>
                 <a:spcPts val="0"/>
@@ -7979,8 +7944,8 @@
         </p:nvSpPr>
         <p:spPr>
           <a:xfrm>
-            <a:off x="5188712" y="3254774"/>
-            <a:ext cx="3277616" cy="304056"/>
+            <a:off x="5188712" y="3254584"/>
+            <a:ext cx="3277616" cy="311658"/>
           </a:xfrm>
           <a:prstGeom prst="rect">
             <a:avLst/>
@@ -7995,7 +7960,7 @@
           <a:p>
             <a:pPr algn="ctr">
               <a:lnSpc>
-                <a:spcPts val="1197"/>
+                <a:spcPts val="1227"/>
               </a:lnSpc>
               <a:spcBef>
                 <a:spcPts val="0"/>
@@ -8116,7 +8081,7 @@
           <a:p>
             <a:pPr algn="ctr">
               <a:lnSpc>
-                <a:spcPts val="1197"/>
+                <a:spcPts val="1227"/>
               </a:lnSpc>
               <a:spcBef>
                 <a:spcPts val="0"/>
@@ -8190,8 +8155,8 @@
         </p:nvSpPr>
         <p:spPr>
           <a:xfrm>
-            <a:off x="8502904" y="3254774"/>
-            <a:ext cx="3277616" cy="304056"/>
+            <a:off x="8502904" y="3254584"/>
+            <a:ext cx="3277616" cy="311658"/>
           </a:xfrm>
           <a:prstGeom prst="rect">
             <a:avLst/>
@@ -8206,7 +8171,7 @@
           <a:p>
             <a:pPr algn="ctr">
               <a:lnSpc>
-                <a:spcPts val="1197"/>
+                <a:spcPts val="1227"/>
               </a:lnSpc>
               <a:spcBef>
                 <a:spcPts val="0"/>
@@ -8327,7 +8292,7 @@
           <a:p>
             <a:pPr algn="ctr">
               <a:lnSpc>
-                <a:spcPts val="1197"/>
+                <a:spcPts val="1227"/>
               </a:lnSpc>
               <a:spcBef>
                 <a:spcPts val="0"/>
@@ -8401,7 +8366,7 @@
         </p:nvSpPr>
         <p:spPr>
           <a:xfrm>
-            <a:off x="411480" y="4087124"/>
+            <a:off x="411480" y="4110371"/>
             <a:ext cx="1426464" cy="566928"/>
           </a:xfrm>
           <a:prstGeom prst="homePlate">
@@ -8437,7 +8402,7 @@
           <a:p>
             <a:pPr algn="ctr">
               <a:lnSpc>
-                <a:spcPts val="997"/>
+                <a:spcPts val="1022"/>
               </a:lnSpc>
               <a:spcBef>
                 <a:spcPts val="0"/>
@@ -8477,7 +8442,7 @@
           <a:p>
             <a:pPr algn="ctr">
               <a:lnSpc>
-                <a:spcPts val="997"/>
+                <a:spcPts val="1022"/>
               </a:lnSpc>
               <a:spcBef>
                 <a:spcPts val="0"/>
@@ -8506,8 +8471,8 @@
         </p:nvSpPr>
         <p:spPr>
           <a:xfrm>
-            <a:off x="1874520" y="3908222"/>
-            <a:ext cx="819404" cy="154122"/>
+            <a:off x="1874520" y="3921968"/>
+            <a:ext cx="819404" cy="157289"/>
           </a:xfrm>
           <a:prstGeom prst="rect">
             <a:avLst/>
@@ -8537,14 +8502,14 @@
           </a:fontRef>
         </p:style>
         <p:txBody>
-          <a:bodyPr rtlCol="0" anchor="ctr" wrap="none" lIns="0" rIns="0" tIns="0" bIns="0">
+          <a:bodyPr rtlCol="0" anchor="ctr" wrap="none" lIns="22860" rIns="22860" tIns="0" bIns="0">
             <a:noAutofit/>
           </a:bodyPr>
           <a:lstStyle/>
           <a:p>
             <a:pPr algn="ctr">
               <a:lnSpc>
-                <a:spcPts val="997"/>
+                <a:spcPts val="1022"/>
               </a:lnSpc>
               <a:spcBef>
                 <a:spcPts val="0"/>
@@ -8573,8 +8538,8 @@
         </p:nvSpPr>
         <p:spPr>
           <a:xfrm>
-            <a:off x="2693924" y="3908222"/>
-            <a:ext cx="819404" cy="154122"/>
+            <a:off x="2693924" y="3921968"/>
+            <a:ext cx="819404" cy="157289"/>
           </a:xfrm>
           <a:prstGeom prst="rect">
             <a:avLst/>
@@ -8604,14 +8569,14 @@
           </a:fontRef>
         </p:style>
         <p:txBody>
-          <a:bodyPr rtlCol="0" anchor="ctr" wrap="none" lIns="0" rIns="0" tIns="0" bIns="0">
+          <a:bodyPr rtlCol="0" anchor="ctr" wrap="none" lIns="22860" rIns="22860" tIns="0" bIns="0">
             <a:noAutofit/>
           </a:bodyPr>
           <a:lstStyle/>
           <a:p>
             <a:pPr algn="ctr">
               <a:lnSpc>
-                <a:spcPts val="997"/>
+                <a:spcPts val="1022"/>
               </a:lnSpc>
               <a:spcBef>
                 <a:spcPts val="0"/>
@@ -8640,8 +8605,8 @@
         </p:nvSpPr>
         <p:spPr>
           <a:xfrm>
-            <a:off x="3513328" y="3908222"/>
-            <a:ext cx="819404" cy="154122"/>
+            <a:off x="3513328" y="3921968"/>
+            <a:ext cx="819404" cy="157289"/>
           </a:xfrm>
           <a:prstGeom prst="rect">
             <a:avLst/>
@@ -8671,14 +8636,14 @@
           </a:fontRef>
         </p:style>
         <p:txBody>
-          <a:bodyPr rtlCol="0" anchor="ctr" wrap="none" lIns="0" rIns="0" tIns="0" bIns="0">
+          <a:bodyPr rtlCol="0" anchor="ctr" wrap="none" lIns="22860" rIns="22860" tIns="0" bIns="0">
             <a:noAutofit/>
           </a:bodyPr>
           <a:lstStyle/>
           <a:p>
             <a:pPr algn="ctr">
               <a:lnSpc>
-                <a:spcPts val="997"/>
+                <a:spcPts val="1022"/>
               </a:lnSpc>
               <a:spcBef>
                 <a:spcPts val="0"/>
@@ -8694,7 +8659,16 @@
                 </a:solidFill>
                 <a:latin typeface="Segoe UI"/>
               </a:rPr>
-              <a:t>State Avg.</a:t>
+              <a:t>State </a:t>
+            </a:r>
+            <a:r>
+              <a:rPr sz="750" b="1" i="0">
+                <a:solidFill>
+                  <a:srgbClr val="3F3F3F"/>
+                </a:solidFill>
+                <a:latin typeface="Segoe UI"/>
+              </a:rPr>
+              <a:t>Avg.</a:t>
             </a:r>
           </a:p>
         </p:txBody>
@@ -8707,8 +8681,8 @@
         </p:nvSpPr>
         <p:spPr>
           <a:xfrm>
-            <a:off x="4332732" y="3908222"/>
-            <a:ext cx="819404" cy="154122"/>
+            <a:off x="4332732" y="3921968"/>
+            <a:ext cx="819404" cy="157289"/>
           </a:xfrm>
           <a:prstGeom prst="rect">
             <a:avLst/>
@@ -8738,14 +8712,14 @@
           </a:fontRef>
         </p:style>
         <p:txBody>
-          <a:bodyPr rtlCol="0" anchor="ctr" wrap="none" lIns="0" rIns="0" tIns="0" bIns="0">
+          <a:bodyPr rtlCol="0" anchor="ctr" wrap="none" lIns="22860" rIns="22860" tIns="0" bIns="0">
             <a:noAutofit/>
           </a:bodyPr>
           <a:lstStyle/>
           <a:p>
             <a:pPr algn="ctr">
               <a:lnSpc>
-                <a:spcPts val="997"/>
+                <a:spcPts val="1022"/>
               </a:lnSpc>
               <a:spcBef>
                 <a:spcPts val="0"/>
@@ -8774,8 +8748,8 @@
         </p:nvSpPr>
         <p:spPr>
           <a:xfrm>
-            <a:off x="1874520" y="4062344"/>
-            <a:ext cx="819404" cy="154122"/>
+            <a:off x="1874520" y="4079257"/>
+            <a:ext cx="819404" cy="157289"/>
           </a:xfrm>
           <a:prstGeom prst="rect">
             <a:avLst/>
@@ -8805,14 +8779,14 @@
           </a:fontRef>
         </p:style>
         <p:txBody>
-          <a:bodyPr rtlCol="0" anchor="ctr" wrap="none" lIns="0" rIns="0" tIns="0" bIns="0">
+          <a:bodyPr rtlCol="0" anchor="ctr" wrap="none" lIns="22860" rIns="22860" tIns="0" bIns="0">
             <a:noAutofit/>
           </a:bodyPr>
           <a:lstStyle/>
           <a:p>
             <a:pPr algn="ctr">
               <a:lnSpc>
-                <a:spcPts val="997"/>
+                <a:spcPts val="1022"/>
               </a:lnSpc>
               <a:spcBef>
                 <a:spcPts val="0"/>
@@ -8841,8 +8815,8 @@
         </p:nvSpPr>
         <p:spPr>
           <a:xfrm>
-            <a:off x="2693924" y="4062344"/>
-            <a:ext cx="819404" cy="154122"/>
+            <a:off x="2693924" y="4079257"/>
+            <a:ext cx="819404" cy="157289"/>
           </a:xfrm>
           <a:prstGeom prst="rect">
             <a:avLst/>
@@ -8872,14 +8846,14 @@
           </a:fontRef>
         </p:style>
         <p:txBody>
-          <a:bodyPr rtlCol="0" anchor="ctr" wrap="none" lIns="0" rIns="0" tIns="0" bIns="0">
+          <a:bodyPr rtlCol="0" anchor="ctr" wrap="none" lIns="22860" rIns="22860" tIns="0" bIns="0">
             <a:noAutofit/>
           </a:bodyPr>
           <a:lstStyle/>
           <a:p>
             <a:pPr algn="ctr">
               <a:lnSpc>
-                <a:spcPts val="997"/>
+                <a:spcPts val="1022"/>
               </a:lnSpc>
               <a:spcBef>
                 <a:spcPts val="0"/>
@@ -8908,8 +8882,8 @@
         </p:nvSpPr>
         <p:spPr>
           <a:xfrm>
-            <a:off x="3513328" y="4062344"/>
-            <a:ext cx="819404" cy="154122"/>
+            <a:off x="3513328" y="4079257"/>
+            <a:ext cx="819404" cy="157289"/>
           </a:xfrm>
           <a:prstGeom prst="rect">
             <a:avLst/>
@@ -8939,14 +8913,14 @@
           </a:fontRef>
         </p:style>
         <p:txBody>
-          <a:bodyPr rtlCol="0" anchor="ctr" wrap="none" lIns="0" rIns="0" tIns="0" bIns="0">
+          <a:bodyPr rtlCol="0" anchor="ctr" wrap="none" lIns="22860" rIns="22860" tIns="0" bIns="0">
             <a:noAutofit/>
           </a:bodyPr>
           <a:lstStyle/>
           <a:p>
             <a:pPr algn="ctr">
               <a:lnSpc>
-                <a:spcPts val="997"/>
+                <a:spcPts val="1022"/>
               </a:lnSpc>
               <a:spcBef>
                 <a:spcPts val="0"/>
@@ -8975,8 +8949,8 @@
         </p:nvSpPr>
         <p:spPr>
           <a:xfrm>
-            <a:off x="4332732" y="4062344"/>
-            <a:ext cx="819404" cy="154122"/>
+            <a:off x="4332732" y="4079257"/>
+            <a:ext cx="819404" cy="157289"/>
           </a:xfrm>
           <a:prstGeom prst="rect">
             <a:avLst/>
@@ -9006,14 +8980,14 @@
           </a:fontRef>
         </p:style>
         <p:txBody>
-          <a:bodyPr rtlCol="0" anchor="ctr" wrap="none" lIns="0" rIns="0" tIns="0" bIns="0">
+          <a:bodyPr rtlCol="0" anchor="ctr" wrap="none" lIns="22860" rIns="22860" tIns="0" bIns="0">
             <a:noAutofit/>
           </a:bodyPr>
           <a:lstStyle/>
           <a:p>
             <a:pPr algn="ctr">
               <a:lnSpc>
-                <a:spcPts val="997"/>
+                <a:spcPts val="1022"/>
               </a:lnSpc>
               <a:spcBef>
                 <a:spcPts val="0"/>
@@ -9029,7 +9003,16 @@
                 </a:solidFill>
                 <a:latin typeface="Segoe UI"/>
               </a:rPr>
-              <a:t>- 1</a:t>
+              <a:t>- </a:t>
+            </a:r>
+            <a:r>
+              <a:rPr sz="750" b="0" i="0">
+                <a:solidFill>
+                  <a:srgbClr val="3F3F3F"/>
+                </a:solidFill>
+                <a:latin typeface="Segoe UI"/>
+              </a:rPr>
+              <a:t>1</a:t>
             </a:r>
           </a:p>
         </p:txBody>
@@ -9042,8 +9025,8 @@
         </p:nvSpPr>
         <p:spPr>
           <a:xfrm>
-            <a:off x="1874520" y="4216466"/>
-            <a:ext cx="819404" cy="154122"/>
+            <a:off x="1874520" y="4236546"/>
+            <a:ext cx="819404" cy="157289"/>
           </a:xfrm>
           <a:prstGeom prst="rect">
             <a:avLst/>
@@ -9073,14 +9056,14 @@
           </a:fontRef>
         </p:style>
         <p:txBody>
-          <a:bodyPr rtlCol="0" anchor="ctr" wrap="none" lIns="0" rIns="0" tIns="0" bIns="0">
+          <a:bodyPr rtlCol="0" anchor="ctr" wrap="none" lIns="22860" rIns="22860" tIns="0" bIns="0">
             <a:noAutofit/>
           </a:bodyPr>
           <a:lstStyle/>
           <a:p>
             <a:pPr algn="ctr">
               <a:lnSpc>
-                <a:spcPts val="997"/>
+                <a:spcPts val="1022"/>
               </a:lnSpc>
               <a:spcBef>
                 <a:spcPts val="0"/>
@@ -9109,8 +9092,8 @@
         </p:nvSpPr>
         <p:spPr>
           <a:xfrm>
-            <a:off x="2693924" y="4216466"/>
-            <a:ext cx="819404" cy="154122"/>
+            <a:off x="2693924" y="4236546"/>
+            <a:ext cx="819404" cy="157289"/>
           </a:xfrm>
           <a:prstGeom prst="rect">
             <a:avLst/>
@@ -9140,14 +9123,14 @@
           </a:fontRef>
         </p:style>
         <p:txBody>
-          <a:bodyPr rtlCol="0" anchor="ctr" wrap="none" lIns="0" rIns="0" tIns="0" bIns="0">
+          <a:bodyPr rtlCol="0" anchor="ctr" wrap="none" lIns="22860" rIns="22860" tIns="0" bIns="0">
             <a:noAutofit/>
           </a:bodyPr>
           <a:lstStyle/>
           <a:p>
             <a:pPr algn="ctr">
               <a:lnSpc>
-                <a:spcPts val="997"/>
+                <a:spcPts val="1022"/>
               </a:lnSpc>
               <a:spcBef>
                 <a:spcPts val="0"/>
@@ -9176,8 +9159,8 @@
         </p:nvSpPr>
         <p:spPr>
           <a:xfrm>
-            <a:off x="3513328" y="4216466"/>
-            <a:ext cx="819404" cy="154122"/>
+            <a:off x="3513328" y="4236546"/>
+            <a:ext cx="819404" cy="157289"/>
           </a:xfrm>
           <a:prstGeom prst="rect">
             <a:avLst/>
@@ -9207,14 +9190,14 @@
           </a:fontRef>
         </p:style>
         <p:txBody>
-          <a:bodyPr rtlCol="0" anchor="ctr" wrap="none" lIns="0" rIns="0" tIns="0" bIns="0">
+          <a:bodyPr rtlCol="0" anchor="ctr" wrap="none" lIns="22860" rIns="22860" tIns="0" bIns="0">
             <a:noAutofit/>
           </a:bodyPr>
           <a:lstStyle/>
           <a:p>
             <a:pPr algn="ctr">
               <a:lnSpc>
-                <a:spcPts val="997"/>
+                <a:spcPts val="1022"/>
               </a:lnSpc>
               <a:spcBef>
                 <a:spcPts val="0"/>
@@ -9243,8 +9226,8 @@
         </p:nvSpPr>
         <p:spPr>
           <a:xfrm>
-            <a:off x="4332732" y="4216466"/>
-            <a:ext cx="819404" cy="154122"/>
+            <a:off x="4332732" y="4236546"/>
+            <a:ext cx="819404" cy="157289"/>
           </a:xfrm>
           <a:prstGeom prst="rect">
             <a:avLst/>
@@ -9274,14 +9257,14 @@
           </a:fontRef>
         </p:style>
         <p:txBody>
-          <a:bodyPr rtlCol="0" anchor="ctr" wrap="none" lIns="0" rIns="0" tIns="0" bIns="0">
+          <a:bodyPr rtlCol="0" anchor="ctr" wrap="none" lIns="22860" rIns="22860" tIns="0" bIns="0">
             <a:noAutofit/>
           </a:bodyPr>
           <a:lstStyle/>
           <a:p>
             <a:pPr algn="ctr">
               <a:lnSpc>
-                <a:spcPts val="997"/>
+                <a:spcPts val="1022"/>
               </a:lnSpc>
               <a:spcBef>
                 <a:spcPts val="0"/>
@@ -9310,8 +9293,8 @@
         </p:nvSpPr>
         <p:spPr>
           <a:xfrm>
-            <a:off x="1874520" y="4370588"/>
-            <a:ext cx="819404" cy="154122"/>
+            <a:off x="1874520" y="4393835"/>
+            <a:ext cx="819404" cy="157289"/>
           </a:xfrm>
           <a:prstGeom prst="rect">
             <a:avLst/>
@@ -9341,14 +9324,14 @@
           </a:fontRef>
         </p:style>
         <p:txBody>
-          <a:bodyPr rtlCol="0" anchor="ctr" wrap="none" lIns="0" rIns="0" tIns="0" bIns="0">
+          <a:bodyPr rtlCol="0" anchor="ctr" wrap="none" lIns="22860" rIns="22860" tIns="0" bIns="0">
             <a:noAutofit/>
           </a:bodyPr>
           <a:lstStyle/>
           <a:p>
             <a:pPr algn="ctr">
               <a:lnSpc>
-                <a:spcPts val="997"/>
+                <a:spcPts val="1022"/>
               </a:lnSpc>
               <a:spcBef>
                 <a:spcPts val="0"/>
@@ -9377,8 +9360,8 @@
         </p:nvSpPr>
         <p:spPr>
           <a:xfrm>
-            <a:off x="2693924" y="4370588"/>
-            <a:ext cx="819404" cy="154122"/>
+            <a:off x="2693924" y="4393835"/>
+            <a:ext cx="819404" cy="157289"/>
           </a:xfrm>
           <a:prstGeom prst="rect">
             <a:avLst/>
@@ -9408,14 +9391,14 @@
           </a:fontRef>
         </p:style>
         <p:txBody>
-          <a:bodyPr rtlCol="0" anchor="ctr" wrap="none" lIns="0" rIns="0" tIns="0" bIns="0">
+          <a:bodyPr rtlCol="0" anchor="ctr" wrap="none" lIns="22860" rIns="22860" tIns="0" bIns="0">
             <a:noAutofit/>
           </a:bodyPr>
           <a:lstStyle/>
           <a:p>
             <a:pPr algn="ctr">
               <a:lnSpc>
-                <a:spcPts val="997"/>
+                <a:spcPts val="1022"/>
               </a:lnSpc>
               <a:spcBef>
                 <a:spcPts val="0"/>
@@ -9444,8 +9427,8 @@
         </p:nvSpPr>
         <p:spPr>
           <a:xfrm>
-            <a:off x="3513328" y="4370588"/>
-            <a:ext cx="819404" cy="154122"/>
+            <a:off x="3513328" y="4393835"/>
+            <a:ext cx="819404" cy="157289"/>
           </a:xfrm>
           <a:prstGeom prst="rect">
             <a:avLst/>
@@ -9475,14 +9458,14 @@
           </a:fontRef>
         </p:style>
         <p:txBody>
-          <a:bodyPr rtlCol="0" anchor="ctr" wrap="none" lIns="0" rIns="0" tIns="0" bIns="0">
+          <a:bodyPr rtlCol="0" anchor="ctr" wrap="none" lIns="22860" rIns="22860" tIns="0" bIns="0">
             <a:noAutofit/>
           </a:bodyPr>
           <a:lstStyle/>
           <a:p>
             <a:pPr algn="ctr">
               <a:lnSpc>
-                <a:spcPts val="997"/>
+                <a:spcPts val="1022"/>
               </a:lnSpc>
               <a:spcBef>
                 <a:spcPts val="0"/>
@@ -9511,8 +9494,8 @@
         </p:nvSpPr>
         <p:spPr>
           <a:xfrm>
-            <a:off x="4332732" y="4370588"/>
-            <a:ext cx="819404" cy="154122"/>
+            <a:off x="4332732" y="4393835"/>
+            <a:ext cx="819404" cy="157289"/>
           </a:xfrm>
           <a:prstGeom prst="rect">
             <a:avLst/>
@@ -9542,14 +9525,14 @@
           </a:fontRef>
         </p:style>
         <p:txBody>
-          <a:bodyPr rtlCol="0" anchor="ctr" wrap="none" lIns="0" rIns="0" tIns="0" bIns="0">
+          <a:bodyPr rtlCol="0" anchor="ctr" wrap="none" lIns="22860" rIns="22860" tIns="0" bIns="0">
             <a:noAutofit/>
           </a:bodyPr>
           <a:lstStyle/>
           <a:p>
             <a:pPr algn="ctr">
               <a:lnSpc>
-                <a:spcPts val="997"/>
+                <a:spcPts val="1022"/>
               </a:lnSpc>
               <a:spcBef>
                 <a:spcPts val="0"/>
@@ -9565,7 +9548,16 @@
                 </a:solidFill>
                 <a:latin typeface="Segoe UI"/>
               </a:rPr>
-              <a:t>+ 4</a:t>
+              <a:t>+ </a:t>
+            </a:r>
+            <a:r>
+              <a:rPr sz="750" b="0" i="0">
+                <a:solidFill>
+                  <a:srgbClr val="3F3F3F"/>
+                </a:solidFill>
+                <a:latin typeface="Segoe UI"/>
+              </a:rPr>
+              <a:t>4</a:t>
             </a:r>
           </a:p>
         </p:txBody>
@@ -9578,8 +9570,8 @@
         </p:nvSpPr>
         <p:spPr>
           <a:xfrm>
-            <a:off x="5188712" y="3908222"/>
-            <a:ext cx="819404" cy="154122"/>
+            <a:off x="5188712" y="3921968"/>
+            <a:ext cx="819404" cy="157289"/>
           </a:xfrm>
           <a:prstGeom prst="rect">
             <a:avLst/>
@@ -9609,14 +9601,14 @@
           </a:fontRef>
         </p:style>
         <p:txBody>
-          <a:bodyPr rtlCol="0" anchor="ctr" wrap="none" lIns="0" rIns="0" tIns="0" bIns="0">
+          <a:bodyPr rtlCol="0" anchor="ctr" wrap="none" lIns="22860" rIns="22860" tIns="0" bIns="0">
             <a:noAutofit/>
           </a:bodyPr>
           <a:lstStyle/>
           <a:p>
             <a:pPr algn="ctr">
               <a:lnSpc>
-                <a:spcPts val="997"/>
+                <a:spcPts val="1022"/>
               </a:lnSpc>
               <a:spcBef>
                 <a:spcPts val="0"/>
@@ -9645,8 +9637,8 @@
         </p:nvSpPr>
         <p:spPr>
           <a:xfrm>
-            <a:off x="6008116" y="3908222"/>
-            <a:ext cx="819404" cy="154122"/>
+            <a:off x="6008116" y="3921968"/>
+            <a:ext cx="819404" cy="157289"/>
           </a:xfrm>
           <a:prstGeom prst="rect">
             <a:avLst/>
@@ -9676,14 +9668,14 @@
           </a:fontRef>
         </p:style>
         <p:txBody>
-          <a:bodyPr rtlCol="0" anchor="ctr" wrap="none" lIns="0" rIns="0" tIns="0" bIns="0">
+          <a:bodyPr rtlCol="0" anchor="ctr" wrap="none" lIns="22860" rIns="22860" tIns="0" bIns="0">
             <a:noAutofit/>
           </a:bodyPr>
           <a:lstStyle/>
           <a:p>
             <a:pPr algn="ctr">
               <a:lnSpc>
-                <a:spcPts val="997"/>
+                <a:spcPts val="1022"/>
               </a:lnSpc>
               <a:spcBef>
                 <a:spcPts val="0"/>
@@ -9712,8 +9704,8 @@
         </p:nvSpPr>
         <p:spPr>
           <a:xfrm>
-            <a:off x="6827520" y="3908222"/>
-            <a:ext cx="819404" cy="154122"/>
+            <a:off x="6827520" y="3921968"/>
+            <a:ext cx="819404" cy="157289"/>
           </a:xfrm>
           <a:prstGeom prst="rect">
             <a:avLst/>
@@ -9743,14 +9735,14 @@
           </a:fontRef>
         </p:style>
         <p:txBody>
-          <a:bodyPr rtlCol="0" anchor="ctr" wrap="none" lIns="0" rIns="0" tIns="0" bIns="0">
+          <a:bodyPr rtlCol="0" anchor="ctr" wrap="none" lIns="22860" rIns="22860" tIns="0" bIns="0">
             <a:noAutofit/>
           </a:bodyPr>
           <a:lstStyle/>
           <a:p>
             <a:pPr algn="ctr">
               <a:lnSpc>
-                <a:spcPts val="997"/>
+                <a:spcPts val="1022"/>
               </a:lnSpc>
               <a:spcBef>
                 <a:spcPts val="0"/>
@@ -9766,7 +9758,16 @@
                 </a:solidFill>
                 <a:latin typeface="Segoe UI"/>
               </a:rPr>
-              <a:t>State Avg.</a:t>
+              <a:t>State </a:t>
+            </a:r>
+            <a:r>
+              <a:rPr sz="750" b="1" i="0">
+                <a:solidFill>
+                  <a:srgbClr val="3F3F3F"/>
+                </a:solidFill>
+                <a:latin typeface="Segoe UI"/>
+              </a:rPr>
+              <a:t>Avg.</a:t>
             </a:r>
           </a:p>
         </p:txBody>
@@ -9779,8 +9780,8 @@
         </p:nvSpPr>
         <p:spPr>
           <a:xfrm>
-            <a:off x="7646924" y="3908222"/>
-            <a:ext cx="819404" cy="154122"/>
+            <a:off x="7646924" y="3921968"/>
+            <a:ext cx="819404" cy="157289"/>
           </a:xfrm>
           <a:prstGeom prst="rect">
             <a:avLst/>
@@ -9810,14 +9811,14 @@
           </a:fontRef>
         </p:style>
         <p:txBody>
-          <a:bodyPr rtlCol="0" anchor="ctr" wrap="none" lIns="0" rIns="0" tIns="0" bIns="0">
+          <a:bodyPr rtlCol="0" anchor="ctr" wrap="none" lIns="22860" rIns="22860" tIns="0" bIns="0">
             <a:noAutofit/>
           </a:bodyPr>
           <a:lstStyle/>
           <a:p>
             <a:pPr algn="ctr">
               <a:lnSpc>
-                <a:spcPts val="997"/>
+                <a:spcPts val="1022"/>
               </a:lnSpc>
               <a:spcBef>
                 <a:spcPts val="0"/>
@@ -9846,8 +9847,8 @@
         </p:nvSpPr>
         <p:spPr>
           <a:xfrm>
-            <a:off x="5188712" y="4062344"/>
-            <a:ext cx="819404" cy="154122"/>
+            <a:off x="5188712" y="4079257"/>
+            <a:ext cx="819404" cy="157289"/>
           </a:xfrm>
           <a:prstGeom prst="rect">
             <a:avLst/>
@@ -9877,14 +9878,14 @@
           </a:fontRef>
         </p:style>
         <p:txBody>
-          <a:bodyPr rtlCol="0" anchor="ctr" wrap="none" lIns="0" rIns="0" tIns="0" bIns="0">
+          <a:bodyPr rtlCol="0" anchor="ctr" wrap="none" lIns="22860" rIns="22860" tIns="0" bIns="0">
             <a:noAutofit/>
           </a:bodyPr>
           <a:lstStyle/>
           <a:p>
             <a:pPr algn="ctr">
               <a:lnSpc>
-                <a:spcPts val="997"/>
+                <a:spcPts val="1022"/>
               </a:lnSpc>
               <a:spcBef>
                 <a:spcPts val="0"/>
@@ -9913,8 +9914,8 @@
         </p:nvSpPr>
         <p:spPr>
           <a:xfrm>
-            <a:off x="6008116" y="4062344"/>
-            <a:ext cx="819404" cy="154122"/>
+            <a:off x="6008116" y="4079257"/>
+            <a:ext cx="819404" cy="157289"/>
           </a:xfrm>
           <a:prstGeom prst="rect">
             <a:avLst/>
@@ -9944,14 +9945,14 @@
           </a:fontRef>
         </p:style>
         <p:txBody>
-          <a:bodyPr rtlCol="0" anchor="ctr" wrap="none" lIns="0" rIns="0" tIns="0" bIns="0">
+          <a:bodyPr rtlCol="0" anchor="ctr" wrap="none" lIns="22860" rIns="22860" tIns="0" bIns="0">
             <a:noAutofit/>
           </a:bodyPr>
           <a:lstStyle/>
           <a:p>
             <a:pPr algn="ctr">
               <a:lnSpc>
-                <a:spcPts val="997"/>
+                <a:spcPts val="1022"/>
               </a:lnSpc>
               <a:spcBef>
                 <a:spcPts val="0"/>
@@ -9980,8 +9981,8 @@
         </p:nvSpPr>
         <p:spPr>
           <a:xfrm>
-            <a:off x="6827520" y="4062344"/>
-            <a:ext cx="819404" cy="154122"/>
+            <a:off x="6827520" y="4079257"/>
+            <a:ext cx="819404" cy="157289"/>
           </a:xfrm>
           <a:prstGeom prst="rect">
             <a:avLst/>
@@ -10011,14 +10012,14 @@
           </a:fontRef>
         </p:style>
         <p:txBody>
-          <a:bodyPr rtlCol="0" anchor="ctr" wrap="none" lIns="0" rIns="0" tIns="0" bIns="0">
+          <a:bodyPr rtlCol="0" anchor="ctr" wrap="none" lIns="22860" rIns="22860" tIns="0" bIns="0">
             <a:noAutofit/>
           </a:bodyPr>
           <a:lstStyle/>
           <a:p>
             <a:pPr algn="ctr">
               <a:lnSpc>
-                <a:spcPts val="997"/>
+                <a:spcPts val="1022"/>
               </a:lnSpc>
               <a:spcBef>
                 <a:spcPts val="0"/>
@@ -10047,8 +10048,8 @@
         </p:nvSpPr>
         <p:spPr>
           <a:xfrm>
-            <a:off x="7646924" y="4062344"/>
-            <a:ext cx="819404" cy="154122"/>
+            <a:off x="7646924" y="4079257"/>
+            <a:ext cx="819404" cy="157289"/>
           </a:xfrm>
           <a:prstGeom prst="rect">
             <a:avLst/>
@@ -10078,14 +10079,14 @@
           </a:fontRef>
         </p:style>
         <p:txBody>
-          <a:bodyPr rtlCol="0" anchor="ctr" wrap="none" lIns="0" rIns="0" tIns="0" bIns="0">
+          <a:bodyPr rtlCol="0" anchor="ctr" wrap="none" lIns="22860" rIns="22860" tIns="0" bIns="0">
             <a:noAutofit/>
           </a:bodyPr>
           <a:lstStyle/>
           <a:p>
             <a:pPr algn="ctr">
               <a:lnSpc>
-                <a:spcPts val="997"/>
+                <a:spcPts val="1022"/>
               </a:lnSpc>
               <a:spcBef>
                 <a:spcPts val="0"/>
@@ -10114,8 +10115,8 @@
         </p:nvSpPr>
         <p:spPr>
           <a:xfrm>
-            <a:off x="5188712" y="4216466"/>
-            <a:ext cx="819404" cy="154122"/>
+            <a:off x="5188712" y="4236546"/>
+            <a:ext cx="819404" cy="157289"/>
           </a:xfrm>
           <a:prstGeom prst="rect">
             <a:avLst/>
@@ -10145,14 +10146,14 @@
           </a:fontRef>
         </p:style>
         <p:txBody>
-          <a:bodyPr rtlCol="0" anchor="ctr" wrap="none" lIns="0" rIns="0" tIns="0" bIns="0">
+          <a:bodyPr rtlCol="0" anchor="ctr" wrap="none" lIns="22860" rIns="22860" tIns="0" bIns="0">
             <a:noAutofit/>
           </a:bodyPr>
           <a:lstStyle/>
           <a:p>
             <a:pPr algn="ctr">
               <a:lnSpc>
-                <a:spcPts val="997"/>
+                <a:spcPts val="1022"/>
               </a:lnSpc>
               <a:spcBef>
                 <a:spcPts val="0"/>
@@ -10181,8 +10182,8 @@
         </p:nvSpPr>
         <p:spPr>
           <a:xfrm>
-            <a:off x="6008116" y="4216466"/>
-            <a:ext cx="819404" cy="154122"/>
+            <a:off x="6008116" y="4236546"/>
+            <a:ext cx="819404" cy="157289"/>
           </a:xfrm>
           <a:prstGeom prst="rect">
             <a:avLst/>
@@ -10212,14 +10213,14 @@
           </a:fontRef>
         </p:style>
         <p:txBody>
-          <a:bodyPr rtlCol="0" anchor="ctr" wrap="none" lIns="0" rIns="0" tIns="0" bIns="0">
+          <a:bodyPr rtlCol="0" anchor="ctr" wrap="none" lIns="22860" rIns="22860" tIns="0" bIns="0">
             <a:noAutofit/>
           </a:bodyPr>
           <a:lstStyle/>
           <a:p>
             <a:pPr algn="ctr">
               <a:lnSpc>
-                <a:spcPts val="997"/>
+                <a:spcPts val="1022"/>
               </a:lnSpc>
               <a:spcBef>
                 <a:spcPts val="0"/>
@@ -10248,8 +10249,8 @@
         </p:nvSpPr>
         <p:spPr>
           <a:xfrm>
-            <a:off x="6827520" y="4216466"/>
-            <a:ext cx="819404" cy="154122"/>
+            <a:off x="6827520" y="4236546"/>
+            <a:ext cx="819404" cy="157289"/>
           </a:xfrm>
           <a:prstGeom prst="rect">
             <a:avLst/>
@@ -10279,14 +10280,14 @@
           </a:fontRef>
         </p:style>
         <p:txBody>
-          <a:bodyPr rtlCol="0" anchor="ctr" wrap="none" lIns="0" rIns="0" tIns="0" bIns="0">
+          <a:bodyPr rtlCol="0" anchor="ctr" wrap="none" lIns="22860" rIns="22860" tIns="0" bIns="0">
             <a:noAutofit/>
           </a:bodyPr>
           <a:lstStyle/>
           <a:p>
             <a:pPr algn="ctr">
               <a:lnSpc>
-                <a:spcPts val="997"/>
+                <a:spcPts val="1022"/>
               </a:lnSpc>
               <a:spcBef>
                 <a:spcPts val="0"/>
@@ -10315,8 +10316,8 @@
         </p:nvSpPr>
         <p:spPr>
           <a:xfrm>
-            <a:off x="7646924" y="4216466"/>
-            <a:ext cx="819404" cy="154122"/>
+            <a:off x="7646924" y="4236546"/>
+            <a:ext cx="819404" cy="157289"/>
           </a:xfrm>
           <a:prstGeom prst="rect">
             <a:avLst/>
@@ -10346,14 +10347,14 @@
           </a:fontRef>
         </p:style>
         <p:txBody>
-          <a:bodyPr rtlCol="0" anchor="ctr" wrap="none" lIns="0" rIns="0" tIns="0" bIns="0">
+          <a:bodyPr rtlCol="0" anchor="ctr" wrap="none" lIns="22860" rIns="22860" tIns="0" bIns="0">
             <a:noAutofit/>
           </a:bodyPr>
           <a:lstStyle/>
           <a:p>
             <a:pPr algn="ctr">
               <a:lnSpc>
-                <a:spcPts val="997"/>
+                <a:spcPts val="1022"/>
               </a:lnSpc>
               <a:spcBef>
                 <a:spcPts val="0"/>
@@ -10382,8 +10383,8 @@
         </p:nvSpPr>
         <p:spPr>
           <a:xfrm>
-            <a:off x="5188712" y="4370588"/>
-            <a:ext cx="819404" cy="154122"/>
+            <a:off x="5188712" y="4393835"/>
+            <a:ext cx="819404" cy="157289"/>
           </a:xfrm>
           <a:prstGeom prst="rect">
             <a:avLst/>
@@ -10413,14 +10414,14 @@
           </a:fontRef>
         </p:style>
         <p:txBody>
-          <a:bodyPr rtlCol="0" anchor="ctr" wrap="none" lIns="0" rIns="0" tIns="0" bIns="0">
+          <a:bodyPr rtlCol="0" anchor="ctr" wrap="none" lIns="22860" rIns="22860" tIns="0" bIns="0">
             <a:noAutofit/>
           </a:bodyPr>
           <a:lstStyle/>
           <a:p>
             <a:pPr algn="ctr">
               <a:lnSpc>
-                <a:spcPts val="997"/>
+                <a:spcPts val="1022"/>
               </a:lnSpc>
               <a:spcBef>
                 <a:spcPts val="0"/>
@@ -10449,8 +10450,8 @@
         </p:nvSpPr>
         <p:spPr>
           <a:xfrm>
-            <a:off x="6008116" y="4370588"/>
-            <a:ext cx="819404" cy="154122"/>
+            <a:off x="6008116" y="4393835"/>
+            <a:ext cx="819404" cy="157289"/>
           </a:xfrm>
           <a:prstGeom prst="rect">
             <a:avLst/>
@@ -10480,14 +10481,14 @@
           </a:fontRef>
         </p:style>
         <p:txBody>
-          <a:bodyPr rtlCol="0" anchor="ctr" wrap="none" lIns="0" rIns="0" tIns="0" bIns="0">
+          <a:bodyPr rtlCol="0" anchor="ctr" wrap="none" lIns="22860" rIns="22860" tIns="0" bIns="0">
             <a:noAutofit/>
           </a:bodyPr>
           <a:lstStyle/>
           <a:p>
             <a:pPr algn="ctr">
               <a:lnSpc>
-                <a:spcPts val="997"/>
+                <a:spcPts val="1022"/>
               </a:lnSpc>
               <a:spcBef>
                 <a:spcPts val="0"/>
@@ -10516,8 +10517,8 @@
         </p:nvSpPr>
         <p:spPr>
           <a:xfrm>
-            <a:off x="6827520" y="4370588"/>
-            <a:ext cx="819404" cy="154122"/>
+            <a:off x="6827520" y="4393835"/>
+            <a:ext cx="819404" cy="157289"/>
           </a:xfrm>
           <a:prstGeom prst="rect">
             <a:avLst/>
@@ -10547,14 +10548,14 @@
           </a:fontRef>
         </p:style>
         <p:txBody>
-          <a:bodyPr rtlCol="0" anchor="ctr" wrap="none" lIns="0" rIns="0" tIns="0" bIns="0">
+          <a:bodyPr rtlCol="0" anchor="ctr" wrap="none" lIns="22860" rIns="22860" tIns="0" bIns="0">
             <a:noAutofit/>
           </a:bodyPr>
           <a:lstStyle/>
           <a:p>
             <a:pPr algn="ctr">
               <a:lnSpc>
-                <a:spcPts val="997"/>
+                <a:spcPts val="1022"/>
               </a:lnSpc>
               <a:spcBef>
                 <a:spcPts val="0"/>
@@ -10583,8 +10584,8 @@
         </p:nvSpPr>
         <p:spPr>
           <a:xfrm>
-            <a:off x="7646924" y="4370588"/>
-            <a:ext cx="819404" cy="154122"/>
+            <a:off x="7646924" y="4393835"/>
+            <a:ext cx="819404" cy="157289"/>
           </a:xfrm>
           <a:prstGeom prst="rect">
             <a:avLst/>
@@ -10614,14 +10615,14 @@
           </a:fontRef>
         </p:style>
         <p:txBody>
-          <a:bodyPr rtlCol="0" anchor="ctr" wrap="none" lIns="0" rIns="0" tIns="0" bIns="0">
+          <a:bodyPr rtlCol="0" anchor="ctr" wrap="none" lIns="22860" rIns="22860" tIns="0" bIns="0">
             <a:noAutofit/>
           </a:bodyPr>
           <a:lstStyle/>
           <a:p>
             <a:pPr algn="ctr">
               <a:lnSpc>
-                <a:spcPts val="997"/>
+                <a:spcPts val="1022"/>
               </a:lnSpc>
               <a:spcBef>
                 <a:spcPts val="0"/>
@@ -10637,7 +10638,16 @@
                 </a:solidFill>
                 <a:latin typeface="Segoe UI"/>
               </a:rPr>
-              <a:t>+ 1</a:t>
+              <a:t>+ </a:t>
+            </a:r>
+            <a:r>
+              <a:rPr sz="750" b="0" i="0">
+                <a:solidFill>
+                  <a:srgbClr val="3F3F3F"/>
+                </a:solidFill>
+                <a:latin typeface="Segoe UI"/>
+              </a:rPr>
+              <a:t>1</a:t>
             </a:r>
           </a:p>
         </p:txBody>
@@ -10650,8 +10660,8 @@
         </p:nvSpPr>
         <p:spPr>
           <a:xfrm>
-            <a:off x="8502904" y="3908222"/>
-            <a:ext cx="819404" cy="154122"/>
+            <a:off x="8502904" y="3921968"/>
+            <a:ext cx="819404" cy="157289"/>
           </a:xfrm>
           <a:prstGeom prst="rect">
             <a:avLst/>
@@ -10681,14 +10691,14 @@
           </a:fontRef>
         </p:style>
         <p:txBody>
-          <a:bodyPr rtlCol="0" anchor="ctr" wrap="none" lIns="0" rIns="0" tIns="0" bIns="0">
+          <a:bodyPr rtlCol="0" anchor="ctr" wrap="none" lIns="22860" rIns="22860" tIns="0" bIns="0">
             <a:noAutofit/>
           </a:bodyPr>
           <a:lstStyle/>
           <a:p>
             <a:pPr algn="ctr">
               <a:lnSpc>
-                <a:spcPts val="997"/>
+                <a:spcPts val="1022"/>
               </a:lnSpc>
               <a:spcBef>
                 <a:spcPts val="0"/>
@@ -10717,8 +10727,8 @@
         </p:nvSpPr>
         <p:spPr>
           <a:xfrm>
-            <a:off x="9322308" y="3908222"/>
-            <a:ext cx="819404" cy="154122"/>
+            <a:off x="9322308" y="3921968"/>
+            <a:ext cx="819404" cy="157289"/>
           </a:xfrm>
           <a:prstGeom prst="rect">
             <a:avLst/>
@@ -10748,14 +10758,14 @@
           </a:fontRef>
         </p:style>
         <p:txBody>
-          <a:bodyPr rtlCol="0" anchor="ctr" wrap="none" lIns="0" rIns="0" tIns="0" bIns="0">
+          <a:bodyPr rtlCol="0" anchor="ctr" wrap="none" lIns="22860" rIns="22860" tIns="0" bIns="0">
             <a:noAutofit/>
           </a:bodyPr>
           <a:lstStyle/>
           <a:p>
             <a:pPr algn="ctr">
               <a:lnSpc>
-                <a:spcPts val="997"/>
+                <a:spcPts val="1022"/>
               </a:lnSpc>
               <a:spcBef>
                 <a:spcPts val="0"/>
@@ -10784,8 +10794,8 @@
         </p:nvSpPr>
         <p:spPr>
           <a:xfrm>
-            <a:off x="10141712" y="3908222"/>
-            <a:ext cx="819404" cy="154122"/>
+            <a:off x="10141712" y="3921968"/>
+            <a:ext cx="819404" cy="157289"/>
           </a:xfrm>
           <a:prstGeom prst="rect">
             <a:avLst/>
@@ -10815,14 +10825,14 @@
           </a:fontRef>
         </p:style>
         <p:txBody>
-          <a:bodyPr rtlCol="0" anchor="ctr" wrap="none" lIns="0" rIns="0" tIns="0" bIns="0">
+          <a:bodyPr rtlCol="0" anchor="ctr" wrap="none" lIns="22860" rIns="22860" tIns="0" bIns="0">
             <a:noAutofit/>
           </a:bodyPr>
           <a:lstStyle/>
           <a:p>
             <a:pPr algn="ctr">
               <a:lnSpc>
-                <a:spcPts val="997"/>
+                <a:spcPts val="1022"/>
               </a:lnSpc>
               <a:spcBef>
                 <a:spcPts val="0"/>
@@ -10838,7 +10848,16 @@
                 </a:solidFill>
                 <a:latin typeface="Segoe UI"/>
               </a:rPr>
-              <a:t>State Avg.</a:t>
+              <a:t>State </a:t>
+            </a:r>
+            <a:r>
+              <a:rPr sz="750" b="1" i="0">
+                <a:solidFill>
+                  <a:srgbClr val="3F3F3F"/>
+                </a:solidFill>
+                <a:latin typeface="Segoe UI"/>
+              </a:rPr>
+              <a:t>Avg.</a:t>
             </a:r>
           </a:p>
         </p:txBody>
@@ -10851,8 +10870,8 @@
         </p:nvSpPr>
         <p:spPr>
           <a:xfrm>
-            <a:off x="10961116" y="3908222"/>
-            <a:ext cx="819404" cy="154122"/>
+            <a:off x="10961116" y="3921968"/>
+            <a:ext cx="819404" cy="157289"/>
           </a:xfrm>
           <a:prstGeom prst="rect">
             <a:avLst/>
@@ -10882,14 +10901,14 @@
           </a:fontRef>
         </p:style>
         <p:txBody>
-          <a:bodyPr rtlCol="0" anchor="ctr" wrap="none" lIns="0" rIns="0" tIns="0" bIns="0">
+          <a:bodyPr rtlCol="0" anchor="ctr" wrap="none" lIns="22860" rIns="22860" tIns="0" bIns="0">
             <a:noAutofit/>
           </a:bodyPr>
           <a:lstStyle/>
           <a:p>
             <a:pPr algn="ctr">
               <a:lnSpc>
-                <a:spcPts val="997"/>
+                <a:spcPts val="1022"/>
               </a:lnSpc>
               <a:spcBef>
                 <a:spcPts val="0"/>
@@ -10918,8 +10937,8 @@
         </p:nvSpPr>
         <p:spPr>
           <a:xfrm>
-            <a:off x="8502904" y="4062344"/>
-            <a:ext cx="819404" cy="154122"/>
+            <a:off x="8502904" y="4079257"/>
+            <a:ext cx="819404" cy="157289"/>
           </a:xfrm>
           <a:prstGeom prst="rect">
             <a:avLst/>
@@ -10949,14 +10968,14 @@
           </a:fontRef>
         </p:style>
         <p:txBody>
-          <a:bodyPr rtlCol="0" anchor="ctr" wrap="none" lIns="0" rIns="0" tIns="0" bIns="0">
+          <a:bodyPr rtlCol="0" anchor="ctr" wrap="none" lIns="22860" rIns="22860" tIns="0" bIns="0">
             <a:noAutofit/>
           </a:bodyPr>
           <a:lstStyle/>
           <a:p>
             <a:pPr algn="ctr">
               <a:lnSpc>
-                <a:spcPts val="997"/>
+                <a:spcPts val="1022"/>
               </a:lnSpc>
               <a:spcBef>
                 <a:spcPts val="0"/>
@@ -10985,8 +11004,8 @@
         </p:nvSpPr>
         <p:spPr>
           <a:xfrm>
-            <a:off x="9322308" y="4062344"/>
-            <a:ext cx="819404" cy="154122"/>
+            <a:off x="9322308" y="4079257"/>
+            <a:ext cx="819404" cy="157289"/>
           </a:xfrm>
           <a:prstGeom prst="rect">
             <a:avLst/>
@@ -11016,14 +11035,14 @@
           </a:fontRef>
         </p:style>
         <p:txBody>
-          <a:bodyPr rtlCol="0" anchor="ctr" wrap="none" lIns="0" rIns="0" tIns="0" bIns="0">
+          <a:bodyPr rtlCol="0" anchor="ctr" wrap="none" lIns="22860" rIns="22860" tIns="0" bIns="0">
             <a:noAutofit/>
           </a:bodyPr>
           <a:lstStyle/>
           <a:p>
             <a:pPr algn="ctr">
               <a:lnSpc>
-                <a:spcPts val="997"/>
+                <a:spcPts val="1022"/>
               </a:lnSpc>
               <a:spcBef>
                 <a:spcPts val="0"/>
@@ -11052,8 +11071,8 @@
         </p:nvSpPr>
         <p:spPr>
           <a:xfrm>
-            <a:off x="10141712" y="4062344"/>
-            <a:ext cx="819404" cy="154122"/>
+            <a:off x="10141712" y="4079257"/>
+            <a:ext cx="819404" cy="157289"/>
           </a:xfrm>
           <a:prstGeom prst="rect">
             <a:avLst/>
@@ -11083,14 +11102,14 @@
           </a:fontRef>
         </p:style>
         <p:txBody>
-          <a:bodyPr rtlCol="0" anchor="ctr" wrap="none" lIns="0" rIns="0" tIns="0" bIns="0">
+          <a:bodyPr rtlCol="0" anchor="ctr" wrap="none" lIns="22860" rIns="22860" tIns="0" bIns="0">
             <a:noAutofit/>
           </a:bodyPr>
           <a:lstStyle/>
           <a:p>
             <a:pPr algn="ctr">
               <a:lnSpc>
-                <a:spcPts val="997"/>
+                <a:spcPts val="1022"/>
               </a:lnSpc>
               <a:spcBef>
                 <a:spcPts val="0"/>
@@ -11119,8 +11138,8 @@
         </p:nvSpPr>
         <p:spPr>
           <a:xfrm>
-            <a:off x="10961116" y="4062344"/>
-            <a:ext cx="819404" cy="154122"/>
+            <a:off x="10961116" y="4079257"/>
+            <a:ext cx="819404" cy="157289"/>
           </a:xfrm>
           <a:prstGeom prst="rect">
             <a:avLst/>
@@ -11150,14 +11169,14 @@
           </a:fontRef>
         </p:style>
         <p:txBody>
-          <a:bodyPr rtlCol="0" anchor="ctr" wrap="none" lIns="0" rIns="0" tIns="0" bIns="0">
+          <a:bodyPr rtlCol="0" anchor="ctr" wrap="none" lIns="22860" rIns="22860" tIns="0" bIns="0">
             <a:noAutofit/>
           </a:bodyPr>
           <a:lstStyle/>
           <a:p>
             <a:pPr algn="ctr">
               <a:lnSpc>
-                <a:spcPts val="997"/>
+                <a:spcPts val="1022"/>
               </a:lnSpc>
               <a:spcBef>
                 <a:spcPts val="0"/>
@@ -11173,7 +11192,16 @@
                 </a:solidFill>
                 <a:latin typeface="Segoe UI"/>
               </a:rPr>
-              <a:t>- 3</a:t>
+              <a:t>- </a:t>
+            </a:r>
+            <a:r>
+              <a:rPr sz="750" b="0" i="0">
+                <a:solidFill>
+                  <a:srgbClr val="3F3F3F"/>
+                </a:solidFill>
+                <a:latin typeface="Segoe UI"/>
+              </a:rPr>
+              <a:t>3</a:t>
             </a:r>
           </a:p>
         </p:txBody>
@@ -11186,8 +11214,8 @@
         </p:nvSpPr>
         <p:spPr>
           <a:xfrm>
-            <a:off x="8502904" y="4216466"/>
-            <a:ext cx="819404" cy="154122"/>
+            <a:off x="8502904" y="4236546"/>
+            <a:ext cx="819404" cy="157289"/>
           </a:xfrm>
           <a:prstGeom prst="rect">
             <a:avLst/>
@@ -11217,14 +11245,14 @@
           </a:fontRef>
         </p:style>
         <p:txBody>
-          <a:bodyPr rtlCol="0" anchor="ctr" wrap="none" lIns="0" rIns="0" tIns="0" bIns="0">
+          <a:bodyPr rtlCol="0" anchor="ctr" wrap="none" lIns="22860" rIns="22860" tIns="0" bIns="0">
             <a:noAutofit/>
           </a:bodyPr>
           <a:lstStyle/>
           <a:p>
             <a:pPr algn="ctr">
               <a:lnSpc>
-                <a:spcPts val="997"/>
+                <a:spcPts val="1022"/>
               </a:lnSpc>
               <a:spcBef>
                 <a:spcPts val="0"/>
@@ -11253,8 +11281,8 @@
         </p:nvSpPr>
         <p:spPr>
           <a:xfrm>
-            <a:off x="9322308" y="4216466"/>
-            <a:ext cx="819404" cy="154122"/>
+            <a:off x="9322308" y="4236546"/>
+            <a:ext cx="819404" cy="157289"/>
           </a:xfrm>
           <a:prstGeom prst="rect">
             <a:avLst/>
@@ -11284,14 +11312,14 @@
           </a:fontRef>
         </p:style>
         <p:txBody>
-          <a:bodyPr rtlCol="0" anchor="ctr" wrap="none" lIns="0" rIns="0" tIns="0" bIns="0">
+          <a:bodyPr rtlCol="0" anchor="ctr" wrap="none" lIns="22860" rIns="22860" tIns="0" bIns="0">
             <a:noAutofit/>
           </a:bodyPr>
           <a:lstStyle/>
           <a:p>
             <a:pPr algn="ctr">
               <a:lnSpc>
-                <a:spcPts val="997"/>
+                <a:spcPts val="1022"/>
               </a:lnSpc>
               <a:spcBef>
                 <a:spcPts val="0"/>
@@ -11320,8 +11348,8 @@
         </p:nvSpPr>
         <p:spPr>
           <a:xfrm>
-            <a:off x="10141712" y="4216466"/>
-            <a:ext cx="819404" cy="154122"/>
+            <a:off x="10141712" y="4236546"/>
+            <a:ext cx="819404" cy="157289"/>
           </a:xfrm>
           <a:prstGeom prst="rect">
             <a:avLst/>
@@ -11351,14 +11379,14 @@
           </a:fontRef>
         </p:style>
         <p:txBody>
-          <a:bodyPr rtlCol="0" anchor="ctr" wrap="none" lIns="0" rIns="0" tIns="0" bIns="0">
+          <a:bodyPr rtlCol="0" anchor="ctr" wrap="none" lIns="22860" rIns="22860" tIns="0" bIns="0">
             <a:noAutofit/>
           </a:bodyPr>
           <a:lstStyle/>
           <a:p>
             <a:pPr algn="ctr">
               <a:lnSpc>
-                <a:spcPts val="997"/>
+                <a:spcPts val="1022"/>
               </a:lnSpc>
               <a:spcBef>
                 <a:spcPts val="0"/>
@@ -11387,8 +11415,8 @@
         </p:nvSpPr>
         <p:spPr>
           <a:xfrm>
-            <a:off x="10961116" y="4216466"/>
-            <a:ext cx="819404" cy="154122"/>
+            <a:off x="10961116" y="4236546"/>
+            <a:ext cx="819404" cy="157289"/>
           </a:xfrm>
           <a:prstGeom prst="rect">
             <a:avLst/>
@@ -11418,14 +11446,14 @@
           </a:fontRef>
         </p:style>
         <p:txBody>
-          <a:bodyPr rtlCol="0" anchor="ctr" wrap="none" lIns="0" rIns="0" tIns="0" bIns="0">
+          <a:bodyPr rtlCol="0" anchor="ctr" wrap="none" lIns="22860" rIns="22860" tIns="0" bIns="0">
             <a:noAutofit/>
           </a:bodyPr>
           <a:lstStyle/>
           <a:p>
             <a:pPr algn="ctr">
               <a:lnSpc>
-                <a:spcPts val="997"/>
+                <a:spcPts val="1022"/>
               </a:lnSpc>
               <a:spcBef>
                 <a:spcPts val="0"/>
@@ -11454,8 +11482,8 @@
         </p:nvSpPr>
         <p:spPr>
           <a:xfrm>
-            <a:off x="8502904" y="4370588"/>
-            <a:ext cx="819404" cy="154122"/>
+            <a:off x="8502904" y="4393835"/>
+            <a:ext cx="819404" cy="157289"/>
           </a:xfrm>
           <a:prstGeom prst="rect">
             <a:avLst/>
@@ -11485,14 +11513,14 @@
           </a:fontRef>
         </p:style>
         <p:txBody>
-          <a:bodyPr rtlCol="0" anchor="ctr" wrap="none" lIns="0" rIns="0" tIns="0" bIns="0">
+          <a:bodyPr rtlCol="0" anchor="ctr" wrap="none" lIns="22860" rIns="22860" tIns="0" bIns="0">
             <a:noAutofit/>
           </a:bodyPr>
           <a:lstStyle/>
           <a:p>
             <a:pPr algn="ctr">
               <a:lnSpc>
-                <a:spcPts val="997"/>
+                <a:spcPts val="1022"/>
               </a:lnSpc>
               <a:spcBef>
                 <a:spcPts val="0"/>
@@ -11521,8 +11549,8 @@
         </p:nvSpPr>
         <p:spPr>
           <a:xfrm>
-            <a:off x="9322308" y="4370588"/>
-            <a:ext cx="819404" cy="154122"/>
+            <a:off x="9322308" y="4393835"/>
+            <a:ext cx="819404" cy="157289"/>
           </a:xfrm>
           <a:prstGeom prst="rect">
             <a:avLst/>
@@ -11552,14 +11580,14 @@
           </a:fontRef>
         </p:style>
         <p:txBody>
-          <a:bodyPr rtlCol="0" anchor="ctr" wrap="none" lIns="0" rIns="0" tIns="0" bIns="0">
+          <a:bodyPr rtlCol="0" anchor="ctr" wrap="none" lIns="22860" rIns="22860" tIns="0" bIns="0">
             <a:noAutofit/>
           </a:bodyPr>
           <a:lstStyle/>
           <a:p>
             <a:pPr algn="ctr">
               <a:lnSpc>
-                <a:spcPts val="997"/>
+                <a:spcPts val="1022"/>
               </a:lnSpc>
               <a:spcBef>
                 <a:spcPts val="0"/>
@@ -11588,8 +11616,8 @@
         </p:nvSpPr>
         <p:spPr>
           <a:xfrm>
-            <a:off x="10141712" y="4370588"/>
-            <a:ext cx="819404" cy="154122"/>
+            <a:off x="10141712" y="4393835"/>
+            <a:ext cx="819404" cy="157289"/>
           </a:xfrm>
           <a:prstGeom prst="rect">
             <a:avLst/>
@@ -11619,14 +11647,14 @@
           </a:fontRef>
         </p:style>
         <p:txBody>
-          <a:bodyPr rtlCol="0" anchor="ctr" wrap="none" lIns="0" rIns="0" tIns="0" bIns="0">
+          <a:bodyPr rtlCol="0" anchor="ctr" wrap="none" lIns="22860" rIns="22860" tIns="0" bIns="0">
             <a:noAutofit/>
           </a:bodyPr>
           <a:lstStyle/>
           <a:p>
             <a:pPr algn="ctr">
               <a:lnSpc>
-                <a:spcPts val="997"/>
+                <a:spcPts val="1022"/>
               </a:lnSpc>
               <a:spcBef>
                 <a:spcPts val="0"/>
@@ -11655,8 +11683,8 @@
         </p:nvSpPr>
         <p:spPr>
           <a:xfrm>
-            <a:off x="10961116" y="4370588"/>
-            <a:ext cx="819404" cy="154122"/>
+            <a:off x="10961116" y="4393835"/>
+            <a:ext cx="819404" cy="157289"/>
           </a:xfrm>
           <a:prstGeom prst="rect">
             <a:avLst/>
@@ -11686,14 +11714,14 @@
           </a:fontRef>
         </p:style>
         <p:txBody>
-          <a:bodyPr rtlCol="0" anchor="ctr" wrap="none" lIns="0" rIns="0" tIns="0" bIns="0">
+          <a:bodyPr rtlCol="0" anchor="ctr" wrap="none" lIns="22860" rIns="22860" tIns="0" bIns="0">
             <a:noAutofit/>
           </a:bodyPr>
           <a:lstStyle/>
           <a:p>
             <a:pPr algn="ctr">
               <a:lnSpc>
-                <a:spcPts val="997"/>
+                <a:spcPts val="1022"/>
               </a:lnSpc>
               <a:spcBef>
                 <a:spcPts val="0"/>
@@ -11709,7 +11737,16 @@
                 </a:solidFill>
                 <a:latin typeface="Segoe UI"/>
               </a:rPr>
-              <a:t>+ 9</a:t>
+              <a:t>+ </a:t>
+            </a:r>
+            <a:r>
+              <a:rPr sz="750" b="0" i="0">
+                <a:solidFill>
+                  <a:srgbClr val="3F3F3F"/>
+                </a:solidFill>
+                <a:latin typeface="Segoe UI"/>
+              </a:rPr>
+              <a:t>9</a:t>
             </a:r>
           </a:p>
         </p:txBody>
@@ -11722,8 +11759,8 @@
         </p:nvCxnSpPr>
         <p:spPr>
           <a:xfrm>
-            <a:off x="5170424" y="1445380"/>
-            <a:ext cx="0" cy="3387574"/>
+            <a:off x="5170424" y="1407816"/>
+            <a:ext cx="0" cy="3457886"/>
           </a:xfrm>
           <a:prstGeom prst="line">
             <a:avLst/>
@@ -11758,8 +11795,8 @@
         </p:nvCxnSpPr>
         <p:spPr>
           <a:xfrm>
-            <a:off x="8484616" y="1445380"/>
-            <a:ext cx="0" cy="3387574"/>
+            <a:off x="8484616" y="1407816"/>
+            <a:ext cx="0" cy="3457886"/>
           </a:xfrm>
           <a:prstGeom prst="line">
             <a:avLst/>
@@ -11794,7 +11831,7 @@
         </p:nvSpPr>
         <p:spPr>
           <a:xfrm>
-            <a:off x="411480" y="5341422"/>
+            <a:off x="411480" y="5338255"/>
             <a:ext cx="11369040" cy="822960"/>
           </a:xfrm>
           <a:prstGeom prst="rect">
@@ -11840,7 +11877,7 @@
         </p:nvSpPr>
         <p:spPr>
           <a:xfrm>
-            <a:off x="1289304" y="5341422"/>
+            <a:off x="1289304" y="5338255"/>
             <a:ext cx="2545080" cy="822960"/>
           </a:xfrm>
           <a:prstGeom prst="rect">
@@ -11856,7 +11893,7 @@
           <a:p>
             <a:pPr algn="ctr">
               <a:lnSpc>
-                <a:spcPts val="1197"/>
+                <a:spcPts val="1227"/>
               </a:lnSpc>
               <a:spcBef>
                 <a:spcPts val="0"/>
@@ -11887,7 +11924,7 @@
           <a:p>
             <a:pPr algn="ctr">
               <a:lnSpc>
-                <a:spcPts val="1197"/>
+                <a:spcPts val="1227"/>
               </a:lnSpc>
               <a:spcBef>
                 <a:spcPts val="0"/>
@@ -11979,7 +12016,7 @@
         </p:nvSpPr>
         <p:spPr>
           <a:xfrm>
-            <a:off x="3907536" y="5341422"/>
+            <a:off x="3907536" y="5338255"/>
             <a:ext cx="2545080" cy="822960"/>
           </a:xfrm>
           <a:prstGeom prst="rect">
@@ -11995,7 +12032,7 @@
           <a:p>
             <a:pPr algn="ctr">
               <a:lnSpc>
-                <a:spcPts val="1197"/>
+                <a:spcPts val="1227"/>
               </a:lnSpc>
               <a:spcBef>
                 <a:spcPts val="0"/>
@@ -12080,7 +12117,7 @@
           <a:p>
             <a:pPr algn="ctr">
               <a:lnSpc>
-                <a:spcPts val="1197"/>
+                <a:spcPts val="1227"/>
               </a:lnSpc>
               <a:spcBef>
                 <a:spcPts val="0"/>
@@ -12118,7 +12155,7 @@
         </p:nvSpPr>
         <p:spPr>
           <a:xfrm>
-            <a:off x="6525768" y="5341422"/>
+            <a:off x="6525768" y="5338255"/>
             <a:ext cx="2545080" cy="822960"/>
           </a:xfrm>
           <a:prstGeom prst="rect">
@@ -12134,7 +12171,7 @@
           <a:p>
             <a:pPr algn="ctr">
               <a:lnSpc>
-                <a:spcPts val="1197"/>
+                <a:spcPts val="1227"/>
               </a:lnSpc>
               <a:spcBef>
                 <a:spcPts val="0"/>
@@ -12201,7 +12238,7 @@
           <a:p>
             <a:pPr algn="ctr">
               <a:lnSpc>
-                <a:spcPts val="1197"/>
+                <a:spcPts val="1227"/>
               </a:lnSpc>
               <a:spcBef>
                 <a:spcPts val="0"/>
@@ -12239,7 +12276,7 @@
         </p:nvSpPr>
         <p:spPr>
           <a:xfrm>
-            <a:off x="9144000" y="5341422"/>
+            <a:off x="9144000" y="5338255"/>
             <a:ext cx="2545080" cy="822960"/>
           </a:xfrm>
           <a:prstGeom prst="rect">
@@ -12255,7 +12292,7 @@
           <a:p>
             <a:pPr algn="ctr">
               <a:lnSpc>
-                <a:spcPts val="1197"/>
+                <a:spcPts val="1227"/>
               </a:lnSpc>
               <a:spcBef>
                 <a:spcPts val="0"/>
@@ -12313,7 +12350,7 @@
           <a:p>
             <a:pPr algn="ctr">
               <a:lnSpc>
-                <a:spcPts val="1197"/>
+                <a:spcPts val="1227"/>
               </a:lnSpc>
               <a:spcBef>
                 <a:spcPts val="0"/>
@@ -12342,7 +12379,7 @@
         </p:nvCxnSpPr>
         <p:spPr>
           <a:xfrm>
-            <a:off x="3870960" y="5387142"/>
+            <a:off x="3870960" y="5383975"/>
             <a:ext cx="0" cy="731520"/>
           </a:xfrm>
           <a:prstGeom prst="line">
@@ -12377,7 +12414,7 @@
         </p:nvCxnSpPr>
         <p:spPr>
           <a:xfrm>
-            <a:off x="6489192" y="5387142"/>
+            <a:off x="6489192" y="5383975"/>
             <a:ext cx="0" cy="731520"/>
           </a:xfrm>
           <a:prstGeom prst="line">
@@ -12412,7 +12449,7 @@
         </p:nvCxnSpPr>
         <p:spPr>
           <a:xfrm>
-            <a:off x="9107424" y="5387142"/>
+            <a:off x="9107424" y="5383975"/>
             <a:ext cx="0" cy="731520"/>
           </a:xfrm>
           <a:prstGeom prst="line">
@@ -12447,7 +12484,7 @@
         </p:nvSpPr>
         <p:spPr>
           <a:xfrm>
-            <a:off x="466344" y="5387142"/>
+            <a:off x="466344" y="5383975"/>
             <a:ext cx="731520" cy="731520"/>
           </a:xfrm>
           <a:prstGeom prst="ellipse">
@@ -12509,7 +12546,7 @@
         </p:nvSpPr>
         <p:spPr>
           <a:xfrm>
-            <a:off x="5603656" y="5286558"/>
+            <a:off x="5603656" y="5283391"/>
             <a:ext cx="984688" cy="109728"/>
           </a:xfrm>
           <a:prstGeom prst="roundRect">
@@ -12573,8 +12610,8 @@
         </p:nvSpPr>
         <p:spPr>
           <a:xfrm>
-            <a:off x="411480" y="6210102"/>
-            <a:ext cx="11369040" cy="126690"/>
+            <a:off x="411480" y="6206935"/>
+            <a:ext cx="11369040" cy="129857"/>
           </a:xfrm>
           <a:prstGeom prst="rect">
             <a:avLst/>
@@ -12589,7 +12626,7 @@
           <a:p>
             <a:pPr algn="l">
               <a:lnSpc>
-                <a:spcPts val="997"/>
+                <a:spcPts val="1022"/>
               </a:lnSpc>
               <a:spcBef>
                 <a:spcPts val="0"/>
@@ -12895,8 +12932,8 @@
         </p:nvSpPr>
         <p:spPr>
           <a:xfrm>
-            <a:off x="411480" y="543208"/>
-            <a:ext cx="11369040" cy="288603"/>
+            <a:off x="411480" y="274320"/>
+            <a:ext cx="11369040" cy="295818"/>
           </a:xfrm>
           <a:prstGeom prst="rect">
             <a:avLst/>
@@ -12911,7 +12948,7 @@
           <a:p>
             <a:pPr algn="l">
               <a:lnSpc>
-                <a:spcPts val="2272"/>
+                <a:spcPts val="2329"/>
               </a:lnSpc>
               <a:spcBef>
                 <a:spcPts val="0"/>
@@ -13039,8 +13076,8 @@
         </p:nvSpPr>
         <p:spPr>
           <a:xfrm>
-            <a:off x="411480" y="859243"/>
-            <a:ext cx="11369040" cy="152028"/>
+            <a:off x="411480" y="597570"/>
+            <a:ext cx="11369040" cy="155829"/>
           </a:xfrm>
           <a:prstGeom prst="rect">
             <a:avLst/>
@@ -13055,7 +13092,7 @@
           <a:p>
             <a:pPr algn="l">
               <a:lnSpc>
-                <a:spcPts val="1197"/>
+                <a:spcPts val="1227"/>
               </a:lnSpc>
               <a:spcBef>
                 <a:spcPts val="0"/>
@@ -13184,7 +13221,7 @@
         <p:spPr>
           <a:xfrm>
             <a:off x="8884006" y="1691640"/>
-            <a:ext cx="2896514" cy="236488"/>
+            <a:ext cx="2896514" cy="242400"/>
           </a:xfrm>
           <a:prstGeom prst="rect">
             <a:avLst/>
@@ -13199,7 +13236,7 @@
           <a:p>
             <a:pPr algn="l">
               <a:lnSpc>
-                <a:spcPts val="1862"/>
+                <a:spcPts val="1908"/>
               </a:lnSpc>
               <a:spcBef>
                 <a:spcPts val="0"/>
@@ -13246,8 +13283,8 @@
         </p:nvSpPr>
         <p:spPr>
           <a:xfrm>
-            <a:off x="8884006" y="2074432"/>
-            <a:ext cx="109728" cy="152028"/>
+            <a:off x="8884006" y="2080344"/>
+            <a:ext cx="109728" cy="155829"/>
           </a:xfrm>
           <a:prstGeom prst="rect">
             <a:avLst/>
@@ -13262,7 +13299,7 @@
           <a:p>
             <a:pPr algn="l">
               <a:lnSpc>
-                <a:spcPts val="1197"/>
+                <a:spcPts val="1227"/>
               </a:lnSpc>
               <a:spcBef>
                 <a:spcPts val="0"/>
@@ -13291,8 +13328,8 @@
         </p:nvSpPr>
         <p:spPr>
           <a:xfrm>
-            <a:off x="8993734" y="2074432"/>
-            <a:ext cx="2786786" cy="304056"/>
+            <a:off x="8993734" y="2080344"/>
+            <a:ext cx="2786786" cy="311658"/>
           </a:xfrm>
           <a:prstGeom prst="rect">
             <a:avLst/>
@@ -13307,7 +13344,7 @@
           <a:p>
             <a:pPr algn="l">
               <a:lnSpc>
-                <a:spcPts val="1197"/>
+                <a:spcPts val="1227"/>
               </a:lnSpc>
               <a:spcBef>
                 <a:spcPts val="0"/>
@@ -13410,7 +13447,7 @@
           <a:p>
             <a:pPr algn="l">
               <a:lnSpc>
-                <a:spcPts val="1197"/>
+                <a:spcPts val="1227"/>
               </a:lnSpc>
               <a:spcBef>
                 <a:spcPts val="0"/>
@@ -13466,8 +13503,8 @@
         </p:nvSpPr>
         <p:spPr>
           <a:xfrm>
-            <a:off x="8884006" y="2410492"/>
-            <a:ext cx="109728" cy="152028"/>
+            <a:off x="8884006" y="2424006"/>
+            <a:ext cx="109728" cy="155829"/>
           </a:xfrm>
           <a:prstGeom prst="rect">
             <a:avLst/>
@@ -13482,7 +13519,7 @@
           <a:p>
             <a:pPr algn="l">
               <a:lnSpc>
-                <a:spcPts val="1197"/>
+                <a:spcPts val="1227"/>
               </a:lnSpc>
               <a:spcBef>
                 <a:spcPts val="0"/>
@@ -13511,8 +13548,8 @@
         </p:nvSpPr>
         <p:spPr>
           <a:xfrm>
-            <a:off x="8993734" y="2410492"/>
-            <a:ext cx="2786786" cy="304056"/>
+            <a:off x="8993734" y="2424006"/>
+            <a:ext cx="2786786" cy="311658"/>
           </a:xfrm>
           <a:prstGeom prst="rect">
             <a:avLst/>
@@ -13527,7 +13564,7 @@
           <a:p>
             <a:pPr algn="l">
               <a:lnSpc>
-                <a:spcPts val="1197"/>
+                <a:spcPts val="1227"/>
               </a:lnSpc>
               <a:spcBef>
                 <a:spcPts val="0"/>
@@ -13603,7 +13640,7 @@
           <a:p>
             <a:pPr algn="l">
               <a:lnSpc>
-                <a:spcPts val="1197"/>
+                <a:spcPts val="1227"/>
               </a:lnSpc>
               <a:spcBef>
                 <a:spcPts val="0"/>
@@ -13659,8 +13696,8 @@
         </p:nvSpPr>
         <p:spPr>
           <a:xfrm>
-            <a:off x="8884006" y="2746552"/>
-            <a:ext cx="109728" cy="152028"/>
+            <a:off x="8884006" y="2767668"/>
+            <a:ext cx="109728" cy="155829"/>
           </a:xfrm>
           <a:prstGeom prst="rect">
             <a:avLst/>
@@ -13675,7 +13712,7 @@
           <a:p>
             <a:pPr algn="l">
               <a:lnSpc>
-                <a:spcPts val="1197"/>
+                <a:spcPts val="1227"/>
               </a:lnSpc>
               <a:spcBef>
                 <a:spcPts val="0"/>
@@ -13704,8 +13741,8 @@
         </p:nvSpPr>
         <p:spPr>
           <a:xfrm>
-            <a:off x="8993734" y="2746552"/>
-            <a:ext cx="2786786" cy="304056"/>
+            <a:off x="8993734" y="2767668"/>
+            <a:ext cx="2786786" cy="311658"/>
           </a:xfrm>
           <a:prstGeom prst="rect">
             <a:avLst/>
@@ -13720,7 +13757,7 @@
           <a:p>
             <a:pPr algn="l">
               <a:lnSpc>
-                <a:spcPts val="1197"/>
+                <a:spcPts val="1227"/>
               </a:lnSpc>
               <a:spcBef>
                 <a:spcPts val="0"/>
@@ -13796,7 +13833,7 @@
           <a:p>
             <a:pPr algn="l">
               <a:lnSpc>
-                <a:spcPts val="1197"/>
+                <a:spcPts val="1227"/>
               </a:lnSpc>
               <a:spcBef>
                 <a:spcPts val="0"/>
@@ -13844,7 +13881,7 @@
         <p:spPr>
           <a:xfrm>
             <a:off x="411480" y="1691640"/>
-            <a:ext cx="215562" cy="144978"/>
+            <a:ext cx="215562" cy="148145"/>
           </a:xfrm>
           <a:prstGeom prst="roundRect">
             <a:avLst>
@@ -13881,7 +13918,7 @@
           <a:p>
             <a:pPr algn="ctr">
               <a:lnSpc>
-                <a:spcPts val="997"/>
+                <a:spcPts val="1022"/>
               </a:lnSpc>
               <a:spcBef>
                 <a:spcPts val="0"/>
@@ -13911,7 +13948,7 @@
         <p:spPr>
           <a:xfrm>
             <a:off x="654474" y="1691640"/>
-            <a:ext cx="665690" cy="144978"/>
+            <a:ext cx="665690" cy="148145"/>
           </a:xfrm>
           <a:prstGeom prst="rect">
             <a:avLst/>
@@ -13926,7 +13963,7 @@
           <a:p>
             <a:pPr algn="l">
               <a:lnSpc>
-                <a:spcPts val="997"/>
+                <a:spcPts val="1022"/>
               </a:lnSpc>
               <a:spcBef>
                 <a:spcPts val="0"/>
@@ -13956,7 +13993,7 @@
         <p:spPr>
           <a:xfrm>
             <a:off x="1375028" y="1691640"/>
-            <a:ext cx="266070" cy="144978"/>
+            <a:ext cx="266070" cy="148145"/>
           </a:xfrm>
           <a:prstGeom prst="roundRect">
             <a:avLst>
@@ -13993,7 +14030,7 @@
           <a:p>
             <a:pPr algn="ctr">
               <a:lnSpc>
-                <a:spcPts val="997"/>
+                <a:spcPts val="1022"/>
               </a:lnSpc>
               <a:spcBef>
                 <a:spcPts val="0"/>
@@ -14023,7 +14060,7 @@
         <p:spPr>
           <a:xfrm>
             <a:off x="1668530" y="1691640"/>
-            <a:ext cx="752894" cy="144978"/>
+            <a:ext cx="752894" cy="148145"/>
           </a:xfrm>
           <a:prstGeom prst="rect">
             <a:avLst/>
@@ -14038,7 +14075,7 @@
           <a:p>
             <a:pPr algn="l">
               <a:lnSpc>
-                <a:spcPts val="997"/>
+                <a:spcPts val="1022"/>
               </a:lnSpc>
               <a:spcBef>
                 <a:spcPts val="0"/>
@@ -14068,7 +14105,7 @@
         <p:spPr>
           <a:xfrm>
             <a:off x="2476288" y="1691640"/>
-            <a:ext cx="263745" cy="144978"/>
+            <a:ext cx="263745" cy="148145"/>
           </a:xfrm>
           <a:prstGeom prst="roundRect">
             <a:avLst>
@@ -14105,7 +14142,7 @@
           <a:p>
             <a:pPr algn="ctr">
               <a:lnSpc>
-                <a:spcPts val="997"/>
+                <a:spcPts val="1022"/>
               </a:lnSpc>
               <a:spcBef>
                 <a:spcPts val="0"/>
@@ -14135,7 +14172,7 @@
         <p:spPr>
           <a:xfrm>
             <a:off x="2767465" y="1691640"/>
-            <a:ext cx="1128453" cy="144978"/>
+            <a:ext cx="1128453" cy="148145"/>
           </a:xfrm>
           <a:prstGeom prst="rect">
             <a:avLst/>
@@ -14150,7 +14187,7 @@
           <a:p>
             <a:pPr algn="l">
               <a:lnSpc>
-                <a:spcPts val="997"/>
+                <a:spcPts val="1022"/>
               </a:lnSpc>
               <a:spcBef>
                 <a:spcPts val="0"/>
@@ -14180,7 +14217,7 @@
         <p:spPr>
           <a:xfrm>
             <a:off x="3950782" y="1691640"/>
-            <a:ext cx="271745" cy="144978"/>
+            <a:ext cx="271745" cy="148145"/>
           </a:xfrm>
           <a:prstGeom prst="roundRect">
             <a:avLst>
@@ -14217,7 +14254,7 @@
           <a:p>
             <a:pPr algn="ctr">
               <a:lnSpc>
-                <a:spcPts val="997"/>
+                <a:spcPts val="1022"/>
               </a:lnSpc>
               <a:spcBef>
                 <a:spcPts val="0"/>
@@ -14247,7 +14284,7 @@
         <p:spPr>
           <a:xfrm>
             <a:off x="4249959" y="1691640"/>
-            <a:ext cx="1728463" cy="144978"/>
+            <a:ext cx="1728463" cy="148145"/>
           </a:xfrm>
           <a:prstGeom prst="rect">
             <a:avLst/>
@@ -14262,7 +14299,7 @@
           <a:p>
             <a:pPr algn="l">
               <a:lnSpc>
-                <a:spcPts val="997"/>
+                <a:spcPts val="1022"/>
               </a:lnSpc>
               <a:spcBef>
                 <a:spcPts val="0"/>
@@ -14291,8 +14328,8 @@
         </p:nvSpPr>
         <p:spPr>
           <a:xfrm>
-            <a:off x="411480" y="1982922"/>
-            <a:ext cx="1319028" cy="163266"/>
+            <a:off x="411480" y="1986089"/>
+            <a:ext cx="1319028" cy="166433"/>
           </a:xfrm>
           <a:prstGeom prst="rect">
             <a:avLst/>
@@ -14329,7 +14366,7 @@
           <a:p>
             <a:pPr algn="ctr">
               <a:lnSpc>
-                <a:spcPts val="997"/>
+                <a:spcPts val="1022"/>
               </a:lnSpc>
               <a:spcBef>
                 <a:spcPts val="0"/>
@@ -14376,8 +14413,8 @@
         </p:nvSpPr>
         <p:spPr>
           <a:xfrm>
-            <a:off x="1730508" y="1982922"/>
-            <a:ext cx="2802935" cy="163266"/>
+            <a:off x="1730508" y="1986089"/>
+            <a:ext cx="2802935" cy="166433"/>
           </a:xfrm>
           <a:prstGeom prst="rect">
             <a:avLst/>
@@ -14414,7 +14451,7 @@
           <a:p>
             <a:pPr algn="ctr">
               <a:lnSpc>
-                <a:spcPts val="997"/>
+                <a:spcPts val="1022"/>
               </a:lnSpc>
               <a:spcBef>
                 <a:spcPts val="0"/>
@@ -14470,8 +14507,8 @@
         </p:nvSpPr>
         <p:spPr>
           <a:xfrm>
-            <a:off x="4533443" y="1982922"/>
-            <a:ext cx="659514" cy="163266"/>
+            <a:off x="4533443" y="1986089"/>
+            <a:ext cx="659514" cy="166433"/>
           </a:xfrm>
           <a:prstGeom prst="rect">
             <a:avLst/>
@@ -14508,7 +14545,7 @@
           <a:p>
             <a:pPr algn="ctr">
               <a:lnSpc>
-                <a:spcPts val="997"/>
+                <a:spcPts val="1022"/>
               </a:lnSpc>
               <a:spcBef>
                 <a:spcPts val="0"/>
@@ -14537,8 +14574,8 @@
         </p:nvSpPr>
         <p:spPr>
           <a:xfrm>
-            <a:off x="5192957" y="1982922"/>
-            <a:ext cx="577075" cy="163266"/>
+            <a:off x="5192957" y="1986089"/>
+            <a:ext cx="577075" cy="166433"/>
           </a:xfrm>
           <a:prstGeom prst="rect">
             <a:avLst/>
@@ -14575,7 +14612,7 @@
           <a:p>
             <a:pPr algn="ctr">
               <a:lnSpc>
-                <a:spcPts val="997"/>
+                <a:spcPts val="1022"/>
               </a:lnSpc>
               <a:spcBef>
                 <a:spcPts val="0"/>
@@ -14604,8 +14641,8 @@
         </p:nvSpPr>
         <p:spPr>
           <a:xfrm>
-            <a:off x="5770032" y="1982922"/>
-            <a:ext cx="989271" cy="163266"/>
+            <a:off x="5770032" y="1986089"/>
+            <a:ext cx="989271" cy="166433"/>
           </a:xfrm>
           <a:prstGeom prst="rect">
             <a:avLst/>
@@ -14642,7 +14679,7 @@
           <a:p>
             <a:pPr algn="ctr">
               <a:lnSpc>
-                <a:spcPts val="997"/>
+                <a:spcPts val="1022"/>
               </a:lnSpc>
               <a:spcBef>
                 <a:spcPts val="0"/>
@@ -14689,8 +14726,8 @@
         </p:nvSpPr>
         <p:spPr>
           <a:xfrm>
-            <a:off x="6759303" y="1982922"/>
-            <a:ext cx="989271" cy="163266"/>
+            <a:off x="6759303" y="1986089"/>
+            <a:ext cx="989271" cy="166433"/>
           </a:xfrm>
           <a:prstGeom prst="rect">
             <a:avLst/>
@@ -14727,7 +14764,7 @@
           <a:p>
             <a:pPr algn="ctr">
               <a:lnSpc>
-                <a:spcPts val="997"/>
+                <a:spcPts val="1022"/>
               </a:lnSpc>
               <a:spcBef>
                 <a:spcPts val="0"/>
@@ -14774,8 +14811,8 @@
         </p:nvSpPr>
         <p:spPr>
           <a:xfrm>
-            <a:off x="7748574" y="1982922"/>
-            <a:ext cx="906832" cy="163266"/>
+            <a:off x="7748574" y="1986089"/>
+            <a:ext cx="906832" cy="166433"/>
           </a:xfrm>
           <a:prstGeom prst="rect">
             <a:avLst/>
@@ -14812,7 +14849,7 @@
           <a:p>
             <a:pPr algn="ctr">
               <a:lnSpc>
-                <a:spcPts val="997"/>
+                <a:spcPts val="1022"/>
               </a:lnSpc>
               <a:spcBef>
                 <a:spcPts val="0"/>
@@ -14859,8 +14896,8 @@
         </p:nvSpPr>
         <p:spPr>
           <a:xfrm>
-            <a:off x="411480" y="2146188"/>
-            <a:ext cx="1319028" cy="761730"/>
+            <a:off x="411480" y="2152522"/>
+            <a:ext cx="1319028" cy="776934"/>
           </a:xfrm>
           <a:prstGeom prst="rect">
             <a:avLst/>
@@ -14897,7 +14934,7 @@
           <a:p>
             <a:pPr algn="l">
               <a:lnSpc>
-                <a:spcPts val="997"/>
+                <a:spcPts val="1022"/>
               </a:lnSpc>
               <a:spcBef>
                 <a:spcPts val="0"/>
@@ -14935,8 +14972,8 @@
         </p:nvSpPr>
         <p:spPr>
           <a:xfrm>
-            <a:off x="1730508" y="2146188"/>
-            <a:ext cx="2802935" cy="253910"/>
+            <a:off x="1730508" y="2152522"/>
+            <a:ext cx="2802935" cy="258978"/>
           </a:xfrm>
           <a:prstGeom prst="rect">
             <a:avLst/>
@@ -14973,7 +15010,7 @@
           <a:p>
             <a:pPr algn="l">
               <a:lnSpc>
-                <a:spcPts val="997"/>
+                <a:spcPts val="1022"/>
               </a:lnSpc>
               <a:spcBef>
                 <a:spcPts val="0"/>
@@ -15029,8 +15066,8 @@
         </p:nvSpPr>
         <p:spPr>
           <a:xfrm>
-            <a:off x="4533443" y="2146188"/>
-            <a:ext cx="659514" cy="253910"/>
+            <a:off x="4533443" y="2152522"/>
+            <a:ext cx="659514" cy="258978"/>
           </a:xfrm>
           <a:prstGeom prst="rect">
             <a:avLst/>
@@ -15075,8 +15112,8 @@
         </p:nvSpPr>
         <p:spPr>
           <a:xfrm>
-            <a:off x="4769135" y="2205226"/>
-            <a:ext cx="188130" cy="135834"/>
+            <a:off x="4769135" y="2212510"/>
+            <a:ext cx="188130" cy="139001"/>
           </a:xfrm>
           <a:prstGeom prst="roundRect">
             <a:avLst>
@@ -15139,8 +15176,8 @@
         </p:nvSpPr>
         <p:spPr>
           <a:xfrm>
-            <a:off x="5192957" y="2146188"/>
-            <a:ext cx="577075" cy="253910"/>
+            <a:off x="5192957" y="2152522"/>
+            <a:ext cx="577075" cy="258978"/>
           </a:xfrm>
           <a:prstGeom prst="rect">
             <a:avLst/>
@@ -15177,7 +15214,7 @@
           <a:p>
             <a:pPr algn="r">
               <a:lnSpc>
-                <a:spcPts val="997"/>
+                <a:spcPts val="1022"/>
               </a:lnSpc>
               <a:spcBef>
                 <a:spcPts val="0"/>
@@ -15206,8 +15243,8 @@
         </p:nvSpPr>
         <p:spPr>
           <a:xfrm>
-            <a:off x="5770032" y="2146188"/>
-            <a:ext cx="989271" cy="253910"/>
+            <a:off x="5770032" y="2152522"/>
+            <a:ext cx="989271" cy="258978"/>
           </a:xfrm>
           <a:prstGeom prst="rect">
             <a:avLst/>
@@ -15244,7 +15281,7 @@
           <a:p>
             <a:pPr algn="ctr">
               <a:lnSpc>
-                <a:spcPts val="997"/>
+                <a:spcPts val="1022"/>
               </a:lnSpc>
               <a:spcBef>
                 <a:spcPts val="0"/>
@@ -15273,8 +15310,8 @@
         </p:nvSpPr>
         <p:spPr>
           <a:xfrm>
-            <a:off x="6759303" y="2146188"/>
-            <a:ext cx="989271" cy="253910"/>
+            <a:off x="6759303" y="2152522"/>
+            <a:ext cx="989271" cy="258978"/>
           </a:xfrm>
           <a:prstGeom prst="rect">
             <a:avLst/>
@@ -15311,7 +15348,7 @@
           <a:p>
             <a:pPr algn="ctr">
               <a:lnSpc>
-                <a:spcPts val="997"/>
+                <a:spcPts val="1022"/>
               </a:lnSpc>
               <a:spcBef>
                 <a:spcPts val="0"/>
@@ -15340,8 +15377,8 @@
         </p:nvSpPr>
         <p:spPr>
           <a:xfrm>
-            <a:off x="7748574" y="2146188"/>
-            <a:ext cx="906832" cy="253910"/>
+            <a:off x="7748574" y="2152522"/>
+            <a:ext cx="906832" cy="258978"/>
           </a:xfrm>
           <a:prstGeom prst="rect">
             <a:avLst/>
@@ -15378,7 +15415,7 @@
           <a:p>
             <a:pPr algn="ctr">
               <a:lnSpc>
-                <a:spcPts val="997"/>
+                <a:spcPts val="1022"/>
               </a:lnSpc>
               <a:spcBef>
                 <a:spcPts val="0"/>
@@ -15407,8 +15444,8 @@
         </p:nvSpPr>
         <p:spPr>
           <a:xfrm>
-            <a:off x="1730508" y="2400098"/>
-            <a:ext cx="2802935" cy="253910"/>
+            <a:off x="1730508" y="2411500"/>
+            <a:ext cx="2802935" cy="258978"/>
           </a:xfrm>
           <a:prstGeom prst="rect">
             <a:avLst/>
@@ -15445,7 +15482,7 @@
           <a:p>
             <a:pPr algn="l">
               <a:lnSpc>
-                <a:spcPts val="997"/>
+                <a:spcPts val="1022"/>
               </a:lnSpc>
               <a:spcBef>
                 <a:spcPts val="0"/>
@@ -15474,8 +15511,8 @@
         </p:nvSpPr>
         <p:spPr>
           <a:xfrm>
-            <a:off x="4533443" y="2400098"/>
-            <a:ext cx="659514" cy="253910"/>
+            <a:off x="4533443" y="2411500"/>
+            <a:ext cx="659514" cy="258978"/>
           </a:xfrm>
           <a:prstGeom prst="rect">
             <a:avLst/>
@@ -15520,8 +15557,8 @@
         </p:nvSpPr>
         <p:spPr>
           <a:xfrm>
-            <a:off x="4769135" y="2459136"/>
-            <a:ext cx="188130" cy="135834"/>
+            <a:off x="4769135" y="2471488"/>
+            <a:ext cx="188130" cy="139001"/>
           </a:xfrm>
           <a:prstGeom prst="roundRect">
             <a:avLst>
@@ -15584,8 +15621,8 @@
         </p:nvSpPr>
         <p:spPr>
           <a:xfrm>
-            <a:off x="5192957" y="2400098"/>
-            <a:ext cx="577075" cy="253910"/>
+            <a:off x="5192957" y="2411500"/>
+            <a:ext cx="577075" cy="258978"/>
           </a:xfrm>
           <a:prstGeom prst="rect">
             <a:avLst/>
@@ -15622,7 +15659,7 @@
           <a:p>
             <a:pPr algn="r">
               <a:lnSpc>
-                <a:spcPts val="997"/>
+                <a:spcPts val="1022"/>
               </a:lnSpc>
               <a:spcBef>
                 <a:spcPts val="0"/>
@@ -15651,8 +15688,8 @@
         </p:nvSpPr>
         <p:spPr>
           <a:xfrm>
-            <a:off x="5770032" y="2400098"/>
-            <a:ext cx="989271" cy="253910"/>
+            <a:off x="5770032" y="2411500"/>
+            <a:ext cx="989271" cy="258978"/>
           </a:xfrm>
           <a:prstGeom prst="rect">
             <a:avLst/>
@@ -15689,7 +15726,7 @@
           <a:p>
             <a:pPr algn="ctr">
               <a:lnSpc>
-                <a:spcPts val="997"/>
+                <a:spcPts val="1022"/>
               </a:lnSpc>
               <a:spcBef>
                 <a:spcPts val="0"/>
@@ -15718,8 +15755,8 @@
         </p:nvSpPr>
         <p:spPr>
           <a:xfrm>
-            <a:off x="6759303" y="2400098"/>
-            <a:ext cx="989271" cy="253910"/>
+            <a:off x="6759303" y="2411500"/>
+            <a:ext cx="989271" cy="258978"/>
           </a:xfrm>
           <a:prstGeom prst="rect">
             <a:avLst/>
@@ -15756,7 +15793,7 @@
           <a:p>
             <a:pPr algn="ctr">
               <a:lnSpc>
-                <a:spcPts val="997"/>
+                <a:spcPts val="1022"/>
               </a:lnSpc>
               <a:spcBef>
                 <a:spcPts val="0"/>
@@ -15785,8 +15822,8 @@
         </p:nvSpPr>
         <p:spPr>
           <a:xfrm>
-            <a:off x="7748574" y="2400098"/>
-            <a:ext cx="906832" cy="253910"/>
+            <a:off x="7748574" y="2411500"/>
+            <a:ext cx="906832" cy="258978"/>
           </a:xfrm>
           <a:prstGeom prst="rect">
             <a:avLst/>
@@ -15823,7 +15860,7 @@
           <a:p>
             <a:pPr algn="ctr">
               <a:lnSpc>
-                <a:spcPts val="997"/>
+                <a:spcPts val="1022"/>
               </a:lnSpc>
               <a:spcBef>
                 <a:spcPts val="0"/>
@@ -15852,8 +15889,8 @@
         </p:nvSpPr>
         <p:spPr>
           <a:xfrm>
-            <a:off x="1730508" y="2654008"/>
-            <a:ext cx="2802935" cy="253910"/>
+            <a:off x="1730508" y="2670478"/>
+            <a:ext cx="2802935" cy="258978"/>
           </a:xfrm>
           <a:prstGeom prst="rect">
             <a:avLst/>
@@ -15890,7 +15927,7 @@
           <a:p>
             <a:pPr algn="l">
               <a:lnSpc>
-                <a:spcPts val="997"/>
+                <a:spcPts val="1022"/>
               </a:lnSpc>
               <a:spcBef>
                 <a:spcPts val="0"/>
@@ -15955,8 +15992,8 @@
         </p:nvSpPr>
         <p:spPr>
           <a:xfrm>
-            <a:off x="4533443" y="2654008"/>
-            <a:ext cx="659514" cy="253910"/>
+            <a:off x="4533443" y="2670478"/>
+            <a:ext cx="659514" cy="258978"/>
           </a:xfrm>
           <a:prstGeom prst="rect">
             <a:avLst/>
@@ -16001,8 +16038,8 @@
         </p:nvSpPr>
         <p:spPr>
           <a:xfrm>
-            <a:off x="4769135" y="2713046"/>
-            <a:ext cx="188130" cy="135834"/>
+            <a:off x="4769135" y="2730466"/>
+            <a:ext cx="188130" cy="139001"/>
           </a:xfrm>
           <a:prstGeom prst="roundRect">
             <a:avLst>
@@ -16065,8 +16102,8 @@
         </p:nvSpPr>
         <p:spPr>
           <a:xfrm>
-            <a:off x="5192957" y="2654008"/>
-            <a:ext cx="577075" cy="253910"/>
+            <a:off x="5192957" y="2670478"/>
+            <a:ext cx="577075" cy="258978"/>
           </a:xfrm>
           <a:prstGeom prst="rect">
             <a:avLst/>
@@ -16103,7 +16140,7 @@
           <a:p>
             <a:pPr algn="r">
               <a:lnSpc>
-                <a:spcPts val="997"/>
+                <a:spcPts val="1022"/>
               </a:lnSpc>
               <a:spcBef>
                 <a:spcPts val="0"/>
@@ -16132,8 +16169,8 @@
         </p:nvSpPr>
         <p:spPr>
           <a:xfrm>
-            <a:off x="5770032" y="2654008"/>
-            <a:ext cx="989271" cy="253910"/>
+            <a:off x="5770032" y="2670478"/>
+            <a:ext cx="989271" cy="258978"/>
           </a:xfrm>
           <a:prstGeom prst="rect">
             <a:avLst/>
@@ -16178,8 +16215,8 @@
         </p:nvSpPr>
         <p:spPr>
           <a:xfrm>
-            <a:off x="6759303" y="2654008"/>
-            <a:ext cx="989271" cy="253910"/>
+            <a:off x="6759303" y="2670478"/>
+            <a:ext cx="989271" cy="258978"/>
           </a:xfrm>
           <a:prstGeom prst="rect">
             <a:avLst/>
@@ -16224,8 +16261,8 @@
         </p:nvSpPr>
         <p:spPr>
           <a:xfrm>
-            <a:off x="7748574" y="2654008"/>
-            <a:ext cx="906832" cy="253910"/>
+            <a:off x="7748574" y="2670478"/>
+            <a:ext cx="906832" cy="258978"/>
           </a:xfrm>
           <a:prstGeom prst="rect">
             <a:avLst/>
@@ -16270,8 +16307,8 @@
         </p:nvSpPr>
         <p:spPr>
           <a:xfrm>
-            <a:off x="411480" y="2907918"/>
-            <a:ext cx="1319028" cy="761730"/>
+            <a:off x="411480" y="2929456"/>
+            <a:ext cx="1319028" cy="776934"/>
           </a:xfrm>
           <a:prstGeom prst="rect">
             <a:avLst/>
@@ -16308,7 +16345,7 @@
           <a:p>
             <a:pPr algn="l">
               <a:lnSpc>
-                <a:spcPts val="997"/>
+                <a:spcPts val="1022"/>
               </a:lnSpc>
               <a:spcBef>
                 <a:spcPts val="0"/>
@@ -16346,8 +16383,8 @@
         </p:nvSpPr>
         <p:spPr>
           <a:xfrm>
-            <a:off x="1730508" y="2907918"/>
-            <a:ext cx="2802935" cy="253910"/>
+            <a:off x="1730508" y="2929456"/>
+            <a:ext cx="2802935" cy="258978"/>
           </a:xfrm>
           <a:prstGeom prst="rect">
             <a:avLst/>
@@ -16384,7 +16421,7 @@
           <a:p>
             <a:pPr algn="l">
               <a:lnSpc>
-                <a:spcPts val="997"/>
+                <a:spcPts val="1022"/>
               </a:lnSpc>
               <a:spcBef>
                 <a:spcPts val="0"/>
@@ -16449,8 +16486,8 @@
         </p:nvSpPr>
         <p:spPr>
           <a:xfrm>
-            <a:off x="4533443" y="2907918"/>
-            <a:ext cx="659514" cy="253910"/>
+            <a:off x="4533443" y="2929456"/>
+            <a:ext cx="659514" cy="258978"/>
           </a:xfrm>
           <a:prstGeom prst="rect">
             <a:avLst/>
@@ -16495,8 +16532,8 @@
         </p:nvSpPr>
         <p:spPr>
           <a:xfrm>
-            <a:off x="4769135" y="2966956"/>
-            <a:ext cx="188130" cy="135834"/>
+            <a:off x="4769135" y="2989444"/>
+            <a:ext cx="188130" cy="139001"/>
           </a:xfrm>
           <a:prstGeom prst="roundRect">
             <a:avLst>
@@ -16559,8 +16596,8 @@
         </p:nvSpPr>
         <p:spPr>
           <a:xfrm>
-            <a:off x="5192957" y="2907918"/>
-            <a:ext cx="577075" cy="253910"/>
+            <a:off x="5192957" y="2929456"/>
+            <a:ext cx="577075" cy="258978"/>
           </a:xfrm>
           <a:prstGeom prst="rect">
             <a:avLst/>
@@ -16597,7 +16634,7 @@
           <a:p>
             <a:pPr algn="r">
               <a:lnSpc>
-                <a:spcPts val="997"/>
+                <a:spcPts val="1022"/>
               </a:lnSpc>
               <a:spcBef>
                 <a:spcPts val="0"/>
@@ -16626,8 +16663,8 @@
         </p:nvSpPr>
         <p:spPr>
           <a:xfrm>
-            <a:off x="5770032" y="2907918"/>
-            <a:ext cx="989271" cy="253910"/>
+            <a:off x="5770032" y="2929456"/>
+            <a:ext cx="989271" cy="258978"/>
           </a:xfrm>
           <a:prstGeom prst="rect">
             <a:avLst/>
@@ -16664,7 +16701,7 @@
           <a:p>
             <a:pPr algn="ctr">
               <a:lnSpc>
-                <a:spcPts val="997"/>
+                <a:spcPts val="1022"/>
               </a:lnSpc>
               <a:spcBef>
                 <a:spcPts val="0"/>
@@ -16693,8 +16730,8 @@
         </p:nvSpPr>
         <p:spPr>
           <a:xfrm>
-            <a:off x="6759303" y="2907918"/>
-            <a:ext cx="989271" cy="253910"/>
+            <a:off x="6759303" y="2929456"/>
+            <a:ext cx="989271" cy="258978"/>
           </a:xfrm>
           <a:prstGeom prst="rect">
             <a:avLst/>
@@ -16731,7 +16768,7 @@
           <a:p>
             <a:pPr algn="ctr">
               <a:lnSpc>
-                <a:spcPts val="997"/>
+                <a:spcPts val="1022"/>
               </a:lnSpc>
               <a:spcBef>
                 <a:spcPts val="0"/>
@@ -16760,8 +16797,8 @@
         </p:nvSpPr>
         <p:spPr>
           <a:xfrm>
-            <a:off x="7748574" y="2907918"/>
-            <a:ext cx="906832" cy="253910"/>
+            <a:off x="7748574" y="2929456"/>
+            <a:ext cx="906832" cy="258978"/>
           </a:xfrm>
           <a:prstGeom prst="rect">
             <a:avLst/>
@@ -16798,7 +16835,7 @@
           <a:p>
             <a:pPr algn="ctr">
               <a:lnSpc>
-                <a:spcPts val="997"/>
+                <a:spcPts val="1022"/>
               </a:lnSpc>
               <a:spcBef>
                 <a:spcPts val="0"/>
@@ -16827,8 +16864,8 @@
         </p:nvSpPr>
         <p:spPr>
           <a:xfrm>
-            <a:off x="1730508" y="3161828"/>
-            <a:ext cx="2802935" cy="253910"/>
+            <a:off x="1730508" y="3188434"/>
+            <a:ext cx="2802935" cy="258978"/>
           </a:xfrm>
           <a:prstGeom prst="rect">
             <a:avLst/>
@@ -16865,7 +16902,7 @@
           <a:p>
             <a:pPr algn="l">
               <a:lnSpc>
-                <a:spcPts val="997"/>
+                <a:spcPts val="1022"/>
               </a:lnSpc>
               <a:spcBef>
                 <a:spcPts val="0"/>
@@ -16948,8 +16985,8 @@
         </p:nvSpPr>
         <p:spPr>
           <a:xfrm>
-            <a:off x="4533443" y="3161828"/>
-            <a:ext cx="659514" cy="253910"/>
+            <a:off x="4533443" y="3188434"/>
+            <a:ext cx="659514" cy="258978"/>
           </a:xfrm>
           <a:prstGeom prst="rect">
             <a:avLst/>
@@ -16994,8 +17031,8 @@
         </p:nvSpPr>
         <p:spPr>
           <a:xfrm>
-            <a:off x="4769135" y="3220866"/>
-            <a:ext cx="188130" cy="135834"/>
+            <a:off x="4769135" y="3248422"/>
+            <a:ext cx="188130" cy="139001"/>
           </a:xfrm>
           <a:prstGeom prst="roundRect">
             <a:avLst>
@@ -17058,8 +17095,8 @@
         </p:nvSpPr>
         <p:spPr>
           <a:xfrm>
-            <a:off x="5192957" y="3161828"/>
-            <a:ext cx="577075" cy="253910"/>
+            <a:off x="5192957" y="3188434"/>
+            <a:ext cx="577075" cy="258978"/>
           </a:xfrm>
           <a:prstGeom prst="rect">
             <a:avLst/>
@@ -17096,7 +17133,7 @@
           <a:p>
             <a:pPr algn="r">
               <a:lnSpc>
-                <a:spcPts val="997"/>
+                <a:spcPts val="1022"/>
               </a:lnSpc>
               <a:spcBef>
                 <a:spcPts val="0"/>
@@ -17125,8 +17162,8 @@
         </p:nvSpPr>
         <p:spPr>
           <a:xfrm>
-            <a:off x="5770032" y="3161828"/>
-            <a:ext cx="989271" cy="253910"/>
+            <a:off x="5770032" y="3188434"/>
+            <a:ext cx="989271" cy="258978"/>
           </a:xfrm>
           <a:prstGeom prst="rect">
             <a:avLst/>
@@ -17163,7 +17200,7 @@
           <a:p>
             <a:pPr algn="ctr">
               <a:lnSpc>
-                <a:spcPts val="997"/>
+                <a:spcPts val="1022"/>
               </a:lnSpc>
               <a:spcBef>
                 <a:spcPts val="0"/>
@@ -17192,8 +17229,8 @@
         </p:nvSpPr>
         <p:spPr>
           <a:xfrm>
-            <a:off x="6759303" y="3161828"/>
-            <a:ext cx="989271" cy="253910"/>
+            <a:off x="6759303" y="3188434"/>
+            <a:ext cx="989271" cy="258978"/>
           </a:xfrm>
           <a:prstGeom prst="rect">
             <a:avLst/>
@@ -17230,7 +17267,7 @@
           <a:p>
             <a:pPr algn="ctr">
               <a:lnSpc>
-                <a:spcPts val="997"/>
+                <a:spcPts val="1022"/>
               </a:lnSpc>
               <a:spcBef>
                 <a:spcPts val="0"/>
@@ -17259,8 +17296,8 @@
         </p:nvSpPr>
         <p:spPr>
           <a:xfrm>
-            <a:off x="7748574" y="3161828"/>
-            <a:ext cx="906832" cy="253910"/>
+            <a:off x="7748574" y="3188434"/>
+            <a:ext cx="906832" cy="258978"/>
           </a:xfrm>
           <a:prstGeom prst="rect">
             <a:avLst/>
@@ -17297,7 +17334,7 @@
           <a:p>
             <a:pPr algn="ctr">
               <a:lnSpc>
-                <a:spcPts val="997"/>
+                <a:spcPts val="1022"/>
               </a:lnSpc>
               <a:spcBef>
                 <a:spcPts val="0"/>
@@ -17326,8 +17363,8 @@
         </p:nvSpPr>
         <p:spPr>
           <a:xfrm>
-            <a:off x="1730508" y="3415738"/>
-            <a:ext cx="2802935" cy="253910"/>
+            <a:off x="1730508" y="3447412"/>
+            <a:ext cx="2802935" cy="258978"/>
           </a:xfrm>
           <a:prstGeom prst="rect">
             <a:avLst/>
@@ -17364,7 +17401,7 @@
           <a:p>
             <a:pPr algn="l">
               <a:lnSpc>
-                <a:spcPts val="997"/>
+                <a:spcPts val="1022"/>
               </a:lnSpc>
               <a:spcBef>
                 <a:spcPts val="0"/>
@@ -17447,8 +17484,8 @@
         </p:nvSpPr>
         <p:spPr>
           <a:xfrm>
-            <a:off x="4533443" y="3415738"/>
-            <a:ext cx="659514" cy="253910"/>
+            <a:off x="4533443" y="3447412"/>
+            <a:ext cx="659514" cy="258978"/>
           </a:xfrm>
           <a:prstGeom prst="rect">
             <a:avLst/>
@@ -17493,8 +17530,8 @@
         </p:nvSpPr>
         <p:spPr>
           <a:xfrm>
-            <a:off x="4769135" y="3474776"/>
-            <a:ext cx="188130" cy="135834"/>
+            <a:off x="4769135" y="3507400"/>
+            <a:ext cx="188130" cy="139001"/>
           </a:xfrm>
           <a:prstGeom prst="roundRect">
             <a:avLst>
@@ -17557,8 +17594,8 @@
         </p:nvSpPr>
         <p:spPr>
           <a:xfrm>
-            <a:off x="5192957" y="3415738"/>
-            <a:ext cx="577075" cy="253910"/>
+            <a:off x="5192957" y="3447412"/>
+            <a:ext cx="577075" cy="258978"/>
           </a:xfrm>
           <a:prstGeom prst="rect">
             <a:avLst/>
@@ -17595,7 +17632,7 @@
           <a:p>
             <a:pPr algn="r">
               <a:lnSpc>
-                <a:spcPts val="997"/>
+                <a:spcPts val="1022"/>
               </a:lnSpc>
               <a:spcBef>
                 <a:spcPts val="0"/>
@@ -17624,8 +17661,8 @@
         </p:nvSpPr>
         <p:spPr>
           <a:xfrm>
-            <a:off x="5770032" y="3415738"/>
-            <a:ext cx="989271" cy="253910"/>
+            <a:off x="5770032" y="3447412"/>
+            <a:ext cx="989271" cy="258978"/>
           </a:xfrm>
           <a:prstGeom prst="rect">
             <a:avLst/>
@@ -17662,7 +17699,7 @@
           <a:p>
             <a:pPr algn="ctr">
               <a:lnSpc>
-                <a:spcPts val="997"/>
+                <a:spcPts val="1022"/>
               </a:lnSpc>
               <a:spcBef>
                 <a:spcPts val="0"/>
@@ -17691,8 +17728,8 @@
         </p:nvSpPr>
         <p:spPr>
           <a:xfrm>
-            <a:off x="6759303" y="3415738"/>
-            <a:ext cx="989271" cy="253910"/>
+            <a:off x="6759303" y="3447412"/>
+            <a:ext cx="989271" cy="258978"/>
           </a:xfrm>
           <a:prstGeom prst="rect">
             <a:avLst/>
@@ -17729,7 +17766,7 @@
           <a:p>
             <a:pPr algn="ctr">
               <a:lnSpc>
-                <a:spcPts val="997"/>
+                <a:spcPts val="1022"/>
               </a:lnSpc>
               <a:spcBef>
                 <a:spcPts val="0"/>
@@ -17758,8 +17795,8 @@
         </p:nvSpPr>
         <p:spPr>
           <a:xfrm>
-            <a:off x="7748574" y="3415738"/>
-            <a:ext cx="906832" cy="253910"/>
+            <a:off x="7748574" y="3447412"/>
+            <a:ext cx="906832" cy="258978"/>
           </a:xfrm>
           <a:prstGeom prst="rect">
             <a:avLst/>
@@ -17796,7 +17833,7 @@
           <a:p>
             <a:pPr algn="ctr">
               <a:lnSpc>
-                <a:spcPts val="997"/>
+                <a:spcPts val="1022"/>
               </a:lnSpc>
               <a:spcBef>
                 <a:spcPts val="0"/>
@@ -17825,8 +17862,8 @@
         </p:nvSpPr>
         <p:spPr>
           <a:xfrm>
-            <a:off x="411480" y="3669648"/>
-            <a:ext cx="1319028" cy="761730"/>
+            <a:off x="411480" y="3706390"/>
+            <a:ext cx="1319028" cy="776934"/>
           </a:xfrm>
           <a:prstGeom prst="rect">
             <a:avLst/>
@@ -17863,7 +17900,7 @@
           <a:p>
             <a:pPr algn="l">
               <a:lnSpc>
-                <a:spcPts val="997"/>
+                <a:spcPts val="1022"/>
               </a:lnSpc>
               <a:spcBef>
                 <a:spcPts val="0"/>
@@ -17910,8 +17947,8 @@
         </p:nvSpPr>
         <p:spPr>
           <a:xfrm>
-            <a:off x="1730508" y="3669648"/>
-            <a:ext cx="2802935" cy="253910"/>
+            <a:off x="1730508" y="3706390"/>
+            <a:ext cx="2802935" cy="258978"/>
           </a:xfrm>
           <a:prstGeom prst="rect">
             <a:avLst/>
@@ -17948,7 +17985,7 @@
           <a:p>
             <a:pPr algn="l">
               <a:lnSpc>
-                <a:spcPts val="997"/>
+                <a:spcPts val="1022"/>
               </a:lnSpc>
               <a:spcBef>
                 <a:spcPts val="0"/>
@@ -17986,8 +18023,8 @@
         </p:nvSpPr>
         <p:spPr>
           <a:xfrm>
-            <a:off x="4533443" y="3669648"/>
-            <a:ext cx="659514" cy="253910"/>
+            <a:off x="4533443" y="3706390"/>
+            <a:ext cx="659514" cy="258978"/>
           </a:xfrm>
           <a:prstGeom prst="rect">
             <a:avLst/>
@@ -18032,8 +18069,8 @@
         </p:nvSpPr>
         <p:spPr>
           <a:xfrm>
-            <a:off x="4745043" y="3728686"/>
-            <a:ext cx="236313" cy="135834"/>
+            <a:off x="4745043" y="3766378"/>
+            <a:ext cx="236313" cy="139001"/>
           </a:xfrm>
           <a:prstGeom prst="roundRect">
             <a:avLst>
@@ -18096,8 +18133,8 @@
         </p:nvSpPr>
         <p:spPr>
           <a:xfrm>
-            <a:off x="5192957" y="3669648"/>
-            <a:ext cx="577075" cy="253910"/>
+            <a:off x="5192957" y="3706390"/>
+            <a:ext cx="577075" cy="258978"/>
           </a:xfrm>
           <a:prstGeom prst="rect">
             <a:avLst/>
@@ -18134,7 +18171,7 @@
           <a:p>
             <a:pPr algn="r">
               <a:lnSpc>
-                <a:spcPts val="997"/>
+                <a:spcPts val="1022"/>
               </a:lnSpc>
               <a:spcBef>
                 <a:spcPts val="0"/>
@@ -18163,8 +18200,8 @@
         </p:nvSpPr>
         <p:spPr>
           <a:xfrm>
-            <a:off x="5770032" y="3669648"/>
-            <a:ext cx="989271" cy="253910"/>
+            <a:off x="5770032" y="3706390"/>
+            <a:ext cx="989271" cy="258978"/>
           </a:xfrm>
           <a:prstGeom prst="rect">
             <a:avLst/>
@@ -18201,7 +18238,7 @@
           <a:p>
             <a:pPr algn="ctr">
               <a:lnSpc>
-                <a:spcPts val="997"/>
+                <a:spcPts val="1022"/>
               </a:lnSpc>
               <a:spcBef>
                 <a:spcPts val="0"/>
@@ -18230,8 +18267,8 @@
         </p:nvSpPr>
         <p:spPr>
           <a:xfrm>
-            <a:off x="6759303" y="3669648"/>
-            <a:ext cx="989271" cy="253910"/>
+            <a:off x="6759303" y="3706390"/>
+            <a:ext cx="989271" cy="258978"/>
           </a:xfrm>
           <a:prstGeom prst="rect">
             <a:avLst/>
@@ -18268,7 +18305,7 @@
           <a:p>
             <a:pPr algn="ctr">
               <a:lnSpc>
-                <a:spcPts val="997"/>
+                <a:spcPts val="1022"/>
               </a:lnSpc>
               <a:spcBef>
                 <a:spcPts val="0"/>
@@ -18297,8 +18334,8 @@
         </p:nvSpPr>
         <p:spPr>
           <a:xfrm>
-            <a:off x="7748574" y="3669648"/>
-            <a:ext cx="906832" cy="253910"/>
+            <a:off x="7748574" y="3706390"/>
+            <a:ext cx="906832" cy="258978"/>
           </a:xfrm>
           <a:prstGeom prst="rect">
             <a:avLst/>
@@ -18335,7 +18372,7 @@
           <a:p>
             <a:pPr algn="ctr">
               <a:lnSpc>
-                <a:spcPts val="997"/>
+                <a:spcPts val="1022"/>
               </a:lnSpc>
               <a:spcBef>
                 <a:spcPts val="0"/>
@@ -18364,8 +18401,8 @@
         </p:nvSpPr>
         <p:spPr>
           <a:xfrm>
-            <a:off x="1730508" y="3923558"/>
-            <a:ext cx="2802935" cy="253910"/>
+            <a:off x="1730508" y="3965368"/>
+            <a:ext cx="2802935" cy="258978"/>
           </a:xfrm>
           <a:prstGeom prst="rect">
             <a:avLst/>
@@ -18402,7 +18439,7 @@
           <a:p>
             <a:pPr algn="l">
               <a:lnSpc>
-                <a:spcPts val="997"/>
+                <a:spcPts val="1022"/>
               </a:lnSpc>
               <a:spcBef>
                 <a:spcPts val="0"/>
@@ -18440,8 +18477,8 @@
         </p:nvSpPr>
         <p:spPr>
           <a:xfrm>
-            <a:off x="4533443" y="3923558"/>
-            <a:ext cx="659514" cy="253910"/>
+            <a:off x="4533443" y="3965368"/>
+            <a:ext cx="659514" cy="258978"/>
           </a:xfrm>
           <a:prstGeom prst="rect">
             <a:avLst/>
@@ -18486,8 +18523,8 @@
         </p:nvSpPr>
         <p:spPr>
           <a:xfrm>
-            <a:off x="4743881" y="3982596"/>
-            <a:ext cx="238638" cy="135834"/>
+            <a:off x="4743881" y="4025356"/>
+            <a:ext cx="238638" cy="139001"/>
           </a:xfrm>
           <a:prstGeom prst="roundRect">
             <a:avLst>
@@ -18550,8 +18587,8 @@
         </p:nvSpPr>
         <p:spPr>
           <a:xfrm>
-            <a:off x="5192957" y="3923558"/>
-            <a:ext cx="577075" cy="253910"/>
+            <a:off x="5192957" y="3965368"/>
+            <a:ext cx="577075" cy="258978"/>
           </a:xfrm>
           <a:prstGeom prst="rect">
             <a:avLst/>
@@ -18588,7 +18625,7 @@
           <a:p>
             <a:pPr algn="r">
               <a:lnSpc>
-                <a:spcPts val="997"/>
+                <a:spcPts val="1022"/>
               </a:lnSpc>
               <a:spcBef>
                 <a:spcPts val="0"/>
@@ -18617,8 +18654,8 @@
         </p:nvSpPr>
         <p:spPr>
           <a:xfrm>
-            <a:off x="5770032" y="3923558"/>
-            <a:ext cx="989271" cy="253910"/>
+            <a:off x="5770032" y="3965368"/>
+            <a:ext cx="989271" cy="258978"/>
           </a:xfrm>
           <a:prstGeom prst="rect">
             <a:avLst/>
@@ -18655,7 +18692,7 @@
           <a:p>
             <a:pPr algn="ctr">
               <a:lnSpc>
-                <a:spcPts val="997"/>
+                <a:spcPts val="1022"/>
               </a:lnSpc>
               <a:spcBef>
                 <a:spcPts val="0"/>
@@ -18684,8 +18721,8 @@
         </p:nvSpPr>
         <p:spPr>
           <a:xfrm>
-            <a:off x="6759303" y="3923558"/>
-            <a:ext cx="989271" cy="253910"/>
+            <a:off x="6759303" y="3965368"/>
+            <a:ext cx="989271" cy="258978"/>
           </a:xfrm>
           <a:prstGeom prst="rect">
             <a:avLst/>
@@ -18722,7 +18759,7 @@
           <a:p>
             <a:pPr algn="ctr">
               <a:lnSpc>
-                <a:spcPts val="997"/>
+                <a:spcPts val="1022"/>
               </a:lnSpc>
               <a:spcBef>
                 <a:spcPts val="0"/>
@@ -18751,8 +18788,8 @@
         </p:nvSpPr>
         <p:spPr>
           <a:xfrm>
-            <a:off x="7748574" y="3923558"/>
-            <a:ext cx="906832" cy="253910"/>
+            <a:off x="7748574" y="3965368"/>
+            <a:ext cx="906832" cy="258978"/>
           </a:xfrm>
           <a:prstGeom prst="rect">
             <a:avLst/>
@@ -18789,7 +18826,7 @@
           <a:p>
             <a:pPr algn="ctr">
               <a:lnSpc>
-                <a:spcPts val="997"/>
+                <a:spcPts val="1022"/>
               </a:lnSpc>
               <a:spcBef>
                 <a:spcPts val="0"/>
@@ -18818,8 +18855,8 @@
         </p:nvSpPr>
         <p:spPr>
           <a:xfrm>
-            <a:off x="1730508" y="4177468"/>
-            <a:ext cx="2802935" cy="253910"/>
+            <a:off x="1730508" y="4224346"/>
+            <a:ext cx="2802935" cy="258978"/>
           </a:xfrm>
           <a:prstGeom prst="rect">
             <a:avLst/>
@@ -18856,7 +18893,7 @@
           <a:p>
             <a:pPr algn="l">
               <a:lnSpc>
-                <a:spcPts val="997"/>
+                <a:spcPts val="1022"/>
               </a:lnSpc>
               <a:spcBef>
                 <a:spcPts val="0"/>
@@ -18912,8 +18949,8 @@
         </p:nvSpPr>
         <p:spPr>
           <a:xfrm>
-            <a:off x="4533443" y="4177468"/>
-            <a:ext cx="659514" cy="253910"/>
+            <a:off x="4533443" y="4224346"/>
+            <a:ext cx="659514" cy="258978"/>
           </a:xfrm>
           <a:prstGeom prst="rect">
             <a:avLst/>
@@ -18958,8 +18995,8 @@
         </p:nvSpPr>
         <p:spPr>
           <a:xfrm>
-            <a:off x="4743881" y="4236506"/>
-            <a:ext cx="238638" cy="135834"/>
+            <a:off x="4743881" y="4284334"/>
+            <a:ext cx="238638" cy="139001"/>
           </a:xfrm>
           <a:prstGeom prst="roundRect">
             <a:avLst>
@@ -19022,8 +19059,8 @@
         </p:nvSpPr>
         <p:spPr>
           <a:xfrm>
-            <a:off x="5192957" y="4177468"/>
-            <a:ext cx="577075" cy="253910"/>
+            <a:off x="5192957" y="4224346"/>
+            <a:ext cx="577075" cy="258978"/>
           </a:xfrm>
           <a:prstGeom prst="rect">
             <a:avLst/>
@@ -19060,7 +19097,7 @@
           <a:p>
             <a:pPr algn="r">
               <a:lnSpc>
-                <a:spcPts val="997"/>
+                <a:spcPts val="1022"/>
               </a:lnSpc>
               <a:spcBef>
                 <a:spcPts val="0"/>
@@ -19089,8 +19126,8 @@
         </p:nvSpPr>
         <p:spPr>
           <a:xfrm>
-            <a:off x="5770032" y="4177468"/>
-            <a:ext cx="989271" cy="253910"/>
+            <a:off x="5770032" y="4224346"/>
+            <a:ext cx="989271" cy="258978"/>
           </a:xfrm>
           <a:prstGeom prst="rect">
             <a:avLst/>
@@ -19127,7 +19164,7 @@
           <a:p>
             <a:pPr algn="ctr">
               <a:lnSpc>
-                <a:spcPts val="997"/>
+                <a:spcPts val="1022"/>
               </a:lnSpc>
               <a:spcBef>
                 <a:spcPts val="0"/>
@@ -19156,8 +19193,8 @@
         </p:nvSpPr>
         <p:spPr>
           <a:xfrm>
-            <a:off x="6759303" y="4177468"/>
-            <a:ext cx="989271" cy="253910"/>
+            <a:off x="6759303" y="4224346"/>
+            <a:ext cx="989271" cy="258978"/>
           </a:xfrm>
           <a:prstGeom prst="rect">
             <a:avLst/>
@@ -19194,7 +19231,7 @@
           <a:p>
             <a:pPr algn="ctr">
               <a:lnSpc>
-                <a:spcPts val="997"/>
+                <a:spcPts val="1022"/>
               </a:lnSpc>
               <a:spcBef>
                 <a:spcPts val="0"/>
@@ -19223,8 +19260,8 @@
         </p:nvSpPr>
         <p:spPr>
           <a:xfrm>
-            <a:off x="7748574" y="4177468"/>
-            <a:ext cx="906832" cy="253910"/>
+            <a:off x="7748574" y="4224346"/>
+            <a:ext cx="906832" cy="258978"/>
           </a:xfrm>
           <a:prstGeom prst="rect">
             <a:avLst/>
@@ -19261,7 +19298,7 @@
           <a:p>
             <a:pPr algn="ctr">
               <a:lnSpc>
-                <a:spcPts val="997"/>
+                <a:spcPts val="1022"/>
               </a:lnSpc>
               <a:spcBef>
                 <a:spcPts val="0"/>
@@ -19290,8 +19327,8 @@
         </p:nvSpPr>
         <p:spPr>
           <a:xfrm>
-            <a:off x="411480" y="4431378"/>
-            <a:ext cx="1319028" cy="761730"/>
+            <a:off x="411480" y="4483324"/>
+            <a:ext cx="1319028" cy="776934"/>
           </a:xfrm>
           <a:prstGeom prst="rect">
             <a:avLst/>
@@ -19328,7 +19365,7 @@
           <a:p>
             <a:pPr algn="l">
               <a:lnSpc>
-                <a:spcPts val="997"/>
+                <a:spcPts val="1022"/>
               </a:lnSpc>
               <a:spcBef>
                 <a:spcPts val="0"/>
@@ -19357,8 +19394,8 @@
         </p:nvSpPr>
         <p:spPr>
           <a:xfrm>
-            <a:off x="1730508" y="4431378"/>
-            <a:ext cx="2802935" cy="253910"/>
+            <a:off x="1730508" y="4483324"/>
+            <a:ext cx="2802935" cy="258978"/>
           </a:xfrm>
           <a:prstGeom prst="rect">
             <a:avLst/>
@@ -19395,7 +19432,7 @@
           <a:p>
             <a:pPr algn="l">
               <a:lnSpc>
-                <a:spcPts val="997"/>
+                <a:spcPts val="1022"/>
               </a:lnSpc>
               <a:spcBef>
                 <a:spcPts val="0"/>
@@ -19442,8 +19479,8 @@
         </p:nvSpPr>
         <p:spPr>
           <a:xfrm>
-            <a:off x="4533443" y="4431378"/>
-            <a:ext cx="659514" cy="253910"/>
+            <a:off x="4533443" y="4483324"/>
+            <a:ext cx="659514" cy="258978"/>
           </a:xfrm>
           <a:prstGeom prst="rect">
             <a:avLst/>
@@ -19488,8 +19525,8 @@
         </p:nvSpPr>
         <p:spPr>
           <a:xfrm>
-            <a:off x="4743881" y="4490416"/>
-            <a:ext cx="238638" cy="135834"/>
+            <a:off x="4743881" y="4543312"/>
+            <a:ext cx="238638" cy="139001"/>
           </a:xfrm>
           <a:prstGeom prst="roundRect">
             <a:avLst>
@@ -19552,8 +19589,8 @@
         </p:nvSpPr>
         <p:spPr>
           <a:xfrm>
-            <a:off x="5192957" y="4431378"/>
-            <a:ext cx="577075" cy="253910"/>
+            <a:off x="5192957" y="4483324"/>
+            <a:ext cx="577075" cy="258978"/>
           </a:xfrm>
           <a:prstGeom prst="rect">
             <a:avLst/>
@@ -19590,7 +19627,7 @@
           <a:p>
             <a:pPr algn="r">
               <a:lnSpc>
-                <a:spcPts val="997"/>
+                <a:spcPts val="1022"/>
               </a:lnSpc>
               <a:spcBef>
                 <a:spcPts val="0"/>
@@ -19619,8 +19656,8 @@
         </p:nvSpPr>
         <p:spPr>
           <a:xfrm>
-            <a:off x="5770032" y="4431378"/>
-            <a:ext cx="989271" cy="253910"/>
+            <a:off x="5770032" y="4483324"/>
+            <a:ext cx="989271" cy="258978"/>
           </a:xfrm>
           <a:prstGeom prst="rect">
             <a:avLst/>
@@ -19657,7 +19694,7 @@
           <a:p>
             <a:pPr algn="ctr">
               <a:lnSpc>
-                <a:spcPts val="997"/>
+                <a:spcPts val="1022"/>
               </a:lnSpc>
               <a:spcBef>
                 <a:spcPts val="0"/>
@@ -19686,8 +19723,8 @@
         </p:nvSpPr>
         <p:spPr>
           <a:xfrm>
-            <a:off x="6759303" y="4431378"/>
-            <a:ext cx="989271" cy="253910"/>
+            <a:off x="6759303" y="4483324"/>
+            <a:ext cx="989271" cy="258978"/>
           </a:xfrm>
           <a:prstGeom prst="rect">
             <a:avLst/>
@@ -19724,7 +19761,7 @@
           <a:p>
             <a:pPr algn="ctr">
               <a:lnSpc>
-                <a:spcPts val="997"/>
+                <a:spcPts val="1022"/>
               </a:lnSpc>
               <a:spcBef>
                 <a:spcPts val="0"/>
@@ -19753,8 +19790,8 @@
         </p:nvSpPr>
         <p:spPr>
           <a:xfrm>
-            <a:off x="7748574" y="4431378"/>
-            <a:ext cx="906832" cy="253910"/>
+            <a:off x="7748574" y="4483324"/>
+            <a:ext cx="906832" cy="258978"/>
           </a:xfrm>
           <a:prstGeom prst="rect">
             <a:avLst/>
@@ -19791,7 +19828,7 @@
           <a:p>
             <a:pPr algn="ctr">
               <a:lnSpc>
-                <a:spcPts val="997"/>
+                <a:spcPts val="1022"/>
               </a:lnSpc>
               <a:spcBef>
                 <a:spcPts val="0"/>
@@ -19820,8 +19857,8 @@
         </p:nvSpPr>
         <p:spPr>
           <a:xfrm>
-            <a:off x="1730508" y="4685288"/>
-            <a:ext cx="2802935" cy="253910"/>
+            <a:off x="1730508" y="4742302"/>
+            <a:ext cx="2802935" cy="258978"/>
           </a:xfrm>
           <a:prstGeom prst="rect">
             <a:avLst/>
@@ -19858,7 +19895,7 @@
           <a:p>
             <a:pPr algn="l">
               <a:lnSpc>
-                <a:spcPts val="997"/>
+                <a:spcPts val="1022"/>
               </a:lnSpc>
               <a:spcBef>
                 <a:spcPts val="0"/>
@@ -19914,8 +19951,8 @@
         </p:nvSpPr>
         <p:spPr>
           <a:xfrm>
-            <a:off x="4533443" y="4685288"/>
-            <a:ext cx="659514" cy="253910"/>
+            <a:off x="4533443" y="4742302"/>
+            <a:ext cx="659514" cy="258978"/>
           </a:xfrm>
           <a:prstGeom prst="rect">
             <a:avLst/>
@@ -19960,8 +19997,8 @@
         </p:nvSpPr>
         <p:spPr>
           <a:xfrm>
-            <a:off x="4743881" y="4744326"/>
-            <a:ext cx="238638" cy="135834"/>
+            <a:off x="4743881" y="4802290"/>
+            <a:ext cx="238638" cy="139001"/>
           </a:xfrm>
           <a:prstGeom prst="roundRect">
             <a:avLst>
@@ -20024,8 +20061,8 @@
         </p:nvSpPr>
         <p:spPr>
           <a:xfrm>
-            <a:off x="5192957" y="4685288"/>
-            <a:ext cx="577075" cy="253910"/>
+            <a:off x="5192957" y="4742302"/>
+            <a:ext cx="577075" cy="258978"/>
           </a:xfrm>
           <a:prstGeom prst="rect">
             <a:avLst/>
@@ -20062,7 +20099,7 @@
           <a:p>
             <a:pPr algn="r">
               <a:lnSpc>
-                <a:spcPts val="997"/>
+                <a:spcPts val="1022"/>
               </a:lnSpc>
               <a:spcBef>
                 <a:spcPts val="0"/>
@@ -20091,8 +20128,8 @@
         </p:nvSpPr>
         <p:spPr>
           <a:xfrm>
-            <a:off x="5770032" y="4685288"/>
-            <a:ext cx="989271" cy="253910"/>
+            <a:off x="5770032" y="4742302"/>
+            <a:ext cx="989271" cy="258978"/>
           </a:xfrm>
           <a:prstGeom prst="rect">
             <a:avLst/>
@@ -20129,7 +20166,7 @@
           <a:p>
             <a:pPr algn="ctr">
               <a:lnSpc>
-                <a:spcPts val="997"/>
+                <a:spcPts val="1022"/>
               </a:lnSpc>
               <a:spcBef>
                 <a:spcPts val="0"/>
@@ -20158,8 +20195,8 @@
         </p:nvSpPr>
         <p:spPr>
           <a:xfrm>
-            <a:off x="6759303" y="4685288"/>
-            <a:ext cx="989271" cy="253910"/>
+            <a:off x="6759303" y="4742302"/>
+            <a:ext cx="989271" cy="258978"/>
           </a:xfrm>
           <a:prstGeom prst="rect">
             <a:avLst/>
@@ -20196,7 +20233,7 @@
           <a:p>
             <a:pPr algn="ctr">
               <a:lnSpc>
-                <a:spcPts val="997"/>
+                <a:spcPts val="1022"/>
               </a:lnSpc>
               <a:spcBef>
                 <a:spcPts val="0"/>
@@ -20225,8 +20262,8 @@
         </p:nvSpPr>
         <p:spPr>
           <a:xfrm>
-            <a:off x="7748574" y="4685288"/>
-            <a:ext cx="906832" cy="253910"/>
+            <a:off x="7748574" y="4742302"/>
+            <a:ext cx="906832" cy="258978"/>
           </a:xfrm>
           <a:prstGeom prst="rect">
             <a:avLst/>
@@ -20263,7 +20300,7 @@
           <a:p>
             <a:pPr algn="ctr">
               <a:lnSpc>
-                <a:spcPts val="997"/>
+                <a:spcPts val="1022"/>
               </a:lnSpc>
               <a:spcBef>
                 <a:spcPts val="0"/>
@@ -20292,8 +20329,8 @@
         </p:nvSpPr>
         <p:spPr>
           <a:xfrm>
-            <a:off x="1730508" y="4939198"/>
-            <a:ext cx="2802935" cy="253910"/>
+            <a:off x="1730508" y="5001280"/>
+            <a:ext cx="2802935" cy="258978"/>
           </a:xfrm>
           <a:prstGeom prst="rect">
             <a:avLst/>
@@ -20330,7 +20367,7 @@
           <a:p>
             <a:pPr algn="l">
               <a:lnSpc>
-                <a:spcPts val="997"/>
+                <a:spcPts val="1022"/>
               </a:lnSpc>
               <a:spcBef>
                 <a:spcPts val="0"/>
@@ -20395,8 +20432,8 @@
         </p:nvSpPr>
         <p:spPr>
           <a:xfrm>
-            <a:off x="4533443" y="4939198"/>
-            <a:ext cx="659514" cy="253910"/>
+            <a:off x="4533443" y="5001280"/>
+            <a:ext cx="659514" cy="258978"/>
           </a:xfrm>
           <a:prstGeom prst="rect">
             <a:avLst/>
@@ -20441,8 +20478,8 @@
         </p:nvSpPr>
         <p:spPr>
           <a:xfrm>
-            <a:off x="4743881" y="4998236"/>
-            <a:ext cx="238638" cy="135834"/>
+            <a:off x="4743881" y="5061268"/>
+            <a:ext cx="238638" cy="139001"/>
           </a:xfrm>
           <a:prstGeom prst="roundRect">
             <a:avLst>
@@ -20505,8 +20542,8 @@
         </p:nvSpPr>
         <p:spPr>
           <a:xfrm>
-            <a:off x="5192957" y="4939198"/>
-            <a:ext cx="577075" cy="253910"/>
+            <a:off x="5192957" y="5001280"/>
+            <a:ext cx="577075" cy="258978"/>
           </a:xfrm>
           <a:prstGeom prst="rect">
             <a:avLst/>
@@ -20543,7 +20580,7 @@
           <a:p>
             <a:pPr algn="r">
               <a:lnSpc>
-                <a:spcPts val="997"/>
+                <a:spcPts val="1022"/>
               </a:lnSpc>
               <a:spcBef>
                 <a:spcPts val="0"/>
@@ -20572,8 +20609,8 @@
         </p:nvSpPr>
         <p:spPr>
           <a:xfrm>
-            <a:off x="5770032" y="4939198"/>
-            <a:ext cx="989271" cy="253910"/>
+            <a:off x="5770032" y="5001280"/>
+            <a:ext cx="989271" cy="258978"/>
           </a:xfrm>
           <a:prstGeom prst="rect">
             <a:avLst/>
@@ -20610,7 +20647,7 @@
           <a:p>
             <a:pPr algn="ctr">
               <a:lnSpc>
-                <a:spcPts val="997"/>
+                <a:spcPts val="1022"/>
               </a:lnSpc>
               <a:spcBef>
                 <a:spcPts val="0"/>
@@ -20639,8 +20676,8 @@
         </p:nvSpPr>
         <p:spPr>
           <a:xfrm>
-            <a:off x="6759303" y="4939198"/>
-            <a:ext cx="989271" cy="253910"/>
+            <a:off x="6759303" y="5001280"/>
+            <a:ext cx="989271" cy="258978"/>
           </a:xfrm>
           <a:prstGeom prst="rect">
             <a:avLst/>
@@ -20677,7 +20714,7 @@
           <a:p>
             <a:pPr algn="ctr">
               <a:lnSpc>
-                <a:spcPts val="997"/>
+                <a:spcPts val="1022"/>
               </a:lnSpc>
               <a:spcBef>
                 <a:spcPts val="0"/>
@@ -20706,8 +20743,8 @@
         </p:nvSpPr>
         <p:spPr>
           <a:xfrm>
-            <a:off x="7748574" y="4939198"/>
-            <a:ext cx="906832" cy="253910"/>
+            <a:off x="7748574" y="5001280"/>
+            <a:ext cx="906832" cy="258978"/>
           </a:xfrm>
           <a:prstGeom prst="rect">
             <a:avLst/>
@@ -20744,7 +20781,7 @@
           <a:p>
             <a:pPr algn="ctr">
               <a:lnSpc>
-                <a:spcPts val="997"/>
+                <a:spcPts val="1022"/>
               </a:lnSpc>
               <a:spcBef>
                 <a:spcPts val="0"/>
@@ -20773,8 +20810,8 @@
         </p:nvSpPr>
         <p:spPr>
           <a:xfrm>
-            <a:off x="411480" y="5400800"/>
-            <a:ext cx="8243926" cy="126690"/>
+            <a:off x="411480" y="5469841"/>
+            <a:ext cx="8243926" cy="129857"/>
           </a:xfrm>
           <a:prstGeom prst="rect">
             <a:avLst/>
@@ -20789,7 +20826,7 @@
           <a:p>
             <a:pPr algn="l">
               <a:lnSpc>
-                <a:spcPts val="997"/>
+                <a:spcPts val="1022"/>
               </a:lnSpc>
               <a:spcBef>
                 <a:spcPts val="0"/>
@@ -21131,8 +21168,8 @@
         </p:nvSpPr>
         <p:spPr>
           <a:xfrm>
-            <a:off x="411480" y="518638"/>
-            <a:ext cx="11369040" cy="288603"/>
+            <a:off x="411480" y="274320"/>
+            <a:ext cx="11369040" cy="295818"/>
           </a:xfrm>
           <a:prstGeom prst="rect">
             <a:avLst/>
@@ -21147,7 +21184,7 @@
           <a:p>
             <a:pPr algn="l">
               <a:lnSpc>
-                <a:spcPts val="2272"/>
+                <a:spcPts val="2329"/>
               </a:lnSpc>
               <a:spcBef>
                 <a:spcPts val="0"/>
@@ -21275,7 +21312,7 @@
         </p:nvSpPr>
         <p:spPr>
           <a:xfrm>
-            <a:off x="411480" y="1099333"/>
+            <a:off x="411480" y="1093495"/>
             <a:ext cx="11369040" cy="548640"/>
           </a:xfrm>
           <a:prstGeom prst="rect">
@@ -21319,7 +21356,7 @@
         </p:nvSpPr>
         <p:spPr>
           <a:xfrm>
-            <a:off x="457200" y="1122193"/>
+            <a:off x="457200" y="1116355"/>
             <a:ext cx="502920" cy="502920"/>
           </a:xfrm>
           <a:prstGeom prst="roundRect">
@@ -21365,7 +21402,7 @@
         </p:nvSpPr>
         <p:spPr>
           <a:xfrm>
-            <a:off x="1014984" y="1099333"/>
+            <a:off x="1014984" y="1093495"/>
             <a:ext cx="391634" cy="548640"/>
           </a:xfrm>
           <a:prstGeom prst="rect">
@@ -21407,8 +21444,8 @@
         </p:nvSpPr>
         <p:spPr>
           <a:xfrm>
-            <a:off x="1406618" y="1297639"/>
-            <a:ext cx="10328182" cy="152028"/>
+            <a:off x="1406618" y="1289900"/>
+            <a:ext cx="10328182" cy="155829"/>
           </a:xfrm>
           <a:prstGeom prst="rect">
             <a:avLst/>
@@ -21423,7 +21460,7 @@
           <a:p>
             <a:pPr algn="l">
               <a:lnSpc>
-                <a:spcPts val="1197"/>
+                <a:spcPts val="1227"/>
               </a:lnSpc>
               <a:spcBef>
                 <a:spcPts val="0"/>
@@ -21488,7 +21525,7 @@
         </p:nvSpPr>
         <p:spPr>
           <a:xfrm>
-            <a:off x="411480" y="1675405"/>
+            <a:off x="411480" y="1669567"/>
             <a:ext cx="11369040" cy="548640"/>
           </a:xfrm>
           <a:prstGeom prst="rect">
@@ -21532,7 +21569,7 @@
         </p:nvSpPr>
         <p:spPr>
           <a:xfrm>
-            <a:off x="457200" y="1698265"/>
+            <a:off x="457200" y="1692427"/>
             <a:ext cx="502920" cy="502920"/>
           </a:xfrm>
           <a:prstGeom prst="roundRect">
@@ -21578,7 +21615,7 @@
         </p:nvSpPr>
         <p:spPr>
           <a:xfrm>
-            <a:off x="1014984" y="1675405"/>
+            <a:off x="1014984" y="1669567"/>
             <a:ext cx="440189" cy="548640"/>
           </a:xfrm>
           <a:prstGeom prst="rect">
@@ -21620,8 +21657,8 @@
         </p:nvSpPr>
         <p:spPr>
           <a:xfrm>
-            <a:off x="1455173" y="1873711"/>
-            <a:ext cx="10279627" cy="152028"/>
+            <a:off x="1455173" y="1865972"/>
+            <a:ext cx="10279627" cy="155829"/>
           </a:xfrm>
           <a:prstGeom prst="rect">
             <a:avLst/>
@@ -21636,7 +21673,7 @@
           <a:p>
             <a:pPr algn="l">
               <a:lnSpc>
-                <a:spcPts val="1197"/>
+                <a:spcPts val="1227"/>
               </a:lnSpc>
               <a:spcBef>
                 <a:spcPts val="0"/>
@@ -21746,7 +21783,7 @@
         </p:nvSpPr>
         <p:spPr>
           <a:xfrm>
-            <a:off x="411480" y="2251477"/>
+            <a:off x="411480" y="2245639"/>
             <a:ext cx="11369040" cy="548640"/>
           </a:xfrm>
           <a:prstGeom prst="rect">
@@ -21790,7 +21827,7 @@
         </p:nvSpPr>
         <p:spPr>
           <a:xfrm>
-            <a:off x="457200" y="2274337"/>
+            <a:off x="457200" y="2268499"/>
             <a:ext cx="502920" cy="502920"/>
           </a:xfrm>
           <a:prstGeom prst="roundRect">
@@ -21836,7 +21873,7 @@
         </p:nvSpPr>
         <p:spPr>
           <a:xfrm>
-            <a:off x="1014984" y="2251477"/>
+            <a:off x="1014984" y="2245639"/>
             <a:ext cx="756802" cy="548640"/>
           </a:xfrm>
           <a:prstGeom prst="rect">
@@ -21878,8 +21915,8 @@
         </p:nvSpPr>
         <p:spPr>
           <a:xfrm>
-            <a:off x="1771786" y="2449783"/>
-            <a:ext cx="9963014" cy="152028"/>
+            <a:off x="1771786" y="2442044"/>
+            <a:ext cx="9963014" cy="155829"/>
           </a:xfrm>
           <a:prstGeom prst="rect">
             <a:avLst/>
@@ -21894,7 +21931,7 @@
           <a:p>
             <a:pPr algn="l">
               <a:lnSpc>
-                <a:spcPts val="1197"/>
+                <a:spcPts val="1227"/>
               </a:lnSpc>
               <a:spcBef>
                 <a:spcPts val="0"/>
@@ -21968,7 +22005,7 @@
         </p:nvSpPr>
         <p:spPr>
           <a:xfrm>
-            <a:off x="411480" y="3602174"/>
+            <a:off x="411480" y="3591382"/>
             <a:ext cx="2807970" cy="1234440"/>
           </a:xfrm>
           <a:prstGeom prst="rect">
@@ -22010,7 +22047,7 @@
           <a:p>
             <a:pPr algn="ctr">
               <a:lnSpc>
-                <a:spcPts val="1795"/>
+                <a:spcPts val="1840"/>
               </a:lnSpc>
               <a:spcBef>
                 <a:spcPts val="0"/>
@@ -22054,7 +22091,7 @@
           <a:p>
             <a:pPr algn="ctr">
               <a:lnSpc>
-                <a:spcPts val="997"/>
+                <a:spcPts val="1022"/>
               </a:lnSpc>
               <a:spcBef>
                 <a:spcPts val="0"/>
@@ -22146,7 +22183,7 @@
         </p:nvSpPr>
         <p:spPr>
           <a:xfrm>
-            <a:off x="3265170" y="3602174"/>
+            <a:off x="3265170" y="3591382"/>
             <a:ext cx="2807970" cy="1234440"/>
           </a:xfrm>
           <a:prstGeom prst="rect">
@@ -22188,7 +22225,7 @@
           <a:p>
             <a:pPr algn="ctr">
               <a:lnSpc>
-                <a:spcPts val="1795"/>
+                <a:spcPts val="1840"/>
               </a:lnSpc>
               <a:spcBef>
                 <a:spcPts val="0"/>
@@ -22232,7 +22269,7 @@
           <a:p>
             <a:pPr algn="ctr">
               <a:lnSpc>
-                <a:spcPts val="997"/>
+                <a:spcPts val="1022"/>
               </a:lnSpc>
               <a:spcBef>
                 <a:spcPts val="0"/>
@@ -22306,7 +22343,7 @@
         </p:nvSpPr>
         <p:spPr>
           <a:xfrm>
-            <a:off x="6118860" y="3602174"/>
+            <a:off x="6118860" y="3591382"/>
             <a:ext cx="2807970" cy="1234440"/>
           </a:xfrm>
           <a:prstGeom prst="rect">
@@ -22348,7 +22385,7 @@
           <a:p>
             <a:pPr algn="ctr">
               <a:lnSpc>
-                <a:spcPts val="1795"/>
+                <a:spcPts val="1840"/>
               </a:lnSpc>
               <a:spcBef>
                 <a:spcPts val="0"/>
@@ -22392,7 +22429,7 @@
           <a:p>
             <a:pPr algn="ctr">
               <a:lnSpc>
-                <a:spcPts val="997"/>
+                <a:spcPts val="1022"/>
               </a:lnSpc>
               <a:spcBef>
                 <a:spcPts val="0"/>
@@ -22466,7 +22503,7 @@
         </p:nvSpPr>
         <p:spPr>
           <a:xfrm>
-            <a:off x="8972550" y="3602174"/>
+            <a:off x="8972550" y="3591382"/>
             <a:ext cx="2807970" cy="1234440"/>
           </a:xfrm>
           <a:prstGeom prst="rect">
@@ -22508,7 +22545,7 @@
           <a:p>
             <a:pPr algn="ctr">
               <a:lnSpc>
-                <a:spcPts val="1795"/>
+                <a:spcPts val="1840"/>
               </a:lnSpc>
               <a:spcBef>
                 <a:spcPts val="0"/>
@@ -22552,7 +22589,7 @@
           <a:p>
             <a:pPr algn="ctr">
               <a:lnSpc>
-                <a:spcPts val="997"/>
+                <a:spcPts val="1022"/>
               </a:lnSpc>
               <a:spcBef>
                 <a:spcPts val="0"/>
@@ -22635,8 +22672,8 @@
         </p:nvSpPr>
         <p:spPr>
           <a:xfrm>
-            <a:off x="411480" y="5138366"/>
-            <a:ext cx="11369040" cy="857094"/>
+            <a:off x="411480" y="5127574"/>
+            <a:ext cx="11369040" cy="871664"/>
           </a:xfrm>
           <a:prstGeom prst="rect">
             <a:avLst/>
@@ -22685,8 +22722,8 @@
         </p:nvSpPr>
         <p:spPr>
           <a:xfrm>
-            <a:off x="411480" y="5138366"/>
-            <a:ext cx="32004" cy="857094"/>
+            <a:off x="411480" y="5127574"/>
+            <a:ext cx="32004" cy="871664"/>
           </a:xfrm>
           <a:prstGeom prst="rect">
             <a:avLst/>
@@ -22729,8 +22766,8 @@
         </p:nvSpPr>
         <p:spPr>
           <a:xfrm>
-            <a:off x="484632" y="5211518"/>
-            <a:ext cx="11222736" cy="236488"/>
+            <a:off x="484632" y="5200726"/>
+            <a:ext cx="11222736" cy="242400"/>
           </a:xfrm>
           <a:prstGeom prst="rect">
             <a:avLst/>
@@ -22745,7 +22782,7 @@
           <a:p>
             <a:pPr algn="l">
               <a:lnSpc>
-                <a:spcPts val="1862"/>
+                <a:spcPts val="1908"/>
               </a:lnSpc>
               <a:spcBef>
                 <a:spcPts val="0"/>
@@ -22828,8 +22865,8 @@
         </p:nvSpPr>
         <p:spPr>
           <a:xfrm>
-            <a:off x="484632" y="5484582"/>
-            <a:ext cx="11222736" cy="152028"/>
+            <a:off x="484632" y="5479702"/>
+            <a:ext cx="11222736" cy="155829"/>
           </a:xfrm>
           <a:prstGeom prst="rect">
             <a:avLst/>
@@ -22844,7 +22881,7 @@
           <a:p>
             <a:pPr algn="l">
               <a:lnSpc>
-                <a:spcPts val="1197"/>
+                <a:spcPts val="1227"/>
               </a:lnSpc>
               <a:spcBef>
                 <a:spcPts val="0"/>
@@ -23098,8 +23135,8 @@
         </p:nvSpPr>
         <p:spPr>
           <a:xfrm>
-            <a:off x="411480" y="6162328"/>
-            <a:ext cx="11369040" cy="126690"/>
+            <a:off x="411480" y="6164999"/>
+            <a:ext cx="11369040" cy="129857"/>
           </a:xfrm>
           <a:prstGeom prst="rect">
             <a:avLst/>
@@ -23114,7 +23151,7 @@
           <a:p>
             <a:pPr algn="l">
               <a:lnSpc>
-                <a:spcPts val="997"/>
+                <a:spcPts val="1022"/>
               </a:lnSpc>
               <a:spcBef>
                 <a:spcPts val="0"/>

--- a/eval/out/agdev_demo.pptx
+++ b/eval/out/agdev_demo.pptx
@@ -12540,7 +12540,7 @@
       </p:sp>
       <p:sp>
         <p:nvSpPr>
-          <p:cNvPr id="102" name="Rounded Rectangle 101"/>
+          <p:cNvPr id="102" name="de:tab"/>
           <p:cNvSpPr/>
           <p:nvPr/>
         </p:nvSpPr>
